--- a/Ch01_Music_in_Antiquity.pptx
+++ b/Ch01_Music_in_Antiquity.pptx
@@ -2542,7 +2542,7 @@
               <a:buNone/>
             </a:pPr>
             <a:r>
-              <a:rPr lang="en-US" sz="1100" spc="300" kern="0" dirty="0">
+              <a:rPr lang="en-US" sz="1400" spc="300" kern="0" dirty="0">
                 <a:solidFill>
                   <a:srgbClr val="E8D8A8"/>
                 </a:solidFill>
@@ -2552,7 +2552,7 @@
               </a:rPr>
               <a:t>A HISTORY OF WESTERN MUSIC · TENTH EDITION</a:t>
             </a:r>
-            <a:endParaRPr lang="en-US" sz="1100" dirty="0"/>
+            <a:endParaRPr lang="en-US" sz="1400" dirty="0"/>
           </a:p>
         </p:txBody>
       </p:sp>
@@ -2711,14 +2711,14 @@
           <a:ln/>
         </p:spPr>
         <p:txBody>
-          <a:bodyPr wrap="square" rtlCol="0" anchor="ctr"/>
+          <a:bodyPr wrap="square" rtlCol="0" anchor="t"/>
           <a:lstStyle/>
           <a:p>
             <a:pPr algn="ctr" indent="0" marL="0">
               <a:buNone/>
             </a:pPr>
             <a:r>
-              <a:rPr lang="en-US" sz="1100" dirty="0">
+              <a:rPr lang="en-US" sz="1400" dirty="0">
                 <a:solidFill>
                   <a:srgbClr val="C8A020"/>
                 </a:solidFill>
@@ -2728,7 +2728,7 @@
               </a:rPr>
               <a:t>Textbook pp. 4–19</a:t>
             </a:r>
-            <a:endParaRPr lang="en-US" sz="1100" dirty="0"/>
+            <a:endParaRPr lang="en-US" sz="1400" dirty="0"/>
           </a:p>
         </p:txBody>
       </p:sp>
@@ -2881,14 +2881,14 @@
           <a:ln/>
         </p:spPr>
         <p:txBody>
-          <a:bodyPr wrap="square" rtlCol="0" anchor="ctr"/>
+          <a:bodyPr wrap="square" rtlCol="0" anchor="t"/>
           <a:lstStyle/>
           <a:p>
             <a:pPr algn="ctr" indent="0" marL="0">
               <a:buNone/>
             </a:pPr>
             <a:r>
-              <a:rPr lang="en-US" sz="1300" i="1" dirty="0">
+              <a:rPr lang="en-US" sz="1400" i="1" dirty="0">
                 <a:solidFill>
                   <a:srgbClr val="E8D8A8"/>
                 </a:solidFill>
@@ -2898,14 +2898,14 @@
               </a:rPr>
               <a:t>古希臘是現存資料最豐富的古代音樂文明，保存了：</a:t>
             </a:r>
-            <a:endParaRPr lang="en-US" sz="1300" dirty="0"/>
+            <a:endParaRPr lang="en-US" sz="1400" dirty="0"/>
           </a:p>
           <a:p>
             <a:pPr algn="ctr" indent="0" marL="0">
               <a:buNone/>
             </a:pPr>
             <a:r>
-              <a:rPr lang="en-US" sz="1300" i="1" dirty="0">
+              <a:rPr lang="en-US" sz="1400" i="1" dirty="0">
                 <a:solidFill>
                   <a:srgbClr val="E8D8A8"/>
                 </a:solidFill>
@@ -2915,7 +2915,7 @@
               </a:rPr>
               <a:t>40 餘件音樂作品或片段 · 大量文字理論著作 · 數百件陶器圖像 · 部分實物樂器</a:t>
             </a:r>
-            <a:endParaRPr lang="en-US" sz="1300" dirty="0"/>
+            <a:endParaRPr lang="en-US" sz="1400" dirty="0"/>
           </a:p>
         </p:txBody>
       </p:sp>
@@ -2964,7 +2964,7 @@
               <a:buNone/>
             </a:pPr>
             <a:r>
-              <a:rPr lang="en-US" sz="1300" b="1" dirty="0">
+              <a:rPr lang="en-US" sz="1400" b="1" dirty="0">
                 <a:solidFill>
                   <a:srgbClr val="C8A020"/>
                 </a:solidFill>
@@ -2972,9 +2972,26 @@
                 <a:ea typeface="Georgia" pitchFamily="34" charset="-122"/>
                 <a:cs typeface="Georgia" pitchFamily="34" charset="-120"/>
               </a:rPr>
-              <a:t>音樂與宗教 Music &amp; Religion</a:t>
-            </a:r>
-            <a:endParaRPr lang="en-US" sz="1300" dirty="0"/>
+              <a:t>音樂與宗教</a:t>
+            </a:r>
+            <a:endParaRPr lang="en-US" sz="1400" dirty="0"/>
+          </a:p>
+          <a:p>
+            <a:pPr algn="ctr" indent="0" marL="0">
+              <a:buNone/>
+            </a:pPr>
+            <a:r>
+              <a:rPr lang="en-US" sz="1400" b="1" dirty="0">
+                <a:solidFill>
+                  <a:srgbClr val="C8A020"/>
+                </a:solidFill>
+                <a:latin typeface="Georgia" pitchFamily="34" charset="0"/>
+                <a:ea typeface="Georgia" pitchFamily="34" charset="-122"/>
+                <a:cs typeface="Georgia" pitchFamily="34" charset="-120"/>
+              </a:rPr>
+              <a:t>Music &amp; Religion</a:t>
+            </a:r>
+            <a:endParaRPr lang="en-US" sz="1400" dirty="0"/>
           </a:p>
         </p:txBody>
       </p:sp>
@@ -3027,7 +3044,7 @@
               <a:buChar char="•"/>
             </a:pPr>
             <a:r>
-              <a:rPr lang="en-US" sz="1100" dirty="0">
+              <a:rPr lang="en-US" sz="1400" dirty="0">
                 <a:solidFill>
                   <a:srgbClr val="E8D8A8"/>
                 </a:solidFill>
@@ -3035,9 +3052,9 @@
                 <a:ea typeface="Calibri" pitchFamily="34" charset="-122"/>
                 <a:cs typeface="Calibri" pitchFamily="34" charset="-120"/>
               </a:rPr>
-              <a:t>音樂起源被神話化——阿波羅、俄耳甫斯等神祇</a:t>
-            </a:r>
-            <a:endParaRPr lang="en-US" sz="1100" dirty="0"/>
+              <a:t>起源被神話化：阿波羅、俄耳甫斯</a:t>
+            </a:r>
+            <a:endParaRPr lang="en-US" sz="1400" dirty="0"/>
           </a:p>
           <a:p>
             <a:pPr marL="342900" indent="-342900">
@@ -3048,7 +3065,7 @@
               <a:buChar char="•"/>
             </a:pPr>
             <a:r>
-              <a:rPr lang="en-US" sz="1100" dirty="0">
+              <a:rPr lang="en-US" sz="1400" dirty="0">
                 <a:solidFill>
                   <a:srgbClr val="E8D8A8"/>
                 </a:solidFill>
@@ -3056,9 +3073,9 @@
                 <a:ea typeface="Calibri" pitchFamily="34" charset="-122"/>
                 <a:cs typeface="Calibri" pitchFamily="34" charset="-120"/>
               </a:rPr>
-              <a:t>Music's origins were mythologized (Apollo, Orpheus)</a:t>
-            </a:r>
-            <a:endParaRPr lang="en-US" sz="1100" dirty="0"/>
+              <a:t>Origins mythologized (Apollo, Orpheus)</a:t>
+            </a:r>
+            <a:endParaRPr lang="en-US" sz="1400" dirty="0"/>
           </a:p>
           <a:p>
             <a:pPr marL="342900" indent="-342900">
@@ -3069,7 +3086,7 @@
               <a:buChar char="•"/>
             </a:pPr>
             <a:r>
-              <a:rPr lang="en-US" sz="1100" dirty="0">
+              <a:rPr lang="en-US" sz="1400" dirty="0">
                 <a:solidFill>
                   <a:srgbClr val="E8D8A8"/>
                 </a:solidFill>
@@ -3077,9 +3094,9 @@
                 <a:ea typeface="Calibri" pitchFamily="34" charset="-122"/>
                 <a:cs typeface="Calibri" pitchFamily="34" charset="-120"/>
               </a:rPr>
-              <a:t>遍及所有希臘生活面向：工作、軍事、學校、宗教、詩歌、劇場</a:t>
-            </a:r>
-            <a:endParaRPr lang="en-US" sz="1100" dirty="0"/>
+              <a:t>遍及希臘生活：軍事、學校、宗教、劇場</a:t>
+            </a:r>
+            <a:endParaRPr lang="en-US" sz="1400" dirty="0"/>
           </a:p>
           <a:p>
             <a:pPr marL="342900" indent="-342900">
@@ -3090,7 +3107,7 @@
               <a:buChar char="•"/>
             </a:pPr>
             <a:r>
-              <a:rPr lang="en-US" sz="1100" dirty="0">
+              <a:rPr lang="en-US" sz="1400" dirty="0">
                 <a:solidFill>
                   <a:srgbClr val="E8D8A8"/>
                 </a:solidFill>
@@ -3100,7 +3117,7 @@
               </a:rPr>
               <a:t>Pervaded all of Greek life</a:t>
             </a:r>
-            <a:endParaRPr lang="en-US" sz="1100" dirty="0"/>
+            <a:endParaRPr lang="en-US" sz="1400" dirty="0"/>
           </a:p>
         </p:txBody>
       </p:sp>
@@ -3149,7 +3166,7 @@
               <a:buNone/>
             </a:pPr>
             <a:r>
-              <a:rPr lang="en-US" sz="1300" b="1" dirty="0">
+              <a:rPr lang="en-US" sz="1400" b="1" dirty="0">
                 <a:solidFill>
                   <a:srgbClr val="C8A020"/>
                 </a:solidFill>
@@ -3157,9 +3174,26 @@
                 <a:ea typeface="Georgia" pitchFamily="34" charset="-122"/>
                 <a:cs typeface="Georgia" pitchFamily="34" charset="-120"/>
               </a:rPr>
-              <a:t>音樂與詩歌 Music &amp; Poetry</a:t>
-            </a:r>
-            <a:endParaRPr lang="en-US" sz="1300" dirty="0"/>
+              <a:t>音樂與詩歌</a:t>
+            </a:r>
+            <a:endParaRPr lang="en-US" sz="1400" dirty="0"/>
+          </a:p>
+          <a:p>
+            <a:pPr algn="ctr" indent="0" marL="0">
+              <a:buNone/>
+            </a:pPr>
+            <a:r>
+              <a:rPr lang="en-US" sz="1400" b="1" dirty="0">
+                <a:solidFill>
+                  <a:srgbClr val="C8A020"/>
+                </a:solidFill>
+                <a:latin typeface="Georgia" pitchFamily="34" charset="0"/>
+                <a:ea typeface="Georgia" pitchFamily="34" charset="-122"/>
+                <a:cs typeface="Georgia" pitchFamily="34" charset="-120"/>
+              </a:rPr>
+              <a:t>Music &amp; Poetry</a:t>
+            </a:r>
+            <a:endParaRPr lang="en-US" sz="1400" dirty="0"/>
           </a:p>
         </p:txBody>
       </p:sp>
@@ -3212,7 +3246,7 @@
               <a:buChar char="•"/>
             </a:pPr>
             <a:r>
-              <a:rPr lang="en-US" sz="1100" dirty="0">
+              <a:rPr lang="en-US" sz="1400" dirty="0">
                 <a:solidFill>
                   <a:srgbClr val="E8D8A8"/>
                 </a:solidFill>
@@ -3220,9 +3254,9 @@
                 <a:ea typeface="Calibri" pitchFamily="34" charset="-122"/>
                 <a:cs typeface="Calibri" pitchFamily="34" charset="-120"/>
               </a:rPr>
-              <a:t>「melos」= 旋律、歌詞、舞蹈三合一</a:t>
-            </a:r>
-            <a:endParaRPr lang="en-US" sz="1100" dirty="0"/>
+              <a:t>「melos」= 旋律＋歌詞＋舞蹈</a:t>
+            </a:r>
+            <a:endParaRPr lang="en-US" sz="1400" dirty="0"/>
           </a:p>
           <a:p>
             <a:pPr marL="342900" indent="-342900">
@@ -3233,7 +3267,7 @@
               <a:buChar char="•"/>
             </a:pPr>
             <a:r>
-              <a:rPr lang="en-US" sz="1100" dirty="0">
+              <a:rPr lang="en-US" sz="1400" dirty="0">
                 <a:solidFill>
                   <a:srgbClr val="E8D8A8"/>
                 </a:solidFill>
@@ -3241,9 +3275,9 @@
                 <a:ea typeface="Calibri" pitchFamily="34" charset="-122"/>
                 <a:cs typeface="Calibri" pitchFamily="34" charset="-120"/>
               </a:rPr>
-              <a:t>Melos: melody + text + stylized dance</a:t>
-            </a:r>
-            <a:endParaRPr lang="en-US" sz="1100" dirty="0"/>
+              <a:t>Melos: melody + text + dance</a:t>
+            </a:r>
+            <a:endParaRPr lang="en-US" sz="1400" dirty="0"/>
           </a:p>
           <a:p>
             <a:pPr marL="342900" indent="-342900">
@@ -3254,7 +3288,7 @@
               <a:buChar char="•"/>
             </a:pPr>
             <a:r>
-              <a:rPr lang="en-US" sz="1100" dirty="0">
+              <a:rPr lang="en-US" sz="1400" dirty="0">
                 <a:solidFill>
                   <a:srgbClr val="E8D8A8"/>
                 </a:solidFill>
@@ -3262,9 +3296,9 @@
                 <a:ea typeface="Calibri" pitchFamily="34" charset="-122"/>
                 <a:cs typeface="Calibri" pitchFamily="34" charset="-120"/>
               </a:rPr>
-              <a:t>希臘人主要是單音音樂（monophonic）</a:t>
-            </a:r>
-            <a:endParaRPr lang="en-US" sz="1100" dirty="0"/>
+              <a:t>主要是單音音樂 monophonic</a:t>
+            </a:r>
+            <a:endParaRPr lang="en-US" sz="1400" dirty="0"/>
           </a:p>
           <a:p>
             <a:pPr marL="342900" indent="-342900">
@@ -3275,7 +3309,7 @@
               <a:buChar char="•"/>
             </a:pPr>
             <a:r>
-              <a:rPr lang="en-US" sz="1100" dirty="0">
+              <a:rPr lang="en-US" sz="1400" dirty="0">
                 <a:solidFill>
                   <a:srgbClr val="E8D8A8"/>
                 </a:solidFill>
@@ -3283,9 +3317,9 @@
                 <a:ea typeface="Calibri" pitchFamily="34" charset="-122"/>
                 <a:cs typeface="Calibri" pitchFamily="34" charset="-120"/>
               </a:rPr>
-              <a:t>Music primarily monophonic</a:t>
-            </a:r>
-            <a:endParaRPr lang="en-US" sz="1100" dirty="0"/>
+              <a:t>「lyric poetry」= 配里拉琴的詩</a:t>
+            </a:r>
+            <a:endParaRPr lang="en-US" sz="1400" dirty="0"/>
           </a:p>
           <a:p>
             <a:pPr marL="342900" indent="-342900">
@@ -3296,7 +3330,7 @@
               <a:buChar char="•"/>
             </a:pPr>
             <a:r>
-              <a:rPr lang="en-US" sz="1100" dirty="0">
+              <a:rPr lang="en-US" sz="1400" dirty="0">
                 <a:solidFill>
                   <a:srgbClr val="E8D8A8"/>
                 </a:solidFill>
@@ -3304,10 +3338,128 @@
                 <a:ea typeface="Calibri" pitchFamily="34" charset="-122"/>
                 <a:cs typeface="Calibri" pitchFamily="34" charset="-120"/>
               </a:rPr>
-              <a:t>「lyric poetry」= 配合里拉琴演唱的詩</a:t>
-            </a:r>
-            <a:endParaRPr lang="en-US" sz="1100" dirty="0"/>
-          </a:p>
+              <a:t>Lyric poetry = sung to the lyre</a:t>
+            </a:r>
+            <a:endParaRPr lang="en-US" sz="1400" dirty="0"/>
+          </a:p>
+        </p:txBody>
+      </p:sp>
+      <p:sp>
+        <p:nvSpPr>
+          <p:cNvPr id="15" name="Shape 13"/>
+          <p:cNvSpPr/>
+          <p:nvPr/>
+        </p:nvSpPr>
+        <p:spPr>
+          <a:xfrm>
+            <a:off x="6217920" y="1508760"/>
+            <a:ext cx="2788920" cy="3337560"/>
+          </a:xfrm>
+          <a:prstGeom prst="rect">
+            <a:avLst/>
+          </a:prstGeom>
+          <a:solidFill>
+            <a:srgbClr val="3A2015"/>
+          </a:solidFill>
+          <a:ln/>
+        </p:spPr>
+      </p:sp>
+      <p:sp>
+        <p:nvSpPr>
+          <p:cNvPr id="16" name="Text 14"/>
+          <p:cNvSpPr/>
+          <p:nvPr/>
+        </p:nvSpPr>
+        <p:spPr>
+          <a:xfrm>
+            <a:off x="6309360" y="1600200"/>
+            <a:ext cx="2606040" cy="502920"/>
+          </a:xfrm>
+          <a:prstGeom prst="rect">
+            <a:avLst/>
+          </a:prstGeom>
+          <a:noFill/>
+          <a:ln/>
+        </p:spPr>
+        <p:txBody>
+          <a:bodyPr wrap="square" rtlCol="0" anchor="ctr"/>
+          <a:lstStyle/>
+          <a:p>
+            <a:pPr algn="ctr" indent="0" marL="0">
+              <a:buNone/>
+            </a:pPr>
+            <a:r>
+              <a:rPr lang="en-US" sz="1400" b="1" dirty="0">
+                <a:solidFill>
+                  <a:srgbClr val="C8A020"/>
+                </a:solidFill>
+                <a:latin typeface="Georgia" pitchFamily="34" charset="0"/>
+                <a:ea typeface="Georgia" pitchFamily="34" charset="-122"/>
+                <a:cs typeface="Georgia" pitchFamily="34" charset="-120"/>
+              </a:rPr>
+              <a:t>音樂與數字</a:t>
+            </a:r>
+            <a:endParaRPr lang="en-US" sz="1400" dirty="0"/>
+          </a:p>
+          <a:p>
+            <a:pPr algn="ctr" indent="0" marL="0">
+              <a:buNone/>
+            </a:pPr>
+            <a:r>
+              <a:rPr lang="en-US" sz="1400" b="1" dirty="0">
+                <a:solidFill>
+                  <a:srgbClr val="C8A020"/>
+                </a:solidFill>
+                <a:latin typeface="Georgia" pitchFamily="34" charset="0"/>
+                <a:ea typeface="Georgia" pitchFamily="34" charset="-122"/>
+                <a:cs typeface="Georgia" pitchFamily="34" charset="-120"/>
+              </a:rPr>
+              <a:t>Music &amp; Numbers</a:t>
+            </a:r>
+            <a:endParaRPr lang="en-US" sz="1400" dirty="0"/>
+          </a:p>
+        </p:txBody>
+      </p:sp>
+      <p:sp>
+        <p:nvSpPr>
+          <p:cNvPr id="17" name="Shape 15"/>
+          <p:cNvSpPr/>
+          <p:nvPr/>
+        </p:nvSpPr>
+        <p:spPr>
+          <a:xfrm>
+            <a:off x="6400800" y="2121408"/>
+            <a:ext cx="2423160" cy="27432"/>
+          </a:xfrm>
+          <a:prstGeom prst="rect">
+            <a:avLst/>
+          </a:prstGeom>
+          <a:solidFill>
+            <a:srgbClr val="C8A020"/>
+          </a:solidFill>
+          <a:ln/>
+        </p:spPr>
+      </p:sp>
+      <p:sp>
+        <p:nvSpPr>
+          <p:cNvPr id="18" name="Text 16"/>
+          <p:cNvSpPr/>
+          <p:nvPr/>
+        </p:nvSpPr>
+        <p:spPr>
+          <a:xfrm>
+            <a:off x="6309360" y="2176272"/>
+            <a:ext cx="2606040" cy="2606040"/>
+          </a:xfrm>
+          <a:prstGeom prst="rect">
+            <a:avLst/>
+          </a:prstGeom>
+          <a:noFill/>
+          <a:ln/>
+        </p:spPr>
+        <p:txBody>
+          <a:bodyPr wrap="square" rtlCol="0" anchor="ctr"/>
+          <a:lstStyle/>
           <a:p>
             <a:pPr marL="342900" indent="-342900">
               <a:spcAft>
@@ -3317,7 +3469,7 @@
               <a:buChar char="•"/>
             </a:pPr>
             <a:r>
-              <a:rPr lang="en-US" sz="1100" dirty="0">
+              <a:rPr lang="en-US" sz="1400" dirty="0">
                 <a:solidFill>
                   <a:srgbClr val="E8D8A8"/>
                 </a:solidFill>
@@ -3325,111 +3477,10 @@
                 <a:ea typeface="Calibri" pitchFamily="34" charset="-122"/>
                 <a:cs typeface="Calibri" pitchFamily="34" charset="-120"/>
               </a:rPr>
-              <a:t>Lyric poetry = sung to the lyre</a:t>
-            </a:r>
-            <a:endParaRPr lang="en-US" sz="1100" dirty="0"/>
-          </a:p>
-        </p:txBody>
-      </p:sp>
-      <p:sp>
-        <p:nvSpPr>
-          <p:cNvPr id="15" name="Shape 13"/>
-          <p:cNvSpPr/>
-          <p:nvPr/>
-        </p:nvSpPr>
-        <p:spPr>
-          <a:xfrm>
-            <a:off x="6217920" y="1508760"/>
-            <a:ext cx="2788920" cy="3337560"/>
-          </a:xfrm>
-          <a:prstGeom prst="rect">
-            <a:avLst/>
-          </a:prstGeom>
-          <a:solidFill>
-            <a:srgbClr val="3A2015"/>
-          </a:solidFill>
-          <a:ln/>
-        </p:spPr>
-      </p:sp>
-      <p:sp>
-        <p:nvSpPr>
-          <p:cNvPr id="16" name="Text 14"/>
-          <p:cNvSpPr/>
-          <p:nvPr/>
-        </p:nvSpPr>
-        <p:spPr>
-          <a:xfrm>
-            <a:off x="6309360" y="1600200"/>
-            <a:ext cx="2606040" cy="502920"/>
-          </a:xfrm>
-          <a:prstGeom prst="rect">
-            <a:avLst/>
-          </a:prstGeom>
-          <a:noFill/>
-          <a:ln/>
-        </p:spPr>
-        <p:txBody>
-          <a:bodyPr wrap="square" rtlCol="0" anchor="ctr"/>
-          <a:lstStyle/>
-          <a:p>
-            <a:pPr algn="ctr" indent="0" marL="0">
-              <a:buNone/>
-            </a:pPr>
-            <a:r>
-              <a:rPr lang="en-US" sz="1300" b="1" dirty="0">
-                <a:solidFill>
-                  <a:srgbClr val="C8A020"/>
-                </a:solidFill>
-                <a:latin typeface="Georgia" pitchFamily="34" charset="0"/>
-                <a:ea typeface="Georgia" pitchFamily="34" charset="-122"/>
-                <a:cs typeface="Georgia" pitchFamily="34" charset="-120"/>
-              </a:rPr>
-              <a:t>音樂與數字 Music &amp; Numbers</a:t>
-            </a:r>
-            <a:endParaRPr lang="en-US" sz="1300" dirty="0"/>
-          </a:p>
-        </p:txBody>
-      </p:sp>
-      <p:sp>
-        <p:nvSpPr>
-          <p:cNvPr id="17" name="Shape 15"/>
-          <p:cNvSpPr/>
-          <p:nvPr/>
-        </p:nvSpPr>
-        <p:spPr>
-          <a:xfrm>
-            <a:off x="6400800" y="2121408"/>
-            <a:ext cx="2423160" cy="27432"/>
-          </a:xfrm>
-          <a:prstGeom prst="rect">
-            <a:avLst/>
-          </a:prstGeom>
-          <a:solidFill>
-            <a:srgbClr val="C8A020"/>
-          </a:solidFill>
-          <a:ln/>
-        </p:spPr>
-      </p:sp>
-      <p:sp>
-        <p:nvSpPr>
-          <p:cNvPr id="18" name="Text 16"/>
-          <p:cNvSpPr/>
-          <p:nvPr/>
-        </p:nvSpPr>
-        <p:spPr>
-          <a:xfrm>
-            <a:off x="6309360" y="2176272"/>
-            <a:ext cx="2606040" cy="2606040"/>
-          </a:xfrm>
-          <a:prstGeom prst="rect">
-            <a:avLst/>
-          </a:prstGeom>
-          <a:noFill/>
-          <a:ln/>
-        </p:spPr>
-        <p:txBody>
-          <a:bodyPr wrap="square" rtlCol="0" anchor="ctr"/>
-          <a:lstStyle/>
+              <a:t>Pythagoras：8度=2:1, 5度=3:2</a:t>
+            </a:r>
+            <a:endParaRPr lang="en-US" sz="1400" dirty="0"/>
+          </a:p>
           <a:p>
             <a:pPr marL="342900" indent="-342900">
               <a:spcAft>
@@ -3439,7 +3490,7 @@
               <a:buChar char="•"/>
             </a:pPr>
             <a:r>
-              <a:rPr lang="en-US" sz="1100" dirty="0">
+              <a:rPr lang="en-US" sz="1400" dirty="0">
                 <a:solidFill>
                   <a:srgbClr val="E8D8A8"/>
                 </a:solidFill>
@@ -3447,9 +3498,9 @@
                 <a:ea typeface="Calibri" pitchFamily="34" charset="-122"/>
                 <a:cs typeface="Calibri" pitchFamily="34" charset="-120"/>
               </a:rPr>
-              <a:t>Pythagoras：八度 = 2:1，五度 = 3:2，四度 = 4:3</a:t>
-            </a:r>
-            <a:endParaRPr lang="en-US" sz="1100" dirty="0"/>
+              <a:t>Octave 2:1, Fifth 3:2, Fourth 4:3</a:t>
+            </a:r>
+            <a:endParaRPr lang="en-US" sz="1400" dirty="0"/>
           </a:p>
           <a:p>
             <a:pPr marL="342900" indent="-342900">
@@ -3460,7 +3511,7 @@
               <a:buChar char="•"/>
             </a:pPr>
             <a:r>
-              <a:rPr lang="en-US" sz="1100" dirty="0">
+              <a:rPr lang="en-US" sz="1400" dirty="0">
                 <a:solidFill>
                   <a:srgbClr val="E8D8A8"/>
                 </a:solidFill>
@@ -3468,9 +3519,9 @@
                 <a:ea typeface="Calibri" pitchFamily="34" charset="-122"/>
                 <a:cs typeface="Calibri" pitchFamily="34" charset="-120"/>
               </a:rPr>
-              <a:t>Octave 2:1, Fifth 3:2, Fourth 4:3</a:t>
-            </a:r>
-            <a:endParaRPr lang="en-US" sz="1100" dirty="0"/>
+              <a:t>harmonia = 秩序、數學比例、音階</a:t>
+            </a:r>
+            <a:endParaRPr lang="en-US" sz="1400" dirty="0"/>
           </a:p>
           <a:p>
             <a:pPr marL="342900" indent="-342900">
@@ -3481,7 +3532,7 @@
               <a:buChar char="•"/>
             </a:pPr>
             <a:r>
-              <a:rPr lang="en-US" sz="1100" dirty="0">
+              <a:rPr lang="en-US" sz="1400" dirty="0">
                 <a:solidFill>
                   <a:srgbClr val="E8D8A8"/>
                 </a:solidFill>
@@ -3489,9 +3540,9 @@
                 <a:ea typeface="Calibri" pitchFamily="34" charset="-122"/>
                 <a:cs typeface="Calibri" pitchFamily="34" charset="-120"/>
               </a:rPr>
-              <a:t>「harmonia」= 整體秩序、數學比例、音階</a:t>
-            </a:r>
-            <a:endParaRPr lang="en-US" sz="1100" dirty="0"/>
+              <a:t>Mathematical order of universe</a:t>
+            </a:r>
+            <a:endParaRPr lang="en-US" sz="1400" dirty="0"/>
           </a:p>
           <a:p>
             <a:pPr marL="342900" indent="-342900">
@@ -3502,7 +3553,7 @@
               <a:buChar char="•"/>
             </a:pPr>
             <a:r>
-              <a:rPr lang="en-US" sz="1100" dirty="0">
+              <a:rPr lang="en-US" sz="1400" dirty="0">
                 <a:solidFill>
                   <a:srgbClr val="E8D8A8"/>
                 </a:solidFill>
@@ -3510,9 +3561,9 @@
                 <a:ea typeface="Calibri" pitchFamily="34" charset="-122"/>
                 <a:cs typeface="Calibri" pitchFamily="34" charset="-120"/>
               </a:rPr>
-              <a:t>Harmonia = mathematical order of universe</a:t>
-            </a:r>
-            <a:endParaRPr lang="en-US" sz="1100" dirty="0"/>
+              <a:t>「音樂之球」天文學類比</a:t>
+            </a:r>
+            <a:endParaRPr lang="en-US" sz="1400" dirty="0"/>
           </a:p>
           <a:p>
             <a:pPr marL="342900" indent="-342900">
@@ -3523,7 +3574,7 @@
               <a:buChar char="•"/>
             </a:pPr>
             <a:r>
-              <a:rPr lang="en-US" sz="1100" dirty="0">
+              <a:rPr lang="en-US" sz="1400" dirty="0">
                 <a:solidFill>
                   <a:srgbClr val="E8D8A8"/>
                 </a:solidFill>
@@ -3531,30 +3582,9 @@
                 <a:ea typeface="Calibri" pitchFamily="34" charset="-122"/>
                 <a:cs typeface="Calibri" pitchFamily="34" charset="-120"/>
               </a:rPr>
-              <a:t>「音樂之球」天文學類比</a:t>
-            </a:r>
-            <a:endParaRPr lang="en-US" sz="1100" dirty="0"/>
-          </a:p>
-          <a:p>
-            <a:pPr marL="342900" indent="-342900">
-              <a:spcAft>
-                <a:spcPts val="300"/>
-              </a:spcAft>
-              <a:buSzPct val="100000"/>
-              <a:buChar char="•"/>
-            </a:pPr>
-            <a:r>
-              <a:rPr lang="en-US" sz="1100" dirty="0">
-                <a:solidFill>
-                  <a:srgbClr val="E8D8A8"/>
-                </a:solidFill>
-                <a:latin typeface="Calibri" pitchFamily="34" charset="0"/>
-                <a:ea typeface="Calibri" pitchFamily="34" charset="-122"/>
-                <a:cs typeface="Calibri" pitchFamily="34" charset="-120"/>
-              </a:rPr>
               <a:t>Music of the Spheres (Plato)</a:t>
             </a:r>
-            <a:endParaRPr lang="en-US" sz="1100" dirty="0"/>
+            <a:endParaRPr lang="en-US" sz="1400" dirty="0"/>
           </a:p>
         </p:txBody>
       </p:sp>
@@ -3698,7 +3728,7 @@
         <p:spPr>
           <a:xfrm>
             <a:off x="320040" y="749808"/>
-            <a:ext cx="2743200" cy="4160520"/>
+            <a:ext cx="2743200" cy="4023360"/>
           </a:xfrm>
           <a:prstGeom prst="rect">
             <a:avLst/>
@@ -3773,7 +3803,7 @@
               <a:buNone/>
             </a:pPr>
             <a:r>
-              <a:rPr lang="en-US" sz="1300" dirty="0">
+              <a:rPr lang="en-US" sz="1400" dirty="0">
                 <a:solidFill>
                   <a:srgbClr val="FBF5E6"/>
                 </a:solidFill>
@@ -3783,7 +3813,7 @@
               </a:rPr>
               <a:t>雙管笛</a:t>
             </a:r>
-            <a:endParaRPr lang="en-US" sz="1300" dirty="0"/>
+            <a:endParaRPr lang="en-US" sz="1400" dirty="0"/>
           </a:p>
         </p:txBody>
       </p:sp>
@@ -3805,14 +3835,14 @@
           <a:ln/>
         </p:spPr>
         <p:txBody>
-          <a:bodyPr wrap="square" rtlCol="0" anchor="ctr"/>
+          <a:bodyPr wrap="square" rtlCol="0" anchor="t"/>
           <a:lstStyle/>
           <a:p>
             <a:pPr algn="ctr" indent="0" marL="0">
               <a:buNone/>
             </a:pPr>
             <a:r>
-              <a:rPr lang="en-US" sz="1050" i="1" dirty="0">
+              <a:rPr lang="en-US" sz="1400" i="1" dirty="0">
                 <a:solidFill>
                   <a:srgbClr val="E8D8A8"/>
                 </a:solidFill>
@@ -3822,7 +3852,7 @@
               </a:rPr>
               <a:t>▶ 酒神戴奧尼索斯 Dionysus</a:t>
             </a:r>
-            <a:endParaRPr lang="en-US" sz="1050" dirty="0"/>
+            <a:endParaRPr lang="en-US" sz="1400" dirty="0"/>
           </a:p>
         </p:txBody>
       </p:sp>
@@ -3855,7 +3885,7 @@
         <p:spPr>
           <a:xfrm>
             <a:off x="411480" y="1947672"/>
-            <a:ext cx="2560320" cy="2880360"/>
+            <a:ext cx="2560320" cy="2788920"/>
           </a:xfrm>
           <a:prstGeom prst="rect">
             <a:avLst/>
@@ -3875,7 +3905,7 @@
               <a:buChar char="•"/>
             </a:pPr>
             <a:r>
-              <a:rPr lang="en-US" sz="1050" dirty="0">
+              <a:rPr lang="en-US" sz="1400" dirty="0">
                 <a:solidFill>
                   <a:srgbClr val="FBF5E6"/>
                 </a:solidFill>
@@ -3885,7 +3915,7 @@
               </a:rPr>
               <a:t>雙管、各有指孔與蘆葦管（reed）</a:t>
             </a:r>
-            <a:endParaRPr lang="en-US" sz="1050" dirty="0"/>
+            <a:endParaRPr lang="en-US" sz="1400" dirty="0"/>
           </a:p>
           <a:p>
             <a:pPr marL="342900" indent="-342900">
@@ -3896,7 +3926,7 @@
               <a:buChar char="•"/>
             </a:pPr>
             <a:r>
-              <a:rPr lang="en-US" sz="1050" dirty="0">
+              <a:rPr lang="en-US" sz="1400" dirty="0">
                 <a:solidFill>
                   <a:srgbClr val="FBF5E6"/>
                 </a:solidFill>
@@ -3906,7 +3936,7 @@
               </a:rPr>
               <a:t>Double pipe with finger holes and reed mouthpiece</a:t>
             </a:r>
-            <a:endParaRPr lang="en-US" sz="1050" dirty="0"/>
+            <a:endParaRPr lang="en-US" sz="1400" dirty="0"/>
           </a:p>
           <a:p>
             <a:pPr marL="342900" indent="-342900">
@@ -3917,7 +3947,7 @@
               <a:buChar char="•"/>
             </a:pPr>
             <a:r>
-              <a:rPr lang="en-US" sz="1050" dirty="0">
+              <a:rPr lang="en-US" sz="1400" dirty="0">
                 <a:solidFill>
                   <a:srgbClr val="FBF5E6"/>
                 </a:solidFill>
@@ -3927,7 +3957,7 @@
               </a:rPr>
               <a:t>常見於飲酒聚會（symposium）和戲劇</a:t>
             </a:r>
-            <a:endParaRPr lang="en-US" sz="1050" dirty="0"/>
+            <a:endParaRPr lang="en-US" sz="1400" dirty="0"/>
           </a:p>
           <a:p>
             <a:pPr marL="342900" indent="-342900">
@@ -3938,7 +3968,7 @@
               <a:buChar char="•"/>
             </a:pPr>
             <a:r>
-              <a:rPr lang="en-US" sz="1050" dirty="0">
+              <a:rPr lang="en-US" sz="1400" dirty="0">
                 <a:solidFill>
                   <a:srgbClr val="FBF5E6"/>
                 </a:solidFill>
@@ -3948,7 +3978,7 @@
               </a:rPr>
               <a:t>Used at symposia, Dionysian festivals, theater</a:t>
             </a:r>
-            <a:endParaRPr lang="en-US" sz="1050" dirty="0"/>
+            <a:endParaRPr lang="en-US" sz="1400" dirty="0"/>
           </a:p>
           <a:p>
             <a:pPr marL="342900" indent="-342900">
@@ -3959,7 +3989,7 @@
               <a:buChar char="•"/>
             </a:pPr>
             <a:r>
-              <a:rPr lang="en-US" sz="1050" dirty="0">
+              <a:rPr lang="en-US" sz="1400" dirty="0">
                 <a:solidFill>
                   <a:srgbClr val="FBF5E6"/>
                 </a:solidFill>
@@ -3969,7 +3999,7 @@
               </a:rPr>
               <a:t>推測二管演奏同音或相距特定音程</a:t>
             </a:r>
-            <a:endParaRPr lang="en-US" sz="1050" dirty="0"/>
+            <a:endParaRPr lang="en-US" sz="1400" dirty="0"/>
           </a:p>
           <a:p>
             <a:pPr marL="342900" indent="-342900">
@@ -3980,7 +4010,7 @@
               <a:buChar char="•"/>
             </a:pPr>
             <a:r>
-              <a:rPr lang="en-US" sz="1050" dirty="0">
+              <a:rPr lang="en-US" sz="1400" dirty="0">
                 <a:solidFill>
                   <a:srgbClr val="FBF5E6"/>
                 </a:solidFill>
@@ -3990,7 +4020,7 @@
               </a:rPr>
               <a:t>Two pipes likely played in unison or intervals</a:t>
             </a:r>
-            <a:endParaRPr lang="en-US" sz="1050" dirty="0"/>
+            <a:endParaRPr lang="en-US" sz="1400" dirty="0"/>
           </a:p>
         </p:txBody>
       </p:sp>
@@ -4003,7 +4033,7 @@
         <p:spPr>
           <a:xfrm>
             <a:off x="3246120" y="749808"/>
-            <a:ext cx="2743200" cy="4160520"/>
+            <a:ext cx="2743200" cy="4023360"/>
           </a:xfrm>
           <a:prstGeom prst="rect">
             <a:avLst/>
@@ -4078,7 +4108,7 @@
               <a:buNone/>
             </a:pPr>
             <a:r>
-              <a:rPr lang="en-US" sz="1300" dirty="0">
+              <a:rPr lang="en-US" sz="1400" dirty="0">
                 <a:solidFill>
                   <a:srgbClr val="FBF5E6"/>
                 </a:solidFill>
@@ -4088,7 +4118,7 @@
               </a:rPr>
               <a:t>里拉琴</a:t>
             </a:r>
-            <a:endParaRPr lang="en-US" sz="1300" dirty="0"/>
+            <a:endParaRPr lang="en-US" sz="1400" dirty="0"/>
           </a:p>
         </p:txBody>
       </p:sp>
@@ -4110,14 +4140,14 @@
           <a:ln/>
         </p:spPr>
         <p:txBody>
-          <a:bodyPr wrap="square" rtlCol="0" anchor="ctr"/>
+          <a:bodyPr wrap="square" rtlCol="0" anchor="t"/>
           <a:lstStyle/>
           <a:p>
             <a:pPr algn="ctr" indent="0" marL="0">
               <a:buNone/>
             </a:pPr>
             <a:r>
-              <a:rPr lang="en-US" sz="1050" i="1" dirty="0">
+              <a:rPr lang="en-US" sz="1400" i="1" dirty="0">
                 <a:solidFill>
                   <a:srgbClr val="E8D8A8"/>
                 </a:solidFill>
@@ -4127,7 +4157,7 @@
               </a:rPr>
               <a:t>▶ 太陽神阿波羅 Apollo</a:t>
             </a:r>
-            <a:endParaRPr lang="en-US" sz="1050" dirty="0"/>
+            <a:endParaRPr lang="en-US" sz="1400" dirty="0"/>
           </a:p>
         </p:txBody>
       </p:sp>
@@ -4160,7 +4190,7 @@
         <p:spPr>
           <a:xfrm>
             <a:off x="3337560" y="1947672"/>
-            <a:ext cx="2560320" cy="2880360"/>
+            <a:ext cx="2560320" cy="2788920"/>
           </a:xfrm>
           <a:prstGeom prst="rect">
             <a:avLst/>
@@ -4180,7 +4210,7 @@
               <a:buChar char="•"/>
             </a:pPr>
             <a:r>
-              <a:rPr lang="en-US" sz="1050" dirty="0">
+              <a:rPr lang="en-US" sz="1400" dirty="0">
                 <a:solidFill>
                   <a:srgbClr val="FBF5E6"/>
                 </a:solidFill>
@@ -4190,7 +4220,7 @@
               </a:rPr>
               <a:t>七弦，龜殼共鳴箱，用撥片彈奏</a:t>
             </a:r>
-            <a:endParaRPr lang="en-US" sz="1050" dirty="0"/>
+            <a:endParaRPr lang="en-US" sz="1400" dirty="0"/>
           </a:p>
           <a:p>
             <a:pPr marL="342900" indent="-342900">
@@ -4201,7 +4231,7 @@
               <a:buChar char="•"/>
             </a:pPr>
             <a:r>
-              <a:rPr lang="en-US" sz="1050" dirty="0">
+              <a:rPr lang="en-US" sz="1400" dirty="0">
                 <a:solidFill>
                   <a:srgbClr val="FBF5E6"/>
                 </a:solidFill>
@@ -4211,7 +4241,7 @@
               </a:rPr>
               <a:t>7 strings, tortoise-shell soundbox, played with plectrum</a:t>
             </a:r>
-            <a:endParaRPr lang="en-US" sz="1050" dirty="0"/>
+            <a:endParaRPr lang="en-US" sz="1400" dirty="0"/>
           </a:p>
           <a:p>
             <a:pPr marL="342900" indent="-342900">
@@ -4222,7 +4252,7 @@
               <a:buChar char="•"/>
             </a:pPr>
             <a:r>
-              <a:rPr lang="en-US" sz="1050" dirty="0">
+              <a:rPr lang="en-US" sz="1400" dirty="0">
                 <a:solidFill>
                   <a:srgbClr val="FBF5E6"/>
                 </a:solidFill>
@@ -4232,7 +4262,7 @@
               </a:rPr>
               <a:t>雅典教育的核心科目</a:t>
             </a:r>
-            <a:endParaRPr lang="en-US" sz="1050" dirty="0"/>
+            <a:endParaRPr lang="en-US" sz="1400" dirty="0"/>
           </a:p>
           <a:p>
             <a:pPr marL="342900" indent="-342900">
@@ -4243,7 +4273,7 @@
               <a:buChar char="•"/>
             </a:pPr>
             <a:r>
-              <a:rPr lang="en-US" sz="1050" dirty="0">
+              <a:rPr lang="en-US" sz="1400" dirty="0">
                 <a:solidFill>
                   <a:srgbClr val="FBF5E6"/>
                 </a:solidFill>
@@ -4253,7 +4283,7 @@
               </a:rPr>
               <a:t>Core element of Athenian education</a:t>
             </a:r>
-            <a:endParaRPr lang="en-US" sz="1050" dirty="0"/>
+            <a:endParaRPr lang="en-US" sz="1400" dirty="0"/>
           </a:p>
           <a:p>
             <a:pPr marL="342900" indent="-342900">
@@ -4264,7 +4294,7 @@
               <a:buChar char="•"/>
             </a:pPr>
             <a:r>
-              <a:rPr lang="en-US" sz="1050" dirty="0">
+              <a:rPr lang="en-US" sz="1400" dirty="0">
                 <a:solidFill>
                   <a:srgbClr val="FBF5E6"/>
                 </a:solidFill>
@@ -4274,7 +4304,7 @@
               </a:rPr>
               <a:t>伴奏舞蹈、歌唱、史詩朗誦</a:t>
             </a:r>
-            <a:endParaRPr lang="en-US" sz="1050" dirty="0"/>
+            <a:endParaRPr lang="en-US" sz="1400" dirty="0"/>
           </a:p>
           <a:p>
             <a:pPr marL="342900" indent="-342900">
@@ -4285,7 +4315,7 @@
               <a:buChar char="•"/>
             </a:pPr>
             <a:r>
-              <a:rPr lang="en-US" sz="1050" dirty="0">
+              <a:rPr lang="en-US" sz="1400" dirty="0">
                 <a:solidFill>
                   <a:srgbClr val="FBF5E6"/>
                 </a:solidFill>
@@ -4295,7 +4325,7 @@
               </a:rPr>
               <a:t>Accompanied dancing, singing, epic recitation</a:t>
             </a:r>
-            <a:endParaRPr lang="en-US" sz="1050" dirty="0"/>
+            <a:endParaRPr lang="en-US" sz="1400" dirty="0"/>
           </a:p>
         </p:txBody>
       </p:sp>
@@ -4308,7 +4338,7 @@
         <p:spPr>
           <a:xfrm>
             <a:off x="6172200" y="749808"/>
-            <a:ext cx="2743200" cy="4160520"/>
+            <a:ext cx="2743200" cy="4023360"/>
           </a:xfrm>
           <a:prstGeom prst="rect">
             <a:avLst/>
@@ -4383,7 +4413,7 @@
               <a:buNone/>
             </a:pPr>
             <a:r>
-              <a:rPr lang="en-US" sz="1300" dirty="0">
+              <a:rPr lang="en-US" sz="1400" dirty="0">
                 <a:solidFill>
                   <a:srgbClr val="FBF5E6"/>
                 </a:solidFill>
@@ -4393,7 +4423,7 @@
               </a:rPr>
               <a:t>基薩拉</a:t>
             </a:r>
-            <a:endParaRPr lang="en-US" sz="1300" dirty="0"/>
+            <a:endParaRPr lang="en-US" sz="1400" dirty="0"/>
           </a:p>
         </p:txBody>
       </p:sp>
@@ -4415,14 +4445,14 @@
           <a:ln/>
         </p:spPr>
         <p:txBody>
-          <a:bodyPr wrap="square" rtlCol="0" anchor="ctr"/>
+          <a:bodyPr wrap="square" rtlCol="0" anchor="t"/>
           <a:lstStyle/>
           <a:p>
             <a:pPr algn="ctr" indent="0" marL="0">
               <a:buNone/>
             </a:pPr>
             <a:r>
-              <a:rPr lang="en-US" sz="1050" i="1" dirty="0">
+              <a:rPr lang="en-US" sz="1400" i="1" dirty="0">
                 <a:solidFill>
                   <a:srgbClr val="E8D8A8"/>
                 </a:solidFill>
@@ -4432,7 +4462,7 @@
               </a:rPr>
               <a:t>▶ 用於公眾儀式與比賽</a:t>
             </a:r>
-            <a:endParaRPr lang="en-US" sz="1050" dirty="0"/>
+            <a:endParaRPr lang="en-US" sz="1400" dirty="0"/>
           </a:p>
         </p:txBody>
       </p:sp>
@@ -4465,7 +4495,7 @@
         <p:spPr>
           <a:xfrm>
             <a:off x="6263640" y="1947672"/>
-            <a:ext cx="2560320" cy="2880360"/>
+            <a:ext cx="2560320" cy="2788920"/>
           </a:xfrm>
           <a:prstGeom prst="rect">
             <a:avLst/>
@@ -4485,7 +4515,7 @@
               <a:buChar char="•"/>
             </a:pPr>
             <a:r>
-              <a:rPr lang="en-US" sz="1050" dirty="0">
+              <a:rPr lang="en-US" sz="1400" dirty="0">
                 <a:solidFill>
                   <a:srgbClr val="FBF5E6"/>
                 </a:solidFill>
@@ -4495,7 +4525,7 @@
               </a:rPr>
               <a:t>大型里拉琴，通常站立演奏</a:t>
             </a:r>
-            <a:endParaRPr lang="en-US" sz="1050" dirty="0"/>
+            <a:endParaRPr lang="en-US" sz="1400" dirty="0"/>
           </a:p>
           <a:p>
             <a:pPr marL="342900" indent="-342900">
@@ -4506,7 +4536,7 @@
               <a:buChar char="•"/>
             </a:pPr>
             <a:r>
-              <a:rPr lang="en-US" sz="1050" dirty="0">
+              <a:rPr lang="en-US" sz="1400" dirty="0">
                 <a:solidFill>
                   <a:srgbClr val="FBF5E6"/>
                 </a:solidFill>
@@ -4514,9 +4544,9 @@
                 <a:ea typeface="Calibri" pitchFamily="34" charset="-122"/>
                 <a:cs typeface="Calibri" pitchFamily="34" charset="-120"/>
               </a:rPr>
-              <a:t>Larger lyre, normally played standing</a:t>
-            </a:r>
-            <a:endParaRPr lang="en-US" sz="1050" dirty="0"/>
+              <a:t>Larger lyre, played standing</a:t>
+            </a:r>
+            <a:endParaRPr lang="en-US" sz="1400" dirty="0"/>
           </a:p>
           <a:p>
             <a:pPr marL="342900" indent="-342900">
@@ -4527,7 +4557,7 @@
               <a:buChar char="•"/>
             </a:pPr>
             <a:r>
-              <a:rPr lang="en-US" sz="1050" dirty="0">
+              <a:rPr lang="en-US" sz="1400" dirty="0">
                 <a:solidFill>
                   <a:srgbClr val="FBF5E6"/>
                 </a:solidFill>
@@ -4535,9 +4565,9 @@
                 <a:ea typeface="Calibri" pitchFamily="34" charset="-122"/>
                 <a:cs typeface="Calibri" pitchFamily="34" charset="-120"/>
               </a:rPr>
-              <a:t>用於遊行、神聖儀式和劇場</a:t>
-            </a:r>
-            <a:endParaRPr lang="en-US" sz="1050" dirty="0"/>
+              <a:t>用於遊行、儀式和劇場</a:t>
+            </a:r>
+            <a:endParaRPr lang="en-US" sz="1400" dirty="0"/>
           </a:p>
           <a:p>
             <a:pPr marL="342900" indent="-342900">
@@ -4548,7 +4578,7 @@
               <a:buChar char="•"/>
             </a:pPr>
             <a:r>
-              <a:rPr lang="en-US" sz="1050" dirty="0">
+              <a:rPr lang="en-US" sz="1400" dirty="0">
                 <a:solidFill>
                   <a:srgbClr val="FBF5E6"/>
                 </a:solidFill>
@@ -4556,9 +4586,9 @@
                 <a:ea typeface="Calibri" pitchFamily="34" charset="-122"/>
                 <a:cs typeface="Calibri" pitchFamily="34" charset="-120"/>
               </a:rPr>
-              <a:t>Processions, sacred ceremonies, theater</a:t>
-            </a:r>
-            <a:endParaRPr lang="en-US" sz="1050" dirty="0"/>
+              <a:t>Processions, ceremonies, theater</a:t>
+            </a:r>
+            <a:endParaRPr lang="en-US" sz="1400" dirty="0"/>
           </a:p>
           <a:p>
             <a:pPr marL="342900" indent="-342900">
@@ -4569,7 +4599,7 @@
               <a:buChar char="•"/>
             </a:pPr>
             <a:r>
-              <a:rPr lang="en-US" sz="1050" dirty="0">
+              <a:rPr lang="en-US" sz="1400" dirty="0">
                 <a:solidFill>
                   <a:srgbClr val="FBF5E6"/>
                 </a:solidFill>
@@ -4577,9 +4607,9 @@
                 <a:ea typeface="Calibri" pitchFamily="34" charset="-122"/>
                 <a:cs typeface="Calibri" pitchFamily="34" charset="-120"/>
               </a:rPr>
-              <a:t>「基薩拉歌手」（kitharode）= 邊彈邊唱</a:t>
-            </a:r>
-            <a:endParaRPr lang="en-US" sz="1050" dirty="0"/>
+              <a:t>kitharode = 邊彈邊唱的歌手</a:t>
+            </a:r>
+            <a:endParaRPr lang="en-US" sz="1400" dirty="0"/>
           </a:p>
           <a:p>
             <a:pPr marL="342900" indent="-342900">
@@ -4590,7 +4620,7 @@
               <a:buChar char="•"/>
             </a:pPr>
             <a:r>
-              <a:rPr lang="en-US" sz="1050" dirty="0">
+              <a:rPr lang="en-US" sz="1400" dirty="0">
                 <a:solidFill>
                   <a:srgbClr val="FBF5E6"/>
                 </a:solidFill>
@@ -4598,9 +4628,9 @@
                 <a:ea typeface="Calibri" pitchFamily="34" charset="-122"/>
                 <a:cs typeface="Calibri" pitchFamily="34" charset="-120"/>
               </a:rPr>
-              <a:t>Kitharode = singer accompanying himself</a:t>
-            </a:r>
-            <a:endParaRPr lang="en-US" sz="1050" dirty="0"/>
+              <a:t>Singer accompanying himself</a:t>
+            </a:r>
+            <a:endParaRPr lang="en-US" sz="1400" dirty="0"/>
           </a:p>
         </p:txBody>
       </p:sp>
@@ -4612,24 +4642,24 @@
         </p:nvSpPr>
         <p:spPr>
           <a:xfrm>
-            <a:off x="365760" y="4709160"/>
-            <a:ext cx="8412480" cy="320040"/>
-          </a:xfrm>
-          <a:prstGeom prst="rect">
-            <a:avLst/>
-          </a:prstGeom>
-          <a:noFill/>
-          <a:ln/>
-        </p:spPr>
-        <p:txBody>
-          <a:bodyPr wrap="square" rtlCol="0" anchor="ctr"/>
-          <a:lstStyle/>
-          <a:p>
-            <a:pPr indent="0" marL="0">
-              <a:buNone/>
-            </a:pPr>
-            <a:r>
-              <a:rPr lang="en-US" sz="1050" i="1" dirty="0">
+            <a:off x="365760" y="4800600"/>
+            <a:ext cx="8412480" cy="201168"/>
+          </a:xfrm>
+          <a:prstGeom prst="rect">
+            <a:avLst/>
+          </a:prstGeom>
+          <a:noFill/>
+          <a:ln/>
+        </p:spPr>
+        <p:txBody>
+          <a:bodyPr wrap="square" lIns="0" tIns="0" rIns="0" bIns="0" rtlCol="0" anchor="t"/>
+          <a:lstStyle/>
+          <a:p>
+            <a:pPr algn="ctr" indent="0" marL="0">
+              <a:buNone/>
+            </a:pPr>
+            <a:r>
+              <a:rPr lang="en-US" sz="1400" i="1" dirty="0">
                 <a:solidFill>
                   <a:srgbClr val="5C3A28"/>
                 </a:solidFill>
@@ -4637,26 +4667,9 @@
                 <a:ea typeface="Calibri" pitchFamily="34" charset="-122"/>
                 <a:cs typeface="Calibri" pitchFamily="34" charset="-120"/>
               </a:rPr>
-              <a:t>希臘人主要靠耳朵學習音樂，大多從記憶或即興演奏，而非讀譜</a:t>
-            </a:r>
-            <a:endParaRPr lang="en-US" sz="1050" dirty="0"/>
-          </a:p>
-          <a:p>
-            <a:pPr indent="0" marL="0">
-              <a:buNone/>
-            </a:pPr>
-            <a:r>
-              <a:rPr lang="en-US" sz="1050" i="1" dirty="0">
-                <a:solidFill>
-                  <a:srgbClr val="5C3A28"/>
-                </a:solidFill>
-                <a:latin typeface="Calibri" pitchFamily="34" charset="0"/>
-                <a:ea typeface="Calibri" pitchFamily="34" charset="-122"/>
-                <a:cs typeface="Calibri" pitchFamily="34" charset="-120"/>
-              </a:rPr>
-              <a:t>Greeks primarily learned by ear — from memory or improvisation, not reading notation</a:t>
-            </a:r>
-            <a:endParaRPr lang="en-US" sz="1050" dirty="0"/>
+              <a:t>希臘人主要靠耳朵學習音樂，而非讀譜 · Greeks learned by ear, not notation</a:t>
+            </a:r>
+            <a:endParaRPr lang="en-US" sz="1400" dirty="0"/>
           </a:p>
         </p:txBody>
       </p:sp>
@@ -4777,7 +4790,7 @@
               <a:buNone/>
             </a:pPr>
             <a:r>
-              <a:rPr lang="en-US" sz="1300" b="1" dirty="0">
+              <a:rPr lang="en-US" sz="1400" b="1" dirty="0">
                 <a:solidFill>
                   <a:srgbClr val="2C1810"/>
                 </a:solidFill>
@@ -4787,7 +4800,7 @@
               </a:rPr>
               <a:t>IN PERFORMANCE</a:t>
             </a:r>
-            <a:endParaRPr lang="en-US" sz="1300" dirty="0"/>
+            <a:endParaRPr lang="en-US" sz="1400" dirty="0"/>
           </a:p>
         </p:txBody>
       </p:sp>
@@ -4912,7 +4925,7 @@
               <a:buNone/>
             </a:pPr>
             <a:r>
-              <a:rPr lang="en-US" sz="1250" b="1" dirty="0">
+              <a:rPr lang="en-US" sz="1400" b="1" dirty="0">
                 <a:solidFill>
                   <a:srgbClr val="C8A020"/>
                 </a:solidFill>
@@ -4920,9 +4933,9 @@
                 <a:ea typeface="Georgia" pitchFamily="34" charset="-122"/>
                 <a:cs typeface="Georgia" pitchFamily="34" charset="-120"/>
               </a:rPr>
-              <a:t>🏆 競賽起源</a:t>
-            </a:r>
-            <a:endParaRPr lang="en-US" sz="1250" dirty="0"/>
+              <a:t>■ 競賽起源</a:t>
+            </a:r>
+            <a:endParaRPr lang="en-US" sz="1400" dirty="0"/>
           </a:p>
         </p:txBody>
       </p:sp>
@@ -4944,14 +4957,14 @@
           <a:ln/>
         </p:spPr>
         <p:txBody>
-          <a:bodyPr wrap="square" lIns="0" tIns="0" rIns="0" bIns="0" rtlCol="0" anchor="ctr"/>
+          <a:bodyPr wrap="square" lIns="0" tIns="0" rIns="0" bIns="0" rtlCol="0" anchor="t"/>
           <a:lstStyle/>
           <a:p>
             <a:pPr indent="0" marL="0">
               <a:buNone/>
             </a:pPr>
             <a:r>
-              <a:rPr lang="en-US" sz="1150" dirty="0">
+              <a:rPr lang="en-US" sz="1400" dirty="0">
                 <a:solidFill>
                   <a:srgbClr val="E8D8A8"/>
                 </a:solidFill>
@@ -4961,14 +4974,14 @@
               </a:rPr>
               <a:t>西元前 6 世紀起，阿夫洛斯和基薩拉成為獨奏樂器，開始舉辦競賽</a:t>
             </a:r>
-            <a:endParaRPr lang="en-US" sz="1150" dirty="0"/>
+            <a:endParaRPr lang="en-US" sz="1400" dirty="0"/>
           </a:p>
           <a:p>
             <a:pPr indent="0" marL="0">
               <a:buNone/>
             </a:pPr>
             <a:r>
-              <a:rPr lang="en-US" sz="1150" dirty="0">
+              <a:rPr lang="en-US" sz="1400" dirty="0">
                 <a:solidFill>
                   <a:srgbClr val="E8D8A8"/>
                 </a:solidFill>
@@ -4978,7 +4991,7 @@
               </a:rPr>
               <a:t>From 6th cent. BCE, aulos &amp; kithara played as solos; competitions held</a:t>
             </a:r>
-            <a:endParaRPr lang="en-US" sz="1150" dirty="0"/>
+            <a:endParaRPr lang="en-US" sz="1400" dirty="0"/>
           </a:p>
         </p:txBody>
       </p:sp>
@@ -5027,7 +5040,7 @@
               <a:buNone/>
             </a:pPr>
             <a:r>
-              <a:rPr lang="en-US" sz="1250" b="1" dirty="0">
+              <a:rPr lang="en-US" sz="1400" b="1" dirty="0">
                 <a:solidFill>
                   <a:srgbClr val="C8A020"/>
                 </a:solidFill>
@@ -5035,9 +5048,9 @@
                 <a:ea typeface="Georgia" pitchFamily="34" charset="-122"/>
                 <a:cs typeface="Georgia" pitchFamily="34" charset="-120"/>
               </a:rPr>
-              <a:t>⭐ Sakadas of Argos</a:t>
-            </a:r>
-            <a:endParaRPr lang="en-US" sz="1250" dirty="0"/>
+              <a:t>■ Sakadas of Argos</a:t>
+            </a:r>
+            <a:endParaRPr lang="en-US" sz="1400" dirty="0"/>
           </a:p>
         </p:txBody>
       </p:sp>
@@ -5059,14 +5072,14 @@
           <a:ln/>
         </p:spPr>
         <p:txBody>
-          <a:bodyPr wrap="square" lIns="0" tIns="0" rIns="0" bIns="0" rtlCol="0" anchor="ctr"/>
+          <a:bodyPr wrap="square" lIns="0" tIns="0" rIns="0" bIns="0" rtlCol="0" anchor="t"/>
           <a:lstStyle/>
           <a:p>
             <a:pPr indent="0" marL="0">
               <a:buNone/>
             </a:pPr>
             <a:r>
-              <a:rPr lang="en-US" sz="1150" dirty="0">
+              <a:rPr lang="en-US" sz="1400" dirty="0">
                 <a:solidFill>
                   <a:srgbClr val="E8D8A8"/>
                 </a:solidFill>
@@ -5076,14 +5089,14 @@
               </a:rPr>
               <a:t>586、582、578 BCE 三度贏得皮提亞競賽（Pythian Games）阿夫洛斯獨奏首獎</a:t>
             </a:r>
-            <a:endParaRPr lang="en-US" sz="1150" dirty="0"/>
+            <a:endParaRPr lang="en-US" sz="1400" dirty="0"/>
           </a:p>
           <a:p>
             <a:pPr indent="0" marL="0">
               <a:buNone/>
             </a:pPr>
             <a:r>
-              <a:rPr lang="en-US" sz="1150" dirty="0">
+              <a:rPr lang="en-US" sz="1400" dirty="0">
                 <a:solidFill>
                   <a:srgbClr val="E8D8A8"/>
                 </a:solidFill>
@@ -5093,7 +5106,7 @@
               </a:rPr>
               <a:t>Won 3 times; performed the Pythic Nomos (Apollo vs. Python)</a:t>
             </a:r>
-            <a:endParaRPr lang="en-US" sz="1150" dirty="0"/>
+            <a:endParaRPr lang="en-US" sz="1400" dirty="0"/>
           </a:p>
         </p:txBody>
       </p:sp>
@@ -5142,7 +5155,7 @@
               <a:buNone/>
             </a:pPr>
             <a:r>
-              <a:rPr lang="en-US" sz="1250" b="1" dirty="0">
+              <a:rPr lang="en-US" sz="1400" b="1" dirty="0">
                 <a:solidFill>
                   <a:srgbClr val="C8A020"/>
                 </a:solidFill>
@@ -5150,9 +5163,9 @@
                 <a:ea typeface="Georgia" pitchFamily="34" charset="-122"/>
                 <a:cs typeface="Georgia" pitchFamily="34" charset="-120"/>
               </a:rPr>
-              <a:t>👑 名演奏家</a:t>
-            </a:r>
-            <a:endParaRPr lang="en-US" sz="1250" dirty="0"/>
+              <a:t>■ 名演奏家</a:t>
+            </a:r>
+            <a:endParaRPr lang="en-US" sz="1400" dirty="0"/>
           </a:p>
         </p:txBody>
       </p:sp>
@@ -5174,14 +5187,14 @@
           <a:ln/>
         </p:spPr>
         <p:txBody>
-          <a:bodyPr wrap="square" lIns="0" tIns="0" rIns="0" bIns="0" rtlCol="0" anchor="ctr"/>
+          <a:bodyPr wrap="square" lIns="0" tIns="0" rIns="0" bIns="0" rtlCol="0" anchor="t"/>
           <a:lstStyle/>
           <a:p>
             <a:pPr indent="0" marL="0">
               <a:buNone/>
             </a:pPr>
             <a:r>
-              <a:rPr lang="en-US" sz="1150" dirty="0">
+              <a:rPr lang="en-US" sz="1400" dirty="0">
                 <a:solidFill>
                   <a:srgbClr val="E8D8A8"/>
                 </a:solidFill>
@@ -5191,14 +5204,14 @@
               </a:rPr>
               <a:t>巡迴演出積累財富；觀眾可達數千人；部分女性演奏家亦成名</a:t>
             </a:r>
-            <a:endParaRPr lang="en-US" sz="1150" dirty="0"/>
+            <a:endParaRPr lang="en-US" sz="1400" dirty="0"/>
           </a:p>
           <a:p>
             <a:pPr indent="0" marL="0">
               <a:buNone/>
             </a:pPr>
             <a:r>
-              <a:rPr lang="en-US" sz="1150" dirty="0">
+              <a:rPr lang="en-US" sz="1400" dirty="0">
                 <a:solidFill>
                   <a:srgbClr val="E8D8A8"/>
                 </a:solidFill>
@@ -5208,7 +5221,7 @@
               </a:rPr>
               <a:t>Famous virtuosos toured and attracted thousands; some women gained fame</a:t>
             </a:r>
-            <a:endParaRPr lang="en-US" sz="1150" dirty="0"/>
+            <a:endParaRPr lang="en-US" sz="1400" dirty="0"/>
           </a:p>
         </p:txBody>
       </p:sp>
@@ -5257,7 +5270,7 @@
               <a:buNone/>
             </a:pPr>
             <a:r>
-              <a:rPr lang="en-US" sz="1250" b="1" dirty="0">
+              <a:rPr lang="en-US" sz="1400" b="1" dirty="0">
                 <a:solidFill>
                   <a:srgbClr val="C8A020"/>
                 </a:solidFill>
@@ -5265,9 +5278,9 @@
                 <a:ea typeface="Georgia" pitchFamily="34" charset="-122"/>
                 <a:cs typeface="Georgia" pitchFamily="34" charset="-120"/>
               </a:rPr>
-              <a:t>⚠️ 社會地位</a:t>
-            </a:r>
-            <a:endParaRPr lang="en-US" sz="1250" dirty="0"/>
+              <a:t>■ 社會地位</a:t>
+            </a:r>
+            <a:endParaRPr lang="en-US" sz="1400" dirty="0"/>
           </a:p>
         </p:txBody>
       </p:sp>
@@ -5289,14 +5302,14 @@
           <a:ln/>
         </p:spPr>
         <p:txBody>
-          <a:bodyPr wrap="square" lIns="0" tIns="0" rIns="0" bIns="0" rtlCol="0" anchor="ctr"/>
+          <a:bodyPr wrap="square" lIns="0" tIns="0" rIns="0" bIns="0" rtlCol="0" anchor="t"/>
           <a:lstStyle/>
           <a:p>
             <a:pPr indent="0" marL="0">
               <a:buNone/>
             </a:pPr>
             <a:r>
-              <a:rPr lang="en-US" sz="1150" dirty="0">
+              <a:rPr lang="en-US" sz="1400" dirty="0">
                 <a:solidFill>
                   <a:srgbClr val="E8D8A8"/>
                 </a:solidFill>
@@ -5306,14 +5319,14 @@
               </a:rPr>
               <a:t>競賽外的職業演奏家社會地位低，許多是奴隸</a:t>
             </a:r>
-            <a:endParaRPr lang="en-US" sz="1150" dirty="0"/>
+            <a:endParaRPr lang="en-US" sz="1400" dirty="0"/>
           </a:p>
           <a:p>
             <a:pPr indent="0" marL="0">
               <a:buNone/>
             </a:pPr>
             <a:r>
-              <a:rPr lang="en-US" sz="1150" dirty="0">
+              <a:rPr lang="en-US" sz="1400" dirty="0">
                 <a:solidFill>
                   <a:srgbClr val="E8D8A8"/>
                 </a:solidFill>
@@ -5323,7 +5336,7 @@
               </a:rPr>
               <a:t>Outside competitions, most professional performers were of low status, often slaves</a:t>
             </a:r>
-            <a:endParaRPr lang="en-US" sz="1150" dirty="0"/>
+            <a:endParaRPr lang="en-US" sz="1400" dirty="0"/>
           </a:p>
         </p:txBody>
       </p:sp>
@@ -5372,7 +5385,7 @@
               <a:buNone/>
             </a:pPr>
             <a:r>
-              <a:rPr lang="en-US" sz="1250" b="1" dirty="0">
+              <a:rPr lang="en-US" sz="1400" b="1" dirty="0">
                 <a:solidFill>
                   <a:srgbClr val="C8A020"/>
                 </a:solidFill>
@@ -5380,9 +5393,9 @@
                 <a:ea typeface="Georgia" pitchFamily="34" charset="-122"/>
                 <a:cs typeface="Georgia" pitchFamily="34" charset="-120"/>
               </a:rPr>
-              <a:t>🎖 獎品</a:t>
-            </a:r>
-            <a:endParaRPr lang="en-US" sz="1250" dirty="0"/>
+              <a:t>■ 獎品</a:t>
+            </a:r>
+            <a:endParaRPr lang="en-US" sz="1400" dirty="0"/>
           </a:p>
         </p:txBody>
       </p:sp>
@@ -5404,14 +5417,14 @@
           <a:ln/>
         </p:spPr>
         <p:txBody>
-          <a:bodyPr wrap="square" lIns="0" tIns="0" rIns="0" bIns="0" rtlCol="0" anchor="ctr"/>
+          <a:bodyPr wrap="square" lIns="0" tIns="0" rIns="0" bIns="0" rtlCol="0" anchor="t"/>
           <a:lstStyle/>
           <a:p>
             <a:pPr indent="0" marL="0">
               <a:buNone/>
             </a:pPr>
             <a:r>
-              <a:rPr lang="en-US" sz="1150" dirty="0">
+              <a:rPr lang="en-US" sz="1400" dirty="0">
                 <a:solidFill>
                   <a:srgbClr val="E8D8A8"/>
                 </a:solidFill>
@@ -5421,14 +5434,14 @@
               </a:rPr>
               <a:t>圖 1.9 的陶罐（裝酒或油）即為競賽獎品</a:t>
             </a:r>
-            <a:endParaRPr lang="en-US" sz="1150" dirty="0"/>
+            <a:endParaRPr lang="en-US" sz="1400" dirty="0"/>
           </a:p>
           <a:p>
             <a:pPr indent="0" marL="0">
               <a:buNone/>
             </a:pPr>
             <a:r>
-              <a:rPr lang="en-US" sz="1150" dirty="0">
+              <a:rPr lang="en-US" sz="1400" dirty="0">
                 <a:solidFill>
                   <a:srgbClr val="E8D8A8"/>
                 </a:solidFill>
@@ -5438,7 +5451,7 @@
               </a:rPr>
               <a:t>The amphora in Fig. 1.9 was awarded as a competition prize</a:t>
             </a:r>
-            <a:endParaRPr lang="en-US" sz="1150" dirty="0"/>
+            <a:endParaRPr lang="en-US" sz="1400" dirty="0"/>
           </a:p>
         </p:txBody>
       </p:sp>
@@ -5571,14 +5584,14 @@
           <a:ln/>
         </p:spPr>
         <p:txBody>
-          <a:bodyPr wrap="square" lIns="0" tIns="0" rIns="0" bIns="0" rtlCol="0" anchor="ctr"/>
+          <a:bodyPr wrap="square" lIns="0" tIns="0" rIns="0" bIns="0" rtlCol="0" anchor="t"/>
           <a:lstStyle/>
           <a:p>
             <a:pPr indent="0" marL="0">
               <a:buNone/>
             </a:pPr>
             <a:r>
-              <a:rPr lang="en-US" sz="1250" i="1" dirty="0">
+              <a:rPr lang="en-US" sz="1400" i="1" dirty="0">
                 <a:solidFill>
                   <a:srgbClr val="5C3A28"/>
                 </a:solidFill>
@@ -5588,7 +5601,7 @@
               </a:rPr>
               <a:t>希臘哲學家相信音樂能直接影響人的性格與道德 · Greek philosophers believed music could affect ethical character</a:t>
             </a:r>
-            <a:endParaRPr lang="en-US" sz="1250" dirty="0"/>
+            <a:endParaRPr lang="en-US" sz="1400" dirty="0"/>
           </a:p>
         </p:txBody>
       </p:sp>
@@ -5689,14 +5702,14 @@
           <a:ln/>
         </p:spPr>
         <p:txBody>
-          <a:bodyPr wrap="square" rtlCol="0" anchor="ctr"/>
+          <a:bodyPr wrap="square" rtlCol="0" anchor="t"/>
           <a:lstStyle/>
           <a:p>
             <a:pPr algn="ctr" indent="0" marL="0">
               <a:buNone/>
             </a:pPr>
             <a:r>
-              <a:rPr lang="en-US" sz="1100" i="1" dirty="0">
+              <a:rPr lang="en-US" sz="1400" i="1" dirty="0">
                 <a:solidFill>
                   <a:srgbClr val="E8D8A8"/>
                 </a:solidFill>
@@ -5706,7 +5719,7 @@
               </a:rPr>
               <a:t>ca. 429–347 BCE · 《理想國》Republic</a:t>
             </a:r>
-            <a:endParaRPr lang="en-US" sz="1100" dirty="0"/>
+            <a:endParaRPr lang="en-US" sz="1400" dirty="0"/>
           </a:p>
         </p:txBody>
       </p:sp>
@@ -5759,7 +5772,7 @@
               <a:buChar char="•"/>
             </a:pPr>
             <a:r>
-              <a:rPr lang="en-US" sz="1100" dirty="0">
+              <a:rPr lang="en-US" sz="1400" dirty="0">
                 <a:solidFill>
                   <a:srgbClr val="FBF5E6"/>
                 </a:solidFill>
@@ -5769,7 +5782,7 @@
               </a:rPr>
               <a:t>音樂塑造靈魂；只有特定音樂適合教育</a:t>
             </a:r>
-            <a:endParaRPr lang="en-US" sz="1100" dirty="0"/>
+            <a:endParaRPr lang="en-US" sz="1400" dirty="0"/>
           </a:p>
           <a:p>
             <a:pPr marL="342900" indent="-342900">
@@ -5780,7 +5793,7 @@
               <a:buChar char="•"/>
             </a:pPr>
             <a:r>
-              <a:rPr lang="en-US" sz="1100" dirty="0">
+              <a:rPr lang="en-US" sz="1400" dirty="0">
                 <a:solidFill>
                   <a:srgbClr val="FBF5E6"/>
                 </a:solidFill>
@@ -5790,7 +5803,7 @@
               </a:rPr>
               <a:t>Music molds the soul; only certain music suits education</a:t>
             </a:r>
-            <a:endParaRPr lang="en-US" sz="1100" dirty="0"/>
+            <a:endParaRPr lang="en-US" sz="1400" dirty="0"/>
           </a:p>
           <a:p>
             <a:pPr marL="342900" indent="-342900">
@@ -5801,7 +5814,7 @@
               <a:buChar char="•"/>
             </a:pPr>
             <a:r>
-              <a:rPr lang="en-US" sz="1100" dirty="0">
+              <a:rPr lang="en-US" sz="1400" dirty="0">
                 <a:solidFill>
                   <a:srgbClr val="FBF5E6"/>
                 </a:solidFill>
@@ -5811,7 +5824,7 @@
               </a:rPr>
               <a:t>贊成 Dorian 和 Phrygian 調式（促進節制與勇氣）</a:t>
             </a:r>
-            <a:endParaRPr lang="en-US" sz="1100" dirty="0"/>
+            <a:endParaRPr lang="en-US" sz="1400" dirty="0"/>
           </a:p>
           <a:p>
             <a:pPr marL="342900" indent="-342900">
@@ -5822,7 +5835,7 @@
               <a:buChar char="•"/>
             </a:pPr>
             <a:r>
-              <a:rPr lang="en-US" sz="1100" dirty="0">
+              <a:rPr lang="en-US" sz="1400" dirty="0">
                 <a:solidFill>
                   <a:srgbClr val="FBF5E6"/>
                 </a:solidFill>
@@ -5832,7 +5845,7 @@
               </a:rPr>
               <a:t>Endorsed Dorian &amp; Phrygian harmoniai (temperance &amp; courage)</a:t>
             </a:r>
-            <a:endParaRPr lang="en-US" sz="1100" dirty="0"/>
+            <a:endParaRPr lang="en-US" sz="1400" dirty="0"/>
           </a:p>
           <a:p>
             <a:pPr marL="342900" indent="-342900">
@@ -5843,7 +5856,7 @@
               <a:buChar char="•"/>
             </a:pPr>
             <a:r>
-              <a:rPr lang="en-US" sz="1100" dirty="0">
+              <a:rPr lang="en-US" sz="1400" dirty="0">
                 <a:solidFill>
                   <a:srgbClr val="FBF5E6"/>
                 </a:solidFill>
@@ -5853,7 +5866,7 @@
               </a:rPr>
               <a:t>禁止複雜或混合類型的音樂</a:t>
             </a:r>
-            <a:endParaRPr lang="en-US" sz="1100" dirty="0"/>
+            <a:endParaRPr lang="en-US" sz="1400" dirty="0"/>
           </a:p>
           <a:p>
             <a:pPr marL="342900" indent="-342900">
@@ -5864,7 +5877,7 @@
               <a:buChar char="•"/>
             </a:pPr>
             <a:r>
-              <a:rPr lang="en-US" sz="1100" dirty="0">
+              <a:rPr lang="en-US" sz="1400" dirty="0">
                 <a:solidFill>
                   <a:srgbClr val="FBF5E6"/>
                 </a:solidFill>
@@ -5874,7 +5887,7 @@
               </a:rPr>
               <a:t>Banned complex or mixed musical genres</a:t>
             </a:r>
-            <a:endParaRPr lang="en-US" sz="1100" dirty="0"/>
+            <a:endParaRPr lang="en-US" sz="1400" dirty="0"/>
           </a:p>
           <a:p>
             <a:pPr marL="342900" indent="-342900">
@@ -5885,7 +5898,7 @@
               <a:buChar char="•"/>
             </a:pPr>
             <a:r>
-              <a:rPr lang="en-US" sz="1100" dirty="0">
+              <a:rPr lang="en-US" sz="1400" dirty="0">
                 <a:solidFill>
                   <a:srgbClr val="FBF5E6"/>
                 </a:solidFill>
@@ -5893,9 +5906,9 @@
                 <a:ea typeface="Calibri" pitchFamily="34" charset="-122"/>
                 <a:cs typeface="Calibri" pitchFamily="34" charset="-120"/>
               </a:rPr>
-              <a:t>⚠️ 「音樂法律不可改變」→ 藝術無法度導致社會無法紀</a:t>
-            </a:r>
-            <a:endParaRPr lang="en-US" sz="1100" dirty="0"/>
+              <a:t>■ 「音樂法律不可改變」→ 藝術無法度導致社會無法紀</a:t>
+            </a:r>
+            <a:endParaRPr lang="en-US" sz="1400" dirty="0"/>
           </a:p>
           <a:p>
             <a:pPr marL="342900" indent="-342900">
@@ -5906,7 +5919,7 @@
               <a:buChar char="•"/>
             </a:pPr>
             <a:r>
-              <a:rPr lang="en-US" sz="1100" dirty="0">
+              <a:rPr lang="en-US" sz="1400" dirty="0">
                 <a:solidFill>
                   <a:srgbClr val="FBF5E6"/>
                 </a:solidFill>
@@ -5916,7 +5929,7 @@
               </a:rPr>
               <a:t>Musical conventions must not change: lawlessness in art → anarchy</a:t>
             </a:r>
-            <a:endParaRPr lang="en-US" sz="1100" dirty="0"/>
+            <a:endParaRPr lang="en-US" sz="1400" dirty="0"/>
           </a:p>
         </p:txBody>
       </p:sp>
@@ -5997,14 +6010,14 @@
           <a:ln/>
         </p:spPr>
         <p:txBody>
-          <a:bodyPr wrap="square" rtlCol="0" anchor="ctr"/>
+          <a:bodyPr wrap="square" rtlCol="0" anchor="t"/>
           <a:lstStyle/>
           <a:p>
             <a:pPr algn="ctr" indent="0" marL="0">
               <a:buNone/>
             </a:pPr>
             <a:r>
-              <a:rPr lang="en-US" sz="1100" i="1" dirty="0">
+              <a:rPr lang="en-US" sz="1400" i="1" dirty="0">
                 <a:solidFill>
                   <a:srgbClr val="E8D8A8"/>
                 </a:solidFill>
@@ -6014,7 +6027,7 @@
               </a:rPr>
               <a:t>384–322 BCE · 《政治學》Politics</a:t>
             </a:r>
-            <a:endParaRPr lang="en-US" sz="1100" dirty="0"/>
+            <a:endParaRPr lang="en-US" sz="1400" dirty="0"/>
           </a:p>
         </p:txBody>
       </p:sp>
@@ -6067,7 +6080,7 @@
               <a:buChar char="•"/>
             </a:pPr>
             <a:r>
-              <a:rPr lang="en-US" sz="1100" dirty="0">
+              <a:rPr lang="en-US" sz="1400" dirty="0">
                 <a:solidFill>
                   <a:srgbClr val="FBF5E6"/>
                 </a:solidFill>
@@ -6075,9 +6088,9 @@
                 <a:ea typeface="Calibri" pitchFamily="34" charset="-122"/>
                 <a:cs typeface="Calibri" pitchFamily="34" charset="-120"/>
               </a:rPr>
-              <a:t>音樂能模仿並因此激發人的ethos（性格狀態）</a:t>
-            </a:r>
-            <a:endParaRPr lang="en-US" sz="1100" dirty="0"/>
+              <a:t>音樂模仿情感，激發聽者的 ethos</a:t>
+            </a:r>
+            <a:endParaRPr lang="en-US" sz="1400" dirty="0"/>
           </a:p>
           <a:p>
             <a:pPr marL="342900" indent="-342900">
@@ -6088,7 +6101,7 @@
               <a:buChar char="•"/>
             </a:pPr>
             <a:r>
-              <a:rPr lang="en-US" sz="1100" dirty="0">
+              <a:rPr lang="en-US" sz="1400" dirty="0">
                 <a:solidFill>
                   <a:srgbClr val="FBF5E6"/>
                 </a:solidFill>
@@ -6096,9 +6109,9 @@
                 <a:ea typeface="Calibri" pitchFamily="34" charset="-122"/>
                 <a:cs typeface="Calibri" pitchFamily="34" charset="-120"/>
               </a:rPr>
-              <a:t>Music imitates and thus arouses an ethos in the listener</a:t>
-            </a:r>
-            <a:endParaRPr lang="en-US" sz="1100" dirty="0"/>
+              <a:t>Music imitates and arouses ethos</a:t>
+            </a:r>
+            <a:endParaRPr lang="en-US" sz="1400" dirty="0"/>
           </a:p>
           <a:p>
             <a:pPr marL="342900" indent="-342900">
@@ -6109,7 +6122,7 @@
               <a:buChar char="•"/>
             </a:pPr>
             <a:r>
-              <a:rPr lang="en-US" sz="1100" dirty="0">
+              <a:rPr lang="en-US" sz="1400" dirty="0">
                 <a:solidFill>
                   <a:srgbClr val="FBF5E6"/>
                 </a:solidFill>
@@ -6117,9 +6130,9 @@
                 <a:ea typeface="Calibri" pitchFamily="34" charset="-122"/>
                 <a:cs typeface="Calibri" pitchFamily="34" charset="-120"/>
               </a:rPr>
-              <a:t>態度比柏拉圖更開放：音樂亦可用於娛樂</a:t>
-            </a:r>
-            <a:endParaRPr lang="en-US" sz="1100" dirty="0"/>
+              <a:t>比柏拉圖更開放：音樂亦可用於娛樂</a:t>
+            </a:r>
+            <a:endParaRPr lang="en-US" sz="1400" dirty="0"/>
           </a:p>
           <a:p>
             <a:pPr marL="342900" indent="-342900">
@@ -6130,7 +6143,7 @@
               <a:buChar char="•"/>
             </a:pPr>
             <a:r>
-              <a:rPr lang="en-US" sz="1100" dirty="0">
+              <a:rPr lang="en-US" sz="1400" dirty="0">
                 <a:solidFill>
                   <a:srgbClr val="FBF5E6"/>
                 </a:solidFill>
@@ -6138,9 +6151,9 @@
                 <a:ea typeface="Calibri" pitchFamily="34" charset="-122"/>
                 <a:cs typeface="Calibri" pitchFamily="34" charset="-120"/>
               </a:rPr>
-              <a:t>More open than Plato: music can serve enjoyment too</a:t>
-            </a:r>
-            <a:endParaRPr lang="en-US" sz="1100" dirty="0"/>
+              <a:t>More open: music can serve enjoyment</a:t>
+            </a:r>
+            <a:endParaRPr lang="en-US" sz="1400" dirty="0"/>
           </a:p>
           <a:p>
             <a:pPr marL="342900" indent="-342900">
@@ -6151,7 +6164,7 @@
               <a:buChar char="•"/>
             </a:pPr>
             <a:r>
-              <a:rPr lang="en-US" sz="1100" dirty="0">
+              <a:rPr lang="en-US" sz="1400" dirty="0">
                 <a:solidFill>
                   <a:srgbClr val="FBF5E6"/>
                 </a:solidFill>
@@ -6159,9 +6172,9 @@
                 <a:ea typeface="Calibri" pitchFamily="34" charset="-122"/>
                 <a:cs typeface="Calibri" pitchFamily="34" charset="-120"/>
               </a:rPr>
-              <a:t>負面情緒（恐懼、悲憫）可藉音樂宣洩（catharsis）</a:t>
-            </a:r>
-            <a:endParaRPr lang="en-US" sz="1100" dirty="0"/>
+              <a:t>負面情緒可藉音樂宣洩（catharsis）</a:t>
+            </a:r>
+            <a:endParaRPr lang="en-US" sz="1400" dirty="0"/>
           </a:p>
           <a:p>
             <a:pPr marL="342900" indent="-342900">
@@ -6172,7 +6185,7 @@
               <a:buChar char="•"/>
             </a:pPr>
             <a:r>
-              <a:rPr lang="en-US" sz="1100" dirty="0">
+              <a:rPr lang="en-US" sz="1400" dirty="0">
                 <a:solidFill>
                   <a:srgbClr val="FBF5E6"/>
                 </a:solidFill>
@@ -6180,9 +6193,9 @@
                 <a:ea typeface="Calibri" pitchFamily="34" charset="-122"/>
                 <a:cs typeface="Calibri" pitchFamily="34" charset="-120"/>
               </a:rPr>
-              <a:t>Negative emotions purged through music — catharsis</a:t>
-            </a:r>
-            <a:endParaRPr lang="en-US" sz="1100" dirty="0"/>
+              <a:t>Negative emotions purged — catharsis</a:t>
+            </a:r>
+            <a:endParaRPr lang="en-US" sz="1400" dirty="0"/>
           </a:p>
           <a:p>
             <a:pPr marL="342900" indent="-342900">
@@ -6193,7 +6206,7 @@
               <a:buChar char="•"/>
             </a:pPr>
             <a:r>
-              <a:rPr lang="en-US" sz="1100" dirty="0">
+              <a:rPr lang="en-US" sz="1400" dirty="0">
                 <a:solidFill>
                   <a:srgbClr val="FBF5E6"/>
                 </a:solidFill>
@@ -6201,9 +6214,9 @@
                 <a:ea typeface="Calibri" pitchFamily="34" charset="-122"/>
                 <a:cs typeface="Calibri" pitchFamily="34" charset="-120"/>
               </a:rPr>
-              <a:t>Mixolydian → 悲傷；Dorian → 平靜；Phrygian → 激昂</a:t>
-            </a:r>
-            <a:endParaRPr lang="en-US" sz="1100" dirty="0"/>
+              <a:t>Mixolydian 悲傷、Dorian 平靜、Phrygian 激昂</a:t>
+            </a:r>
+            <a:endParaRPr lang="en-US" sz="1400" dirty="0"/>
           </a:p>
           <a:p>
             <a:pPr marL="342900" indent="-342900">
@@ -6214,7 +6227,7 @@
               <a:buChar char="•"/>
             </a:pPr>
             <a:r>
-              <a:rPr lang="en-US" sz="1100" dirty="0">
+              <a:rPr lang="en-US" sz="1400" dirty="0">
                 <a:solidFill>
                   <a:srgbClr val="FBF5E6"/>
                 </a:solidFill>
@@ -6222,9 +6235,9 @@
                 <a:ea typeface="Calibri" pitchFamily="34" charset="-122"/>
                 <a:cs typeface="Calibri" pitchFamily="34" charset="-120"/>
               </a:rPr>
-              <a:t>Mixolydian = mournful; Dorian = composed; Phrygian = ecstatic</a:t>
-            </a:r>
-            <a:endParaRPr lang="en-US" sz="1100" dirty="0"/>
+              <a:t>Mode effects shape character and emotion</a:t>
+            </a:r>
+            <a:endParaRPr lang="en-US" sz="1400" dirty="0"/>
           </a:p>
         </p:txBody>
       </p:sp>
@@ -6436,14 +6449,14 @@
           <a:ln/>
         </p:spPr>
         <p:txBody>
-          <a:bodyPr wrap="square" lIns="0" tIns="0" rIns="0" bIns="0" rtlCol="0" anchor="ctr"/>
+          <a:bodyPr wrap="square" lIns="0" tIns="0" rIns="0" bIns="0" rtlCol="0" anchor="t"/>
           <a:lstStyle/>
           <a:p>
             <a:pPr indent="0" marL="0">
               <a:buNone/>
             </a:pPr>
             <a:r>
-              <a:rPr lang="en-US" sz="1150" dirty="0">
+              <a:rPr lang="en-US" sz="1400" dirty="0">
                 <a:solidFill>
                   <a:srgbClr val="2C1810"/>
                 </a:solidFill>
@@ -6453,7 +6466,7 @@
               </a:rPr>
               <a:t>四個音，跨越完全四度；是希臘音樂體系的基本單位</a:t>
             </a:r>
-            <a:endParaRPr lang="en-US" sz="1150" dirty="0"/>
+            <a:endParaRPr lang="en-US" sz="1400" dirty="0"/>
           </a:p>
         </p:txBody>
       </p:sp>
@@ -6495,14 +6508,14 @@
           <a:ln/>
         </p:spPr>
         <p:txBody>
-          <a:bodyPr wrap="square" lIns="0" tIns="0" rIns="0" bIns="0" rtlCol="0" anchor="ctr"/>
+          <a:bodyPr wrap="square" lIns="0" tIns="0" rIns="0" bIns="0" rtlCol="0" anchor="t"/>
           <a:lstStyle/>
           <a:p>
             <a:pPr indent="0" marL="0">
               <a:buNone/>
             </a:pPr>
             <a:r>
-              <a:rPr lang="en-US" sz="1150" i="1" dirty="0">
+              <a:rPr lang="en-US" sz="1400" i="1" dirty="0">
                 <a:solidFill>
                   <a:srgbClr val="5C3A28"/>
                 </a:solidFill>
@@ -6512,7 +6525,7 @@
               </a:rPr>
               <a:t>4 notes spanning a perfect fourth — building block of Greek scales</a:t>
             </a:r>
-            <a:endParaRPr lang="en-US" sz="1150" dirty="0"/>
+            <a:endParaRPr lang="en-US" sz="1400" dirty="0"/>
           </a:p>
         </p:txBody>
       </p:sp>
@@ -6534,14 +6547,14 @@
           <a:ln/>
         </p:spPr>
         <p:txBody>
-          <a:bodyPr wrap="square" lIns="0" tIns="0" rIns="0" bIns="0" rtlCol="0" anchor="ctr"/>
+          <a:bodyPr wrap="square" lIns="0" tIns="0" rIns="0" bIns="0" rtlCol="0" anchor="t"/>
           <a:lstStyle/>
           <a:p>
             <a:pPr indent="0" marL="0">
               <a:buNone/>
             </a:pPr>
             <a:r>
-              <a:rPr lang="en-US" sz="1050" dirty="0">
+              <a:rPr lang="en-US" sz="1400" dirty="0">
                 <a:solidFill>
                   <a:srgbClr val="4A3828"/>
                 </a:solidFill>
@@ -6551,7 +6564,7 @@
               </a:rPr>
               <a:t>三種類型：全音階（diatonic）、半音階（chromatic）、異名同音（enharmonic）</a:t>
             </a:r>
-            <a:endParaRPr lang="en-US" sz="1050" dirty="0"/>
+            <a:endParaRPr lang="en-US" sz="1400" dirty="0"/>
           </a:p>
         </p:txBody>
       </p:sp>
@@ -6632,14 +6645,14 @@
           <a:ln/>
         </p:spPr>
         <p:txBody>
-          <a:bodyPr wrap="square" lIns="0" tIns="0" rIns="0" bIns="0" rtlCol="0" anchor="ctr"/>
+          <a:bodyPr wrap="square" lIns="0" tIns="0" rIns="0" bIns="0" rtlCol="0" anchor="t"/>
           <a:lstStyle/>
           <a:p>
             <a:pPr indent="0" marL="0">
               <a:buNone/>
             </a:pPr>
             <a:r>
-              <a:rPr lang="en-US" sz="1150" dirty="0">
+              <a:rPr lang="en-US" sz="1400" dirty="0">
                 <a:solidFill>
                   <a:srgbClr val="2C1810"/>
                 </a:solidFill>
@@ -6649,7 +6662,7 @@
               </a:rPr>
               <a:t>四個四音列組合成兩個八度的音域體系</a:t>
             </a:r>
-            <a:endParaRPr lang="en-US" sz="1150" dirty="0"/>
+            <a:endParaRPr lang="en-US" sz="1400" dirty="0"/>
           </a:p>
         </p:txBody>
       </p:sp>
@@ -6691,14 +6704,14 @@
           <a:ln/>
         </p:spPr>
         <p:txBody>
-          <a:bodyPr wrap="square" lIns="0" tIns="0" rIns="0" bIns="0" rtlCol="0" anchor="ctr"/>
+          <a:bodyPr wrap="square" lIns="0" tIns="0" rIns="0" bIns="0" rtlCol="0" anchor="t"/>
           <a:lstStyle/>
           <a:p>
             <a:pPr indent="0" marL="0">
               <a:buNone/>
             </a:pPr>
             <a:r>
-              <a:rPr lang="en-US" sz="1150" i="1" dirty="0">
+              <a:rPr lang="en-US" sz="1400" i="1" dirty="0">
                 <a:solidFill>
                   <a:srgbClr val="5C3A28"/>
                 </a:solidFill>
@@ -6708,7 +6721,7 @@
               </a:rPr>
               <a:t>4 tetrachords combined to span two octaves</a:t>
             </a:r>
-            <a:endParaRPr lang="en-US" sz="1150" dirty="0"/>
+            <a:endParaRPr lang="en-US" sz="1400" dirty="0"/>
           </a:p>
         </p:txBody>
       </p:sp>
@@ -6730,14 +6743,14 @@
           <a:ln/>
         </p:spPr>
         <p:txBody>
-          <a:bodyPr wrap="square" lIns="0" tIns="0" rIns="0" bIns="0" rtlCol="0" anchor="ctr"/>
+          <a:bodyPr wrap="square" lIns="0" tIns="0" rIns="0" bIns="0" rtlCol="0" anchor="t"/>
           <a:lstStyle/>
           <a:p>
             <a:pPr indent="0" marL="0">
               <a:buNone/>
             </a:pPr>
             <a:r>
-              <a:rPr lang="en-US" sz="1050" dirty="0">
+              <a:rPr lang="en-US" sz="1400" dirty="0">
                 <a:solidFill>
                   <a:srgbClr val="4A3828"/>
                 </a:solidFill>
@@ -6747,7 +6760,7 @@
               </a:rPr>
               <a:t>各音和四音列均有專用名稱（如 mese、hypaton、diezeugmenon）</a:t>
             </a:r>
-            <a:endParaRPr lang="en-US" sz="1050" dirty="0"/>
+            <a:endParaRPr lang="en-US" sz="1400" dirty="0"/>
           </a:p>
         </p:txBody>
       </p:sp>
@@ -6828,14 +6841,14 @@
           <a:ln/>
         </p:spPr>
         <p:txBody>
-          <a:bodyPr wrap="square" lIns="0" tIns="0" rIns="0" bIns="0" rtlCol="0" anchor="ctr"/>
+          <a:bodyPr wrap="square" lIns="0" tIns="0" rIns="0" bIns="0" rtlCol="0" anchor="t"/>
           <a:lstStyle/>
           <a:p>
             <a:pPr indent="0" marL="0">
               <a:buNone/>
             </a:pPr>
             <a:r>
-              <a:rPr lang="en-US" sz="1150" dirty="0">
+              <a:rPr lang="en-US" sz="1400" dirty="0">
                 <a:solidFill>
                   <a:srgbClr val="2C1810"/>
                 </a:solidFill>
@@ -6845,7 +6858,7 @@
               </a:rPr>
               <a:t>七種全音/半音排列方式 → 後來影響中世紀調式</a:t>
             </a:r>
-            <a:endParaRPr lang="en-US" sz="1150" dirty="0"/>
+            <a:endParaRPr lang="en-US" sz="1400" dirty="0"/>
           </a:p>
         </p:txBody>
       </p:sp>
@@ -6887,14 +6900,14 @@
           <a:ln/>
         </p:spPr>
         <p:txBody>
-          <a:bodyPr wrap="square" lIns="0" tIns="0" rIns="0" bIns="0" rtlCol="0" anchor="ctr"/>
+          <a:bodyPr wrap="square" lIns="0" tIns="0" rIns="0" bIns="0" rtlCol="0" anchor="t"/>
           <a:lstStyle/>
           <a:p>
             <a:pPr indent="0" marL="0">
               <a:buNone/>
             </a:pPr>
             <a:r>
-              <a:rPr lang="en-US" sz="1150" i="1" dirty="0">
+              <a:rPr lang="en-US" sz="1400" i="1" dirty="0">
                 <a:solidFill>
                   <a:srgbClr val="5C3A28"/>
                 </a:solidFill>
@@ -6904,7 +6917,7 @@
               </a:rPr>
               <a:t>7 arrangements of T &amp; S within an octave → influenced medieval modes</a:t>
             </a:r>
-            <a:endParaRPr lang="en-US" sz="1150" dirty="0"/>
+            <a:endParaRPr lang="en-US" sz="1400" dirty="0"/>
           </a:p>
         </p:txBody>
       </p:sp>
@@ -6926,14 +6939,14 @@
           <a:ln/>
         </p:spPr>
         <p:txBody>
-          <a:bodyPr wrap="square" lIns="0" tIns="0" rIns="0" bIns="0" rtlCol="0" anchor="ctr"/>
+          <a:bodyPr wrap="square" lIns="0" tIns="0" rIns="0" bIns="0" rtlCol="0" anchor="t"/>
           <a:lstStyle/>
           <a:p>
             <a:pPr indent="0" marL="0">
               <a:buNone/>
             </a:pPr>
             <a:r>
-              <a:rPr lang="en-US" sz="1050" dirty="0">
+              <a:rPr lang="en-US" sz="1400" dirty="0">
                 <a:solidFill>
                   <a:srgbClr val="4A3828"/>
                 </a:solidFill>
@@ -6943,7 +6956,7 @@
               </a:rPr>
               <a:t>Mixolydian, Lydian, Phrygian, Dorian, Hypolydian, Hypophrygian, Hypodorian</a:t>
             </a:r>
-            <a:endParaRPr lang="en-US" sz="1050" dirty="0"/>
+            <a:endParaRPr lang="en-US" sz="1400" dirty="0"/>
           </a:p>
         </p:txBody>
       </p:sp>
@@ -7024,14 +7037,14 @@
           <a:ln/>
         </p:spPr>
         <p:txBody>
-          <a:bodyPr wrap="square" lIns="0" tIns="0" rIns="0" bIns="0" rtlCol="0" anchor="ctr"/>
+          <a:bodyPr wrap="square" lIns="0" tIns="0" rIns="0" bIns="0" rtlCol="0" anchor="t"/>
           <a:lstStyle/>
           <a:p>
             <a:pPr indent="0" marL="0">
               <a:buNone/>
             </a:pPr>
             <a:r>
-              <a:rPr lang="en-US" sz="1150" dirty="0">
+              <a:rPr lang="en-US" sz="1400" dirty="0">
                 <a:solidFill>
                   <a:srgbClr val="2C1810"/>
                 </a:solidFill>
@@ -7041,7 +7054,7 @@
               </a:rPr>
               <a:t>Aristoxenus 等人以移調方式定義的 15 種音高範圍</a:t>
             </a:r>
-            <a:endParaRPr lang="en-US" sz="1150" dirty="0"/>
+            <a:endParaRPr lang="en-US" sz="1400" dirty="0"/>
           </a:p>
         </p:txBody>
       </p:sp>
@@ -7083,14 +7096,14 @@
           <a:ln/>
         </p:spPr>
         <p:txBody>
-          <a:bodyPr wrap="square" lIns="0" tIns="0" rIns="0" bIns="0" rtlCol="0" anchor="ctr"/>
+          <a:bodyPr wrap="square" lIns="0" tIns="0" rIns="0" bIns="0" rtlCol="0" anchor="t"/>
           <a:lstStyle/>
           <a:p>
             <a:pPr indent="0" marL="0">
               <a:buNone/>
             </a:pPr>
             <a:r>
-              <a:rPr lang="en-US" sz="1150" i="1" dirty="0">
+              <a:rPr lang="en-US" sz="1400" i="1" dirty="0">
                 <a:solidFill>
                   <a:srgbClr val="5C3A28"/>
                 </a:solidFill>
@@ -7100,7 +7113,7 @@
               </a:rPr>
               <a:t>15 scale positions defined by transposition (Aristoxenus et al.)</a:t>
             </a:r>
-            <a:endParaRPr lang="en-US" sz="1150" dirty="0"/>
+            <a:endParaRPr lang="en-US" sz="1400" dirty="0"/>
           </a:p>
         </p:txBody>
       </p:sp>
@@ -7122,14 +7135,14 @@
           <a:ln/>
         </p:spPr>
         <p:txBody>
-          <a:bodyPr wrap="square" lIns="0" tIns="0" rIns="0" bIns="0" rtlCol="0" anchor="ctr"/>
+          <a:bodyPr wrap="square" lIns="0" tIns="0" rIns="0" bIns="0" rtlCol="0" anchor="t"/>
           <a:lstStyle/>
           <a:p>
             <a:pPr indent="0" marL="0">
               <a:buNone/>
             </a:pPr>
             <a:r>
-              <a:rPr lang="en-US" sz="1050" dirty="0">
+              <a:rPr lang="en-US" sz="1400" dirty="0">
                 <a:solidFill>
                   <a:srgbClr val="4A3828"/>
                 </a:solidFill>
@@ -7139,7 +7152,7 @@
               </a:rPr>
               <a:t>較高的 tonoi 被認為充滿活力，較低的則平靜</a:t>
             </a:r>
-            <a:endParaRPr lang="en-US" sz="1050" dirty="0"/>
+            <a:endParaRPr lang="en-US" sz="1400" dirty="0"/>
           </a:p>
         </p:txBody>
       </p:sp>
@@ -7292,14 +7305,14 @@
           <a:ln/>
         </p:spPr>
         <p:txBody>
-          <a:bodyPr wrap="square" rtlCol="0" anchor="ctr"/>
+          <a:bodyPr wrap="square" rtlCol="0" anchor="t"/>
           <a:lstStyle/>
           <a:p>
             <a:pPr indent="0" marL="0">
               <a:buNone/>
             </a:pPr>
             <a:r>
-              <a:rPr lang="en-US" sz="1300" b="1" dirty="0">
+              <a:rPr lang="en-US" sz="1400" b="1" dirty="0">
                 <a:solidFill>
                   <a:srgbClr val="E8D8A8"/>
                 </a:solidFill>
@@ -7313,7 +7326,7 @@
               <a:buNone/>
             </a:pPr>
             <a:r>
-              <a:rPr lang="en-US" sz="1300" dirty="0">
+              <a:rPr lang="en-US" sz="1400" dirty="0">
                 <a:solidFill>
                   <a:srgbClr val="E8D8A8"/>
                 </a:solidFill>
@@ -7323,14 +7336,14 @@
               </a:rPr>
               <a:t>，時間跨度從西元前 5 世紀到西元 4 世紀。</a:t>
             </a:r>
-            <a:endParaRPr lang="en-US" sz="1300" dirty="0"/>
+            <a:endParaRPr lang="en-US" sz="1400" dirty="0"/>
           </a:p>
           <a:p>
             <a:pPr indent="0" marL="0">
               <a:buNone/>
             </a:pPr>
             <a:r>
-              <a:rPr lang="en-US" sz="1300" dirty="0">
+              <a:rPr lang="en-US" sz="1400" dirty="0">
                 <a:solidFill>
                   <a:srgbClr val="E8D8A8"/>
                 </a:solidFill>
@@ -7340,7 +7353,7 @@
               </a:rPr>
               <a:t>最早的兩件來自歐里庇得斯（Euripides）劇作中的合唱。</a:t>
             </a:r>
-            <a:endParaRPr lang="en-US" sz="1300" dirty="0"/>
+            <a:endParaRPr lang="en-US" sz="1400" dirty="0"/>
           </a:p>
         </p:txBody>
       </p:sp>
@@ -7421,14 +7434,14 @@
           <a:ln/>
         </p:spPr>
         <p:txBody>
-          <a:bodyPr wrap="square" rtlCol="0" anchor="ctr"/>
+          <a:bodyPr wrap="square" rtlCol="0" anchor="t"/>
           <a:lstStyle/>
           <a:p>
             <a:pPr algn="ctr" indent="0" marL="0">
               <a:buNone/>
             </a:pPr>
             <a:r>
-              <a:rPr lang="en-US" sz="1200" i="1" dirty="0">
+              <a:rPr lang="en-US" sz="1400" i="1" dirty="0">
                 <a:solidFill>
                   <a:srgbClr val="E8D8A8"/>
                 </a:solidFill>
@@ -7438,7 +7451,7 @@
               </a:rPr>
               <a:t>現存最古老完整的音樂作品 · ca. 1st century CE · 出土於土耳其特拉勒斯（Tralles）</a:t>
             </a:r>
-            <a:endParaRPr lang="en-US" sz="1200" dirty="0"/>
+            <a:endParaRPr lang="en-US" sz="1400" dirty="0"/>
           </a:p>
         </p:txBody>
       </p:sp>
@@ -7547,7 +7560,7 @@
               <a:buNone/>
             </a:pPr>
             <a:r>
-              <a:rPr lang="en-US" sz="1300" dirty="0">
+              <a:rPr lang="en-US" sz="1400" dirty="0">
                 <a:solidFill>
                   <a:srgbClr val="FBF5E6"/>
                 </a:solidFill>
@@ -7563,7 +7576,7 @@
               <a:buNone/>
             </a:pPr>
             <a:r>
-              <a:rPr lang="en-US" sz="1300" i="1" dirty="0">
+              <a:rPr lang="en-US" sz="1400" i="1" dirty="0">
                 <a:solidFill>
                   <a:srgbClr val="E8D8A8"/>
                 </a:solidFill>
@@ -7580,7 +7593,7 @@
               <a:buNone/>
             </a:pPr>
             <a:r>
-              <a:rPr lang="en-US" sz="1300" i="1" dirty="0">
+              <a:rPr lang="en-US" sz="1400" i="1" dirty="0">
                 <a:solidFill>
                   <a:srgbClr val="E8D8A8"/>
                 </a:solidFill>
@@ -7770,7 +7783,7 @@
               <a:buNone/>
             </a:pPr>
             <a:r>
-              <a:rPr lang="en-US" sz="1350" b="1" dirty="0">
+              <a:rPr lang="en-US" sz="1400" b="1" dirty="0">
                 <a:solidFill>
                   <a:srgbClr val="A84030"/>
                 </a:solidFill>
@@ -7778,9 +7791,9 @@
                 <a:ea typeface="Georgia" pitchFamily="34" charset="-122"/>
                 <a:cs typeface="Georgia" pitchFamily="34" charset="-120"/>
               </a:rPr>
-              <a:t>🎭 功能 Function</a:t>
-            </a:r>
-            <a:endParaRPr lang="en-US" sz="1350" dirty="0"/>
+              <a:t>■ 功能 Function</a:t>
+            </a:r>
+            <a:endParaRPr lang="en-US" sz="1400" dirty="0"/>
           </a:p>
         </p:txBody>
       </p:sp>
@@ -7802,14 +7815,14 @@
           <a:ln/>
         </p:spPr>
         <p:txBody>
-          <a:bodyPr wrap="square" lIns="0" tIns="0" rIns="0" bIns="0" rtlCol="0" anchor="ctr"/>
+          <a:bodyPr wrap="square" lIns="0" tIns="0" rIns="0" bIns="0" rtlCol="0" anchor="t"/>
           <a:lstStyle/>
           <a:p>
             <a:pPr indent="0" marL="0">
               <a:buNone/>
             </a:pPr>
             <a:r>
-              <a:rPr lang="en-US" sz="1150" dirty="0">
+              <a:rPr lang="en-US" sz="1400" dirty="0">
                 <a:solidFill>
                   <a:srgbClr val="2C1810"/>
                 </a:solidFill>
@@ -7819,14 +7832,14 @@
               </a:rPr>
               <a:t>婚禮、葬禮、公共競技場（鬥劍士）、宗教儀式、公共演出</a:t>
             </a:r>
-            <a:endParaRPr lang="en-US" sz="1150" dirty="0"/>
+            <a:endParaRPr lang="en-US" sz="1400" dirty="0"/>
           </a:p>
           <a:p>
             <a:pPr indent="0" marL="0">
               <a:buNone/>
             </a:pPr>
             <a:r>
-              <a:rPr lang="en-US" sz="1150" dirty="0">
+              <a:rPr lang="en-US" sz="1400" dirty="0">
                 <a:solidFill>
                   <a:srgbClr val="2C1810"/>
                 </a:solidFill>
@@ -7836,7 +7849,7 @@
               </a:rPr>
               <a:t>Weddings, funerals, arena (gladiatorial games), religion, public performance</a:t>
             </a:r>
-            <a:endParaRPr lang="en-US" sz="1150" dirty="0"/>
+            <a:endParaRPr lang="en-US" sz="1400" dirty="0"/>
           </a:p>
         </p:txBody>
       </p:sp>
@@ -7885,7 +7898,7 @@
               <a:buNone/>
             </a:pPr>
             <a:r>
-              <a:rPr lang="en-US" sz="1350" b="1" dirty="0">
+              <a:rPr lang="en-US" sz="1400" b="1" dirty="0">
                 <a:solidFill>
                   <a:srgbClr val="A84030"/>
                 </a:solidFill>
@@ -7893,9 +7906,9 @@
                 <a:ea typeface="Georgia" pitchFamily="34" charset="-122"/>
                 <a:cs typeface="Georgia" pitchFamily="34" charset="-120"/>
               </a:rPr>
-              <a:t>🔱 起源 Origin</a:t>
-            </a:r>
-            <a:endParaRPr lang="en-US" sz="1350" dirty="0"/>
+              <a:t>■ 起源 Origin</a:t>
+            </a:r>
+            <a:endParaRPr lang="en-US" sz="1400" dirty="0"/>
           </a:p>
         </p:txBody>
       </p:sp>
@@ -7917,14 +7930,14 @@
           <a:ln/>
         </p:spPr>
         <p:txBody>
-          <a:bodyPr wrap="square" lIns="0" tIns="0" rIns="0" bIns="0" rtlCol="0" anchor="ctr"/>
+          <a:bodyPr wrap="square" lIns="0" tIns="0" rIns="0" bIns="0" rtlCol="0" anchor="t"/>
           <a:lstStyle/>
           <a:p>
             <a:pPr indent="0" marL="0">
               <a:buNone/>
             </a:pPr>
             <a:r>
-              <a:rPr lang="en-US" sz="1150" dirty="0">
+              <a:rPr lang="en-US" sz="1400" dirty="0">
                 <a:solidFill>
                   <a:srgbClr val="2C1810"/>
                 </a:solidFill>
@@ -7934,14 +7947,14 @@
               </a:rPr>
               <a:t>146 BCE 希臘成為羅馬行省後，大量吸收希臘音樂文化</a:t>
             </a:r>
-            <a:endParaRPr lang="en-US" sz="1150" dirty="0"/>
+            <a:endParaRPr lang="en-US" sz="1400" dirty="0"/>
           </a:p>
           <a:p>
             <a:pPr indent="0" marL="0">
               <a:buNone/>
             </a:pPr>
             <a:r>
-              <a:rPr lang="en-US" sz="1150" dirty="0">
+              <a:rPr lang="en-US" sz="1400" dirty="0">
                 <a:solidFill>
                   <a:srgbClr val="2C1810"/>
                 </a:solidFill>
@@ -7951,7 +7964,7 @@
               </a:rPr>
               <a:t>After 146 BCE Greek conquest → massive Greek musical influence on Rome</a:t>
             </a:r>
-            <a:endParaRPr lang="en-US" sz="1150" dirty="0"/>
+            <a:endParaRPr lang="en-US" sz="1400" dirty="0"/>
           </a:p>
         </p:txBody>
       </p:sp>
@@ -8000,7 +8013,7 @@
               <a:buNone/>
             </a:pPr>
             <a:r>
-              <a:rPr lang="en-US" sz="1350" b="1" dirty="0">
+              <a:rPr lang="en-US" sz="1400" b="1" dirty="0">
                 <a:solidFill>
                   <a:srgbClr val="A84030"/>
                 </a:solidFill>
@@ -8008,9 +8021,9 @@
                 <a:ea typeface="Georgia" pitchFamily="34" charset="-122"/>
                 <a:cs typeface="Georgia" pitchFamily="34" charset="-120"/>
               </a:rPr>
-              <a:t>📐 Hydraulis 水風琴</a:t>
-            </a:r>
-            <a:endParaRPr lang="en-US" sz="1350" dirty="0"/>
+              <a:t>■ Hydraulis 水風琴</a:t>
+            </a:r>
+            <a:endParaRPr lang="en-US" sz="1400" dirty="0"/>
           </a:p>
         </p:txBody>
       </p:sp>
@@ -8032,14 +8045,14 @@
           <a:ln/>
         </p:spPr>
         <p:txBody>
-          <a:bodyPr wrap="square" lIns="0" tIns="0" rIns="0" bIns="0" rtlCol="0" anchor="ctr"/>
+          <a:bodyPr wrap="square" lIns="0" tIns="0" rIns="0" bIns="0" rtlCol="0" anchor="t"/>
           <a:lstStyle/>
           <a:p>
             <a:pPr indent="0" marL="0">
               <a:buNone/>
             </a:pPr>
             <a:r>
-              <a:rPr lang="en-US" sz="1150" dirty="0">
+              <a:rPr lang="en-US" sz="1400" dirty="0">
                 <a:solidFill>
                   <a:srgbClr val="2C1810"/>
                 </a:solidFill>
@@ -8049,14 +8062,14 @@
               </a:rPr>
               <a:t>在競技場大受歡迎；用水壓控制的管風琴</a:t>
             </a:r>
-            <a:endParaRPr lang="en-US" sz="1150" dirty="0"/>
+            <a:endParaRPr lang="en-US" sz="1400" dirty="0"/>
           </a:p>
           <a:p>
             <a:pPr indent="0" marL="0">
               <a:buNone/>
             </a:pPr>
             <a:r>
-              <a:rPr lang="en-US" sz="1150" dirty="0">
+              <a:rPr lang="en-US" sz="1400" dirty="0">
                 <a:solidFill>
                   <a:srgbClr val="2C1810"/>
                 </a:solidFill>
@@ -8066,7 +8079,7 @@
               </a:rPr>
               <a:t>Popular in arenas; early organ operated by water pressure</a:t>
             </a:r>
-            <a:endParaRPr lang="en-US" sz="1150" dirty="0"/>
+            <a:endParaRPr lang="en-US" sz="1400" dirty="0"/>
           </a:p>
         </p:txBody>
       </p:sp>
@@ -8115,7 +8128,7 @@
               <a:buNone/>
             </a:pPr>
             <a:r>
-              <a:rPr lang="en-US" sz="1350" b="1" dirty="0">
+              <a:rPr lang="en-US" sz="1400" b="1" dirty="0">
                 <a:solidFill>
                   <a:srgbClr val="A84030"/>
                 </a:solidFill>
@@ -8123,9 +8136,9 @@
                 <a:ea typeface="Georgia" pitchFamily="34" charset="-122"/>
                 <a:cs typeface="Georgia" pitchFamily="34" charset="-120"/>
               </a:rPr>
-              <a:t>🎺 Tuba</a:t>
-            </a:r>
-            <a:endParaRPr lang="en-US" sz="1350" dirty="0"/>
+              <a:t>■ Tuba</a:t>
+            </a:r>
+            <a:endParaRPr lang="en-US" sz="1400" dirty="0"/>
           </a:p>
         </p:txBody>
       </p:sp>
@@ -8147,14 +8160,14 @@
           <a:ln/>
         </p:spPr>
         <p:txBody>
-          <a:bodyPr wrap="square" lIns="0" tIns="0" rIns="0" bIns="0" rtlCol="0" anchor="ctr"/>
+          <a:bodyPr wrap="square" lIns="0" tIns="0" rIns="0" bIns="0" rtlCol="0" anchor="t"/>
           <a:lstStyle/>
           <a:p>
             <a:pPr indent="0" marL="0">
               <a:buNone/>
             </a:pPr>
             <a:r>
-              <a:rPr lang="en-US" sz="1150" dirty="0">
+              <a:rPr lang="en-US" sz="1400" dirty="0">
                 <a:solidFill>
                   <a:srgbClr val="2C1810"/>
                 </a:solidFill>
@@ -8164,14 +8177,14 @@
               </a:rPr>
               <a:t>長約 1.3 公尺的直管銅號；軍隊與公共儀式</a:t>
             </a:r>
-            <a:endParaRPr lang="en-US" sz="1150" dirty="0"/>
+            <a:endParaRPr lang="en-US" sz="1400" dirty="0"/>
           </a:p>
           <a:p>
             <a:pPr indent="0" marL="0">
               <a:buNone/>
             </a:pPr>
             <a:r>
-              <a:rPr lang="en-US" sz="1150" dirty="0">
+              <a:rPr lang="en-US" sz="1400" dirty="0">
                 <a:solidFill>
                   <a:srgbClr val="2C1810"/>
                 </a:solidFill>
@@ -8181,7 +8194,7 @@
               </a:rPr>
               <a:t>Long straight bronze trumpet ~1.3m; military &amp; ceremonies</a:t>
             </a:r>
-            <a:endParaRPr lang="en-US" sz="1150" dirty="0"/>
+            <a:endParaRPr lang="en-US" sz="1400" dirty="0"/>
           </a:p>
         </p:txBody>
       </p:sp>
@@ -8310,7 +8323,7 @@
               <a:buChar char="•"/>
             </a:pPr>
             <a:r>
-              <a:rPr lang="en-US" sz="1200" dirty="0">
+              <a:rPr lang="en-US" sz="1400" dirty="0">
                 <a:solidFill>
                   <a:srgbClr val="FBF5E6"/>
                 </a:solidFill>
@@ -8320,7 +8333,7 @@
               </a:rPr>
               <a:t>Tibia（希臘 Aulos 的羅馬版）</a:t>
             </a:r>
-            <a:endParaRPr lang="en-US" sz="1200" dirty="0"/>
+            <a:endParaRPr lang="en-US" sz="1400" dirty="0"/>
           </a:p>
           <a:p>
             <a:pPr marL="342900" indent="-342900">
@@ -8331,7 +8344,7 @@
               <a:buChar char="•"/>
             </a:pPr>
             <a:r>
-              <a:rPr lang="en-US" sz="1200" dirty="0">
+              <a:rPr lang="en-US" sz="1400" dirty="0">
                 <a:solidFill>
                   <a:srgbClr val="FBF5E6"/>
                 </a:solidFill>
@@ -8341,7 +8354,7 @@
               </a:rPr>
               <a:t>Lyra / Cithara（弦樂）</a:t>
             </a:r>
-            <a:endParaRPr lang="en-US" sz="1200" dirty="0"/>
+            <a:endParaRPr lang="en-US" sz="1400" dirty="0"/>
           </a:p>
           <a:p>
             <a:pPr marL="342900" indent="-342900">
@@ -8352,7 +8365,7 @@
               <a:buChar char="•"/>
             </a:pPr>
             <a:r>
-              <a:rPr lang="en-US" sz="1200" dirty="0">
+              <a:rPr lang="en-US" sz="1400" dirty="0">
                 <a:solidFill>
                   <a:srgbClr val="FBF5E6"/>
                 </a:solidFill>
@@ -8362,7 +8375,7 @@
               </a:rPr>
               <a:t>Tuba（直管銅號）</a:t>
             </a:r>
-            <a:endParaRPr lang="en-US" sz="1200" dirty="0"/>
+            <a:endParaRPr lang="en-US" sz="1400" dirty="0"/>
           </a:p>
           <a:p>
             <a:pPr marL="342900" indent="-342900">
@@ -8373,7 +8386,7 @@
               <a:buChar char="•"/>
             </a:pPr>
             <a:r>
-              <a:rPr lang="en-US" sz="1200" dirty="0">
+              <a:rPr lang="en-US" sz="1400" dirty="0">
                 <a:solidFill>
                   <a:srgbClr val="FBF5E6"/>
                 </a:solidFill>
@@ -8383,7 +8396,7 @@
               </a:rPr>
               <a:t>Cornu（C 形號角）</a:t>
             </a:r>
-            <a:endParaRPr lang="en-US" sz="1200" dirty="0"/>
+            <a:endParaRPr lang="en-US" sz="1400" dirty="0"/>
           </a:p>
           <a:p>
             <a:pPr marL="342900" indent="-342900">
@@ -8394,7 +8407,7 @@
               <a:buChar char="•"/>
             </a:pPr>
             <a:r>
-              <a:rPr lang="en-US" sz="1200" dirty="0">
+              <a:rPr lang="en-US" sz="1400" dirty="0">
                 <a:solidFill>
                   <a:srgbClr val="FBF5E6"/>
                 </a:solidFill>
@@ -8404,7 +8417,7 @@
               </a:rPr>
               <a:t>Hydraulis（水風琴）</a:t>
             </a:r>
-            <a:endParaRPr lang="en-US" sz="1200" dirty="0"/>
+            <a:endParaRPr lang="en-US" sz="1400" dirty="0"/>
           </a:p>
           <a:p>
             <a:pPr marL="342900" indent="-342900">
@@ -8415,7 +8428,7 @@
               <a:buChar char="•"/>
             </a:pPr>
             <a:r>
-              <a:rPr lang="en-US" sz="1200" dirty="0">
+              <a:rPr lang="en-US" sz="1400" dirty="0">
                 <a:solidFill>
                   <a:srgbClr val="FBF5E6"/>
                 </a:solidFill>
@@ -8425,7 +8438,7 @@
               </a:rPr>
               <a:t>Sistrum（叉鈴，宗教用）</a:t>
             </a:r>
-            <a:endParaRPr lang="en-US" sz="1200" dirty="0"/>
+            <a:endParaRPr lang="en-US" sz="1400" dirty="0"/>
           </a:p>
           <a:p>
             <a:pPr marL="342900" indent="-342900">
@@ -8436,7 +8449,7 @@
               <a:buChar char="•"/>
             </a:pPr>
             <a:r>
-              <a:rPr lang="en-US" sz="1200" dirty="0">
+              <a:rPr lang="en-US" sz="1400" dirty="0">
                 <a:solidFill>
                   <a:srgbClr val="FBF5E6"/>
                 </a:solidFill>
@@ -8446,7 +8459,7 @@
               </a:rPr>
               <a:t>鼓、鈸、鈴 Drums, Cymbals, Bells</a:t>
             </a:r>
-            <a:endParaRPr lang="en-US" sz="1200" dirty="0"/>
+            <a:endParaRPr lang="en-US" sz="1400" dirty="0"/>
           </a:p>
         </p:txBody>
       </p:sp>
@@ -8665,7 +8678,7 @@
               <a:buNone/>
             </a:pPr>
             <a:r>
-              <a:rPr lang="en-US" sz="1250" b="1" dirty="0">
+              <a:rPr lang="en-US" sz="1400" b="1" dirty="0">
                 <a:solidFill>
                   <a:srgbClr val="C8A020"/>
                 </a:solidFill>
@@ -8673,9 +8686,9 @@
                 <a:ea typeface="Georgia" pitchFamily="34" charset="-122"/>
                 <a:cs typeface="Georgia" pitchFamily="34" charset="-120"/>
               </a:rPr>
-              <a:t>🎵 音階與調式</a:t>
-            </a:r>
-            <a:endParaRPr lang="en-US" sz="1250" dirty="0"/>
+              <a:t>音階與調式</a:t>
+            </a:r>
+            <a:endParaRPr lang="en-US" sz="1400" dirty="0"/>
           </a:p>
         </p:txBody>
       </p:sp>
@@ -8697,14 +8710,14 @@
           <a:ln/>
         </p:spPr>
         <p:txBody>
-          <a:bodyPr wrap="square" lIns="0" tIns="0" rIns="0" bIns="0" rtlCol="0" anchor="ctr"/>
+          <a:bodyPr wrap="square" lIns="0" tIns="0" rIns="0" bIns="0" rtlCol="0" anchor="t"/>
           <a:lstStyle/>
           <a:p>
             <a:pPr indent="0" marL="0">
               <a:buNone/>
             </a:pPr>
             <a:r>
-              <a:rPr lang="en-US" sz="1200" dirty="0">
+              <a:rPr lang="en-US" sz="1400" dirty="0">
                 <a:solidFill>
                   <a:srgbClr val="E8D8A8"/>
                 </a:solidFill>
@@ -8714,14 +8727,14 @@
               </a:rPr>
               <a:t>七聲音階與調式體系，直接影響中世紀教會調式和現代大小調</a:t>
             </a:r>
-            <a:endParaRPr lang="en-US" sz="1200" dirty="0"/>
+            <a:endParaRPr lang="en-US" sz="1400" dirty="0"/>
           </a:p>
           <a:p>
             <a:pPr indent="0" marL="0">
               <a:buNone/>
             </a:pPr>
             <a:r>
-              <a:rPr lang="en-US" sz="1200" dirty="0">
+              <a:rPr lang="en-US" sz="1400" dirty="0">
                 <a:solidFill>
                   <a:srgbClr val="E8D8A8"/>
                 </a:solidFill>
@@ -8731,7 +8744,7 @@
               </a:rPr>
               <a:t>7-note scales and modes → medieval church modes → modern major/minor</a:t>
             </a:r>
-            <a:endParaRPr lang="en-US" sz="1200" dirty="0"/>
+            <a:endParaRPr lang="en-US" sz="1400" dirty="0"/>
           </a:p>
         </p:txBody>
       </p:sp>
@@ -8780,7 +8793,7 @@
               <a:buNone/>
             </a:pPr>
             <a:r>
-              <a:rPr lang="en-US" sz="1250" b="1" dirty="0">
+              <a:rPr lang="en-US" sz="1400" b="1" dirty="0">
                 <a:solidFill>
                   <a:srgbClr val="C8A020"/>
                 </a:solidFill>
@@ -8788,9 +8801,9 @@
                 <a:ea typeface="Georgia" pitchFamily="34" charset="-122"/>
                 <a:cs typeface="Georgia" pitchFamily="34" charset="-120"/>
               </a:rPr>
-              <a:t>📐 音樂理論</a:t>
-            </a:r>
-            <a:endParaRPr lang="en-US" sz="1250" dirty="0"/>
+              <a:t>音樂理論</a:t>
+            </a:r>
+            <a:endParaRPr lang="en-US" sz="1400" dirty="0"/>
           </a:p>
         </p:txBody>
       </p:sp>
@@ -8812,14 +8825,14 @@
           <a:ln/>
         </p:spPr>
         <p:txBody>
-          <a:bodyPr wrap="square" lIns="0" tIns="0" rIns="0" bIns="0" rtlCol="0" anchor="ctr"/>
+          <a:bodyPr wrap="square" lIns="0" tIns="0" rIns="0" bIns="0" rtlCol="0" anchor="t"/>
           <a:lstStyle/>
           <a:p>
             <a:pPr indent="0" marL="0">
               <a:buNone/>
             </a:pPr>
             <a:r>
-              <a:rPr lang="en-US" sz="1200" dirty="0">
+              <a:rPr lang="en-US" sz="1400" dirty="0">
                 <a:solidFill>
                   <a:srgbClr val="E8D8A8"/>
                 </a:solidFill>
@@ -8829,14 +8842,14 @@
               </a:rPr>
               <a:t>音程、音階、節奏的定義；仍是今日音樂理論的基礎</a:t>
             </a:r>
-            <a:endParaRPr lang="en-US" sz="1200" dirty="0"/>
+            <a:endParaRPr lang="en-US" sz="1400" dirty="0"/>
           </a:p>
           <a:p>
             <a:pPr indent="0" marL="0">
               <a:buNone/>
             </a:pPr>
             <a:r>
-              <a:rPr lang="en-US" sz="1200" dirty="0">
+              <a:rPr lang="en-US" sz="1400" dirty="0">
                 <a:solidFill>
                   <a:srgbClr val="E8D8A8"/>
                 </a:solidFill>
@@ -8846,7 +8859,7 @@
               </a:rPr>
               <a:t>Interval, scale, rhythm definitions — still foundational today</a:t>
             </a:r>
-            <a:endParaRPr lang="en-US" sz="1200" dirty="0"/>
+            <a:endParaRPr lang="en-US" sz="1400" dirty="0"/>
           </a:p>
         </p:txBody>
       </p:sp>
@@ -8895,7 +8908,7 @@
               <a:buNone/>
             </a:pPr>
             <a:r>
-              <a:rPr lang="en-US" sz="1250" b="1" dirty="0">
+              <a:rPr lang="en-US" sz="1400" b="1" dirty="0">
                 <a:solidFill>
                   <a:srgbClr val="C8A020"/>
                 </a:solidFill>
@@ -8903,9 +8916,9 @@
                 <a:ea typeface="Georgia" pitchFamily="34" charset="-122"/>
                 <a:cs typeface="Georgia" pitchFamily="34" charset="-120"/>
               </a:rPr>
-              <a:t>🧠 音樂倫理學</a:t>
-            </a:r>
-            <a:endParaRPr lang="en-US" sz="1250" dirty="0"/>
+              <a:t>音樂倫理學</a:t>
+            </a:r>
+            <a:endParaRPr lang="en-US" sz="1400" dirty="0"/>
           </a:p>
         </p:txBody>
       </p:sp>
@@ -8927,14 +8940,14 @@
           <a:ln/>
         </p:spPr>
         <p:txBody>
-          <a:bodyPr wrap="square" lIns="0" tIns="0" rIns="0" bIns="0" rtlCol="0" anchor="ctr"/>
+          <a:bodyPr wrap="square" lIns="0" tIns="0" rIns="0" bIns="0" rtlCol="0" anchor="t"/>
           <a:lstStyle/>
           <a:p>
             <a:pPr indent="0" marL="0">
               <a:buNone/>
             </a:pPr>
             <a:r>
-              <a:rPr lang="en-US" sz="1200" dirty="0">
+              <a:rPr lang="en-US" sz="1400" dirty="0">
                 <a:solidFill>
                   <a:srgbClr val="E8D8A8"/>
                 </a:solidFill>
@@ -8944,14 +8957,14 @@
               </a:rPr>
               <a:t>音樂影響性格的觀念，從柏拉圖到現代流行音樂爭議都有回響</a:t>
             </a:r>
-            <a:endParaRPr lang="en-US" sz="1200" dirty="0"/>
+            <a:endParaRPr lang="en-US" sz="1400" dirty="0"/>
           </a:p>
           <a:p>
             <a:pPr indent="0" marL="0">
               <a:buNone/>
             </a:pPr>
             <a:r>
-              <a:rPr lang="en-US" sz="1200" dirty="0">
+              <a:rPr lang="en-US" sz="1400" dirty="0">
                 <a:solidFill>
                   <a:srgbClr val="E8D8A8"/>
                 </a:solidFill>
@@ -8961,7 +8974,7 @@
               </a:rPr>
               <a:t>Music affects character — echoed in every era's debates (jazz, rock, rap...)</a:t>
             </a:r>
-            <a:endParaRPr lang="en-US" sz="1200" dirty="0"/>
+            <a:endParaRPr lang="en-US" sz="1400" dirty="0"/>
           </a:p>
         </p:txBody>
       </p:sp>
@@ -9010,7 +9023,7 @@
               <a:buNone/>
             </a:pPr>
             <a:r>
-              <a:rPr lang="en-US" sz="1250" b="1" dirty="0">
+              <a:rPr lang="en-US" sz="1400" b="1" dirty="0">
                 <a:solidFill>
                   <a:srgbClr val="C8A020"/>
                 </a:solidFill>
@@ -9018,9 +9031,9 @@
                 <a:ea typeface="Georgia" pitchFamily="34" charset="-122"/>
                 <a:cs typeface="Georgia" pitchFamily="34" charset="-120"/>
               </a:rPr>
-              <a:t>🔢 數學與音響學</a:t>
-            </a:r>
-            <a:endParaRPr lang="en-US" sz="1250" dirty="0"/>
+              <a:t>數學與音響學</a:t>
+            </a:r>
+            <a:endParaRPr lang="en-US" sz="1400" dirty="0"/>
           </a:p>
         </p:txBody>
       </p:sp>
@@ -9042,14 +9055,14 @@
           <a:ln/>
         </p:spPr>
         <p:txBody>
-          <a:bodyPr wrap="square" lIns="0" tIns="0" rIns="0" bIns="0" rtlCol="0" anchor="ctr"/>
+          <a:bodyPr wrap="square" lIns="0" tIns="0" rIns="0" bIns="0" rtlCol="0" anchor="t"/>
           <a:lstStyle/>
           <a:p>
             <a:pPr indent="0" marL="0">
               <a:buNone/>
             </a:pPr>
             <a:r>
-              <a:rPr lang="en-US" sz="1200" dirty="0">
+              <a:rPr lang="en-US" sz="1400" dirty="0">
                 <a:solidFill>
                   <a:srgbClr val="E8D8A8"/>
                 </a:solidFill>
@@ -9059,14 +9072,14 @@
               </a:rPr>
               <a:t>Pythagoras 的諧音比例（2:1, 3:2, 4:3）是聲學和調音的基礎</a:t>
             </a:r>
-            <a:endParaRPr lang="en-US" sz="1200" dirty="0"/>
+            <a:endParaRPr lang="en-US" sz="1400" dirty="0"/>
           </a:p>
           <a:p>
             <a:pPr indent="0" marL="0">
               <a:buNone/>
             </a:pPr>
             <a:r>
-              <a:rPr lang="en-US" sz="1200" dirty="0">
+              <a:rPr lang="en-US" sz="1400" dirty="0">
                 <a:solidFill>
                   <a:srgbClr val="E8D8A8"/>
                 </a:solidFill>
@@ -9076,7 +9089,7 @@
               </a:rPr>
               <a:t>Pythagorean ratios underlie acoustics and tuning theory</a:t>
             </a:r>
-            <a:endParaRPr lang="en-US" sz="1200" dirty="0"/>
+            <a:endParaRPr lang="en-US" sz="1400" dirty="0"/>
           </a:p>
         </p:txBody>
       </p:sp>
@@ -9125,7 +9138,7 @@
               <a:buNone/>
             </a:pPr>
             <a:r>
-              <a:rPr lang="en-US" sz="1250" b="1" dirty="0">
+              <a:rPr lang="en-US" sz="1400" b="1" dirty="0">
                 <a:solidFill>
                   <a:srgbClr val="C8A020"/>
                 </a:solidFill>
@@ -9133,9 +9146,9 @@
                 <a:ea typeface="Georgia" pitchFamily="34" charset="-122"/>
                 <a:cs typeface="Georgia" pitchFamily="34" charset="-120"/>
               </a:rPr>
-              <a:t>📚 理論傳承</a:t>
-            </a:r>
-            <a:endParaRPr lang="en-US" sz="1250" dirty="0"/>
+              <a:t>理論傳承</a:t>
+            </a:r>
+            <a:endParaRPr lang="en-US" sz="1400" dirty="0"/>
           </a:p>
         </p:txBody>
       </p:sp>
@@ -9157,14 +9170,14 @@
           <a:ln/>
         </p:spPr>
         <p:txBody>
-          <a:bodyPr wrap="square" lIns="0" tIns="0" rIns="0" bIns="0" rtlCol="0" anchor="ctr"/>
+          <a:bodyPr wrap="square" lIns="0" tIns="0" rIns="0" bIns="0" rtlCol="0" anchor="t"/>
           <a:lstStyle/>
           <a:p>
             <a:pPr indent="0" marL="0">
               <a:buNone/>
             </a:pPr>
             <a:r>
-              <a:rPr lang="en-US" sz="1200" dirty="0">
+              <a:rPr lang="en-US" sz="1400" dirty="0">
                 <a:solidFill>
                   <a:srgbClr val="E8D8A8"/>
                 </a:solidFill>
@@ -9174,14 +9187,14 @@
               </a:rPr>
               <a:t>希臘理論著作傳入中世紀歐洲，成為大學音樂課程的核心</a:t>
             </a:r>
-            <a:endParaRPr lang="en-US" sz="1200" dirty="0"/>
+            <a:endParaRPr lang="en-US" sz="1400" dirty="0"/>
           </a:p>
           <a:p>
             <a:pPr indent="0" marL="0">
               <a:buNone/>
             </a:pPr>
             <a:r>
-              <a:rPr lang="en-US" sz="1200" dirty="0">
+              <a:rPr lang="en-US" sz="1400" dirty="0">
                 <a:solidFill>
                   <a:srgbClr val="E8D8A8"/>
                 </a:solidFill>
@@ -9191,7 +9204,7 @@
               </a:rPr>
               <a:t>Greek treatises passed to medieval Europe; formed core of university curriculum</a:t>
             </a:r>
-            <a:endParaRPr lang="en-US" sz="1200" dirty="0"/>
+            <a:endParaRPr lang="en-US" sz="1400" dirty="0"/>
           </a:p>
         </p:txBody>
       </p:sp>
@@ -9355,7 +9368,7 @@
               <a:buChar char="•"/>
             </a:pPr>
             <a:r>
-              <a:rPr lang="en-US" sz="1200" dirty="0">
+              <a:rPr lang="en-US" sz="1400" dirty="0">
                 <a:solidFill>
                   <a:srgbClr val="E8D8A8"/>
                 </a:solidFill>
@@ -9365,7 +9378,7 @@
               </a:rPr>
               <a:t>研究古代音樂需靠四種歷史痕跡：實物、圖像、文字、音樂本身</a:t>
             </a:r>
-            <a:endParaRPr lang="en-US" sz="1200" dirty="0"/>
+            <a:endParaRPr lang="en-US" sz="1400" dirty="0"/>
           </a:p>
           <a:p>
             <a:pPr marL="342900" indent="-342900">
@@ -9376,7 +9389,7 @@
               <a:buChar char="•"/>
             </a:pPr>
             <a:r>
-              <a:rPr lang="en-US" sz="1200" dirty="0">
+              <a:rPr lang="en-US" sz="1400" dirty="0">
                 <a:solidFill>
                   <a:srgbClr val="E8D8A8"/>
                 </a:solidFill>
@@ -9386,7 +9399,7 @@
               </a:rPr>
               <a:t>Study of ancient music relies on 4 types of evidence: physical remains, images, writings, music</a:t>
             </a:r>
-            <a:endParaRPr lang="en-US" sz="1200" dirty="0"/>
+            <a:endParaRPr lang="en-US" sz="1400" dirty="0"/>
           </a:p>
           <a:p>
             <a:pPr marL="342900" indent="-342900">
@@ -9397,7 +9410,7 @@
               <a:buChar char="•"/>
             </a:pPr>
             <a:r>
-              <a:rPr lang="en-US" sz="1200" dirty="0">
+              <a:rPr lang="en-US" sz="1400" dirty="0">
                 <a:solidFill>
                   <a:srgbClr val="E8D8A8"/>
                 </a:solidFill>
@@ -9407,7 +9420,7 @@
               </a:rPr>
               <a:t>史前時代已有樂器（骨笛 ~40,000 BCE）；文字發明後音樂歷史才真正開始</a:t>
             </a:r>
-            <a:endParaRPr lang="en-US" sz="1200" dirty="0"/>
+            <a:endParaRPr lang="en-US" sz="1400" dirty="0"/>
           </a:p>
           <a:p>
             <a:pPr marL="342900" indent="-342900">
@@ -9418,7 +9431,7 @@
               <a:buChar char="•"/>
             </a:pPr>
             <a:r>
-              <a:rPr lang="en-US" sz="1200" dirty="0">
+              <a:rPr lang="en-US" sz="1400" dirty="0">
                 <a:solidFill>
                   <a:srgbClr val="E8D8A8"/>
                 </a:solidFill>
@@ -9428,7 +9441,7 @@
               </a:rPr>
               <a:t>Prehistoric instruments existed (40,000 BCE); writing marks the true beginning of music history</a:t>
             </a:r>
-            <a:endParaRPr lang="en-US" sz="1200" dirty="0"/>
+            <a:endParaRPr lang="en-US" sz="1400" dirty="0"/>
           </a:p>
           <a:p>
             <a:pPr marL="342900" indent="-342900">
@@ -9439,7 +9452,7 @@
               <a:buChar char="•"/>
             </a:pPr>
             <a:r>
-              <a:rPr lang="en-US" sz="1200" dirty="0">
+              <a:rPr lang="en-US" sz="1400" dirty="0">
                 <a:solidFill>
                   <a:srgbClr val="E8D8A8"/>
                 </a:solidFill>
@@ -9449,7 +9462,7 @@
               </a:rPr>
               <a:t>美索不達米亞：七聲全音階、最早作曲家（恩赫杜安納）、最古老記譜（胡利安頌歌）</a:t>
             </a:r>
-            <a:endParaRPr lang="en-US" sz="1200" dirty="0"/>
+            <a:endParaRPr lang="en-US" sz="1400" dirty="0"/>
           </a:p>
           <a:p>
             <a:pPr marL="342900" indent="-342900">
@@ -9460,7 +9473,7 @@
               <a:buChar char="•"/>
             </a:pPr>
             <a:r>
-              <a:rPr lang="en-US" sz="1200" dirty="0">
+              <a:rPr lang="en-US" sz="1400" dirty="0">
                 <a:solidFill>
                   <a:srgbClr val="E8D8A8"/>
                 </a:solidFill>
@@ -9470,7 +9483,7 @@
               </a:rPr>
               <a:t>Mesopotamia: diatonic scales, first composer (Enheduanna), oldest notation (Hurrian Hymn)</a:t>
             </a:r>
-            <a:endParaRPr lang="en-US" sz="1200" dirty="0"/>
+            <a:endParaRPr lang="en-US" sz="1400" dirty="0"/>
           </a:p>
           <a:p>
             <a:pPr marL="342900" indent="-342900">
@@ -9481,7 +9494,7 @@
               <a:buChar char="•"/>
             </a:pPr>
             <a:r>
-              <a:rPr lang="en-US" sz="1200" dirty="0">
+              <a:rPr lang="en-US" sz="1400" dirty="0">
                 <a:solidFill>
                   <a:srgbClr val="E8D8A8"/>
                 </a:solidFill>
@@ -9491,7 +9504,7 @@
               </a:rPr>
               <a:t>希臘：音樂與宗教、詩歌、教育高度結合；柏拉圖與亞里斯多德論倫理學說</a:t>
             </a:r>
-            <a:endParaRPr lang="en-US" sz="1200" dirty="0"/>
+            <a:endParaRPr lang="en-US" sz="1400" dirty="0"/>
           </a:p>
           <a:p>
             <a:pPr marL="342900" indent="-342900">
@@ -9502,7 +9515,7 @@
               <a:buChar char="•"/>
             </a:pPr>
             <a:r>
-              <a:rPr lang="en-US" sz="1200" dirty="0">
+              <a:rPr lang="en-US" sz="1400" dirty="0">
                 <a:solidFill>
                   <a:srgbClr val="E8D8A8"/>
                 </a:solidFill>
@@ -9512,7 +9525,7 @@
               </a:rPr>
               <a:t>Greece: music intertwined with religion, poetry, education; Plato &amp; Aristotle on ethos</a:t>
             </a:r>
-            <a:endParaRPr lang="en-US" sz="1200" dirty="0"/>
+            <a:endParaRPr lang="en-US" sz="1400" dirty="0"/>
           </a:p>
           <a:p>
             <a:pPr marL="342900" indent="-342900">
@@ -9523,7 +9536,7 @@
               <a:buChar char="•"/>
             </a:pPr>
             <a:r>
-              <a:rPr lang="en-US" sz="1200" dirty="0">
+              <a:rPr lang="en-US" sz="1400" dirty="0">
                 <a:solidFill>
                   <a:srgbClr val="E8D8A8"/>
                 </a:solidFill>
@@ -9533,7 +9546,7 @@
               </a:rPr>
               <a:t>希臘音樂理論（四音列、調式、音階）奠定了後世西方音樂理論的基礎</a:t>
             </a:r>
-            <a:endParaRPr lang="en-US" sz="1200" dirty="0"/>
+            <a:endParaRPr lang="en-US" sz="1400" dirty="0"/>
           </a:p>
           <a:p>
             <a:pPr marL="342900" indent="-342900">
@@ -9544,7 +9557,7 @@
               <a:buChar char="•"/>
             </a:pPr>
             <a:r>
-              <a:rPr lang="en-US" sz="1200" dirty="0">
+              <a:rPr lang="en-US" sz="1400" dirty="0">
                 <a:solidFill>
                   <a:srgbClr val="E8D8A8"/>
                 </a:solidFill>
@@ -9554,7 +9567,7 @@
               </a:rPr>
               <a:t>Greek theory (tetrachord, modes, scales) founded all subsequent Western music theory</a:t>
             </a:r>
-            <a:endParaRPr lang="en-US" sz="1200" dirty="0"/>
+            <a:endParaRPr lang="en-US" sz="1400" dirty="0"/>
           </a:p>
           <a:p>
             <a:pPr marL="342900" indent="-342900">
@@ -9565,7 +9578,7 @@
               <a:buChar char="•"/>
             </a:pPr>
             <a:r>
-              <a:rPr lang="en-US" sz="1200" dirty="0">
+              <a:rPr lang="en-US" sz="1400" dirty="0">
                 <a:solidFill>
                   <a:srgbClr val="E8D8A8"/>
                 </a:solidFill>
@@ -9575,7 +9588,7 @@
               </a:rPr>
               <a:t>古羅馬大量吸收希臘音樂文化；古典遺產透過文字傳入中世紀歐洲</a:t>
             </a:r>
-            <a:endParaRPr lang="en-US" sz="1200" dirty="0"/>
+            <a:endParaRPr lang="en-US" sz="1400" dirty="0"/>
           </a:p>
           <a:p>
             <a:pPr marL="342900" indent="-342900">
@@ -9586,7 +9599,7 @@
               <a:buChar char="•"/>
             </a:pPr>
             <a:r>
-              <a:rPr lang="en-US" sz="1200" dirty="0">
+              <a:rPr lang="en-US" sz="1400" dirty="0">
                 <a:solidFill>
                   <a:srgbClr val="E8D8A8"/>
                 </a:solidFill>
@@ -9596,7 +9609,7 @@
               </a:rPr>
               <a:t>Rome absorbed Greek music; classical heritage transmitted to medieval Europe through texts</a:t>
             </a:r>
-            <a:endParaRPr lang="en-US" sz="1200" dirty="0"/>
+            <a:endParaRPr lang="en-US" sz="1400" dirty="0"/>
           </a:p>
         </p:txBody>
       </p:sp>
@@ -9779,7 +9792,7 @@
         <p:spPr>
           <a:xfrm>
             <a:off x="365760" y="1005840"/>
-            <a:ext cx="8412480" cy="347472"/>
+            <a:ext cx="8412480" cy="292608"/>
           </a:xfrm>
           <a:prstGeom prst="rect">
             <a:avLst/>
@@ -9803,7 +9816,7 @@
                 <a:ea typeface="Georgia" pitchFamily="34" charset="-122"/>
                 <a:cs typeface="Georgia" pitchFamily="34" charset="-120"/>
               </a:rPr>
-              <a:t>🎧 聆聽 YouTube</a:t>
+              <a:t>■ 聆聽 YouTube</a:t>
             </a:r>
             <a:endParaRPr lang="en-US" sz="1450" dirty="0"/>
           </a:p>
@@ -9817,8 +9830,8 @@
         </p:nvSpPr>
         <p:spPr>
           <a:xfrm>
-            <a:off x="548640" y="1353312"/>
-            <a:ext cx="8229600" cy="1005840"/>
+            <a:off x="548640" y="1298448"/>
+            <a:ext cx="8229600" cy="960120"/>
           </a:xfrm>
           <a:prstGeom prst="rect">
             <a:avLst/>
@@ -9832,13 +9845,13 @@
           <a:p>
             <a:pPr marL="342900" indent="-342900">
               <a:spcAft>
-                <a:spcPts val="200"/>
+                <a:spcPts val="100"/>
               </a:spcAft>
               <a:buSzPct val="100000"/>
               <a:buChar char="•"/>
             </a:pPr>
             <a:r>
-              <a:rPr lang="en-US" sz="1100" dirty="0">
+              <a:rPr lang="en-US" sz="1400" dirty="0">
                 <a:solidFill>
                   <a:srgbClr val="4A3828"/>
                 </a:solidFill>
@@ -9848,18 +9861,18 @@
               </a:rPr>
               <a:t>Seikilos Epitaph（最古老完整歌曲，里拉琴版）: youtube.com/watch?v=8Vkcolt-nmU</a:t>
             </a:r>
-            <a:endParaRPr lang="en-US" sz="1100" dirty="0"/>
+            <a:endParaRPr lang="en-US" sz="1400" dirty="0"/>
           </a:p>
           <a:p>
             <a:pPr marL="342900" indent="-342900">
               <a:spcAft>
-                <a:spcPts val="200"/>
+                <a:spcPts val="100"/>
               </a:spcAft>
               <a:buSzPct val="100000"/>
               <a:buChar char="•"/>
             </a:pPr>
             <a:r>
-              <a:rPr lang="en-US" sz="1100" dirty="0">
+              <a:rPr lang="en-US" sz="1400" dirty="0">
                 <a:solidFill>
                   <a:srgbClr val="4A3828"/>
                 </a:solidFill>
@@ -9869,18 +9882,18 @@
               </a:rPr>
               <a:t>Hurrian Hymn H.6（胡利安頌歌重建版，Peter Pringle）: youtube.com/watch?v=w8tfBLvlN98</a:t>
             </a:r>
-            <a:endParaRPr lang="en-US" sz="1100" dirty="0"/>
+            <a:endParaRPr lang="en-US" sz="1400" dirty="0"/>
           </a:p>
           <a:p>
             <a:pPr marL="342900" indent="-342900">
               <a:spcAft>
-                <a:spcPts val="200"/>
+                <a:spcPts val="100"/>
               </a:spcAft>
               <a:buSzPct val="100000"/>
               <a:buChar char="•"/>
             </a:pPr>
             <a:r>
-              <a:rPr lang="en-US" sz="1100" dirty="0">
+              <a:rPr lang="en-US" sz="1400" dirty="0">
                 <a:solidFill>
                   <a:srgbClr val="4A3828"/>
                 </a:solidFill>
@@ -9890,18 +9903,18 @@
               </a:rPr>
               <a:t>古希臘音樂重建 · Euripides Orestes合唱（牛津大學）: youtube.com/watch?v=4hOK7bU0S1Y</a:t>
             </a:r>
-            <a:endParaRPr lang="en-US" sz="1100" dirty="0"/>
+            <a:endParaRPr lang="en-US" sz="1400" dirty="0"/>
           </a:p>
           <a:p>
             <a:pPr marL="342900" indent="-342900">
               <a:spcAft>
-                <a:spcPts val="200"/>
+                <a:spcPts val="100"/>
               </a:spcAft>
               <a:buSzPct val="100000"/>
               <a:buChar char="•"/>
             </a:pPr>
             <a:r>
-              <a:rPr lang="en-US" sz="1100" dirty="0">
+              <a:rPr lang="en-US" sz="1400" dirty="0">
                 <a:solidFill>
                   <a:srgbClr val="4A3828"/>
                 </a:solidFill>
@@ -9911,18 +9924,18 @@
               </a:rPr>
               <a:t>古羅馬音樂重建 Synaulia（弦樂卷）: youtube.com/watch?v=zT6dOMKh3-w</a:t>
             </a:r>
-            <a:endParaRPr lang="en-US" sz="1100" dirty="0"/>
+            <a:endParaRPr lang="en-US" sz="1400" dirty="0"/>
           </a:p>
           <a:p>
             <a:pPr marL="342900" indent="-342900">
               <a:spcAft>
-                <a:spcPts val="200"/>
+                <a:spcPts val="100"/>
               </a:spcAft>
               <a:buSzPct val="100000"/>
               <a:buChar char="•"/>
             </a:pPr>
             <a:r>
-              <a:rPr lang="en-US" sz="1100" dirty="0">
+              <a:rPr lang="en-US" sz="1400" dirty="0">
                 <a:solidFill>
                   <a:srgbClr val="4A3828"/>
                 </a:solidFill>
@@ -9932,7 +9945,7 @@
               </a:rPr>
               <a:t>Michael Levy 古希臘里拉琴演奏系列: youtube.com/channel/UCJ1X6F7lGMEadnNETSzTv8A</a:t>
             </a:r>
-            <a:endParaRPr lang="en-US" sz="1100" dirty="0"/>
+            <a:endParaRPr lang="en-US" sz="1400" dirty="0"/>
           </a:p>
         </p:txBody>
       </p:sp>
@@ -9944,8 +9957,8 @@
         </p:nvSpPr>
         <p:spPr>
           <a:xfrm>
-            <a:off x="365760" y="2395728"/>
-            <a:ext cx="8412480" cy="347472"/>
+            <a:off x="365760" y="2286000"/>
+            <a:ext cx="8412480" cy="292608"/>
           </a:xfrm>
           <a:prstGeom prst="rect">
             <a:avLst/>
@@ -9969,7 +9982,7 @@
                 <a:ea typeface="Georgia" pitchFamily="34" charset="-122"/>
                 <a:cs typeface="Georgia" pitchFamily="34" charset="-120"/>
               </a:rPr>
-              <a:t>📖 閱讀 Read</a:t>
+              <a:t>■ 閱讀 Read</a:t>
             </a:r>
             <a:endParaRPr lang="en-US" sz="1450" dirty="0"/>
           </a:p>
@@ -9983,8 +9996,8 @@
         </p:nvSpPr>
         <p:spPr>
           <a:xfrm>
-            <a:off x="548640" y="2743200"/>
-            <a:ext cx="8229600" cy="1005840"/>
+            <a:off x="548640" y="2578608"/>
+            <a:ext cx="8229600" cy="960120"/>
           </a:xfrm>
           <a:prstGeom prst="rect">
             <a:avLst/>
@@ -9998,13 +10011,13 @@
           <a:p>
             <a:pPr marL="342900" indent="-342900">
               <a:spcAft>
-                <a:spcPts val="200"/>
+                <a:spcPts val="100"/>
               </a:spcAft>
               <a:buSzPct val="100000"/>
               <a:buChar char="•"/>
             </a:pPr>
             <a:r>
-              <a:rPr lang="en-US" sz="1100" dirty="0">
+              <a:rPr lang="en-US" sz="1400" dirty="0">
                 <a:solidFill>
                   <a:srgbClr val="4A3828"/>
                 </a:solidFill>
@@ -10014,18 +10027,18 @@
               </a:rPr>
               <a:t>維基百科 Music of ancient Greece: en.wikipedia.org/wiki/Music_of_ancient_Greece</a:t>
             </a:r>
-            <a:endParaRPr lang="en-US" sz="1100" dirty="0"/>
+            <a:endParaRPr lang="en-US" sz="1400" dirty="0"/>
           </a:p>
           <a:p>
             <a:pPr marL="342900" indent="-342900">
               <a:spcAft>
-                <a:spcPts val="200"/>
+                <a:spcPts val="100"/>
               </a:spcAft>
               <a:buSzPct val="100000"/>
               <a:buChar char="•"/>
             </a:pPr>
             <a:r>
-              <a:rPr lang="en-US" sz="1100" dirty="0">
+              <a:rPr lang="en-US" sz="1400" dirty="0">
                 <a:solidFill>
                   <a:srgbClr val="4A3828"/>
                 </a:solidFill>
@@ -10035,18 +10048,18 @@
               </a:rPr>
               <a:t>Stanford Encyclopedia: History of Western Philosophy of Music: plato.stanford.edu/entries/hist-westphilmusic-to-1800</a:t>
             </a:r>
-            <a:endParaRPr lang="en-US" sz="1100" dirty="0"/>
+            <a:endParaRPr lang="en-US" sz="1400" dirty="0"/>
           </a:p>
           <a:p>
             <a:pPr marL="342900" indent="-342900">
               <a:spcAft>
-                <a:spcPts val="200"/>
+                <a:spcPts val="100"/>
               </a:spcAft>
               <a:buSzPct val="100000"/>
               <a:buChar char="•"/>
             </a:pPr>
             <a:r>
-              <a:rPr lang="en-US" sz="1100" dirty="0">
+              <a:rPr lang="en-US" sz="1400" dirty="0">
                 <a:solidFill>
                   <a:srgbClr val="4A3828"/>
                 </a:solidFill>
@@ -10056,18 +10069,18 @@
               </a:rPr>
               <a:t>World History Encyclopedia — Greek Music: worldhistory.org/Greek_Music</a:t>
             </a:r>
-            <a:endParaRPr lang="en-US" sz="1100" dirty="0"/>
+            <a:endParaRPr lang="en-US" sz="1400" dirty="0"/>
           </a:p>
           <a:p>
             <a:pPr marL="342900" indent="-342900">
               <a:spcAft>
-                <a:spcPts val="200"/>
+                <a:spcPts val="100"/>
               </a:spcAft>
               <a:buSzPct val="100000"/>
               <a:buChar char="•"/>
             </a:pPr>
             <a:r>
-              <a:rPr lang="en-US" sz="1100" dirty="0">
+              <a:rPr lang="en-US" sz="1400" dirty="0">
                 <a:solidFill>
                   <a:srgbClr val="4A3828"/>
                 </a:solidFill>
@@ -10077,7 +10090,7 @@
               </a:rPr>
               <a:t>Music of Mesopotamia (Wikipedia): en.wikipedia.org/wiki/Music_of_Mesopotamia</a:t>
             </a:r>
-            <a:endParaRPr lang="en-US" sz="1100" dirty="0"/>
+            <a:endParaRPr lang="en-US" sz="1400" dirty="0"/>
           </a:p>
         </p:txBody>
       </p:sp>
@@ -10089,8 +10102,8 @@
         </p:nvSpPr>
         <p:spPr>
           <a:xfrm>
-            <a:off x="365760" y="3785616"/>
-            <a:ext cx="8412480" cy="347472"/>
+            <a:off x="365760" y="3566160"/>
+            <a:ext cx="8412480" cy="292608"/>
           </a:xfrm>
           <a:prstGeom prst="rect">
             <a:avLst/>
@@ -10114,7 +10127,7 @@
                 <a:ea typeface="Georgia" pitchFamily="34" charset="-122"/>
                 <a:cs typeface="Georgia" pitchFamily="34" charset="-120"/>
               </a:rPr>
-              <a:t>🎓 學術 Academic</a:t>
+              <a:t>■ 學術 Academic</a:t>
             </a:r>
             <a:endParaRPr lang="en-US" sz="1450" dirty="0"/>
           </a:p>
@@ -10128,8 +10141,8 @@
         </p:nvSpPr>
         <p:spPr>
           <a:xfrm>
-            <a:off x="548640" y="4133088"/>
-            <a:ext cx="8229600" cy="1005840"/>
+            <a:off x="548640" y="3858768"/>
+            <a:ext cx="8229600" cy="960120"/>
           </a:xfrm>
           <a:prstGeom prst="rect">
             <a:avLst/>
@@ -10143,13 +10156,13 @@
           <a:p>
             <a:pPr marL="342900" indent="-342900">
               <a:spcAft>
-                <a:spcPts val="200"/>
+                <a:spcPts val="100"/>
               </a:spcAft>
               <a:buSzPct val="100000"/>
               <a:buChar char="•"/>
             </a:pPr>
             <a:r>
-              <a:rPr lang="en-US" sz="1100" dirty="0">
+              <a:rPr lang="en-US" sz="1400" dirty="0">
                 <a:solidFill>
                   <a:srgbClr val="4A3828"/>
                 </a:solidFill>
@@ -10159,18 +10172,18 @@
               </a:rPr>
               <a:t>牛津大學：古希臘奧瑞斯提斯音樂重建計畫 (Oxford): classics.ox.ac.uk/recreating-music-ancient-greek-chorus-euripides-orestes</a:t>
             </a:r>
-            <a:endParaRPr lang="en-US" sz="1100" dirty="0"/>
+            <a:endParaRPr lang="en-US" sz="1400" dirty="0"/>
           </a:p>
           <a:p>
             <a:pPr marL="342900" indent="-342900">
               <a:spcAft>
-                <a:spcPts val="200"/>
+                <a:spcPts val="100"/>
               </a:spcAft>
               <a:buSzPct val="100000"/>
               <a:buChar char="•"/>
             </a:pPr>
             <a:r>
-              <a:rPr lang="en-US" sz="1100" dirty="0">
+              <a:rPr lang="en-US" sz="1400" dirty="0">
                 <a:solidFill>
                   <a:srgbClr val="4A3828"/>
                 </a:solidFill>
@@ -10180,18 +10193,18 @@
               </a:rPr>
               <a:t>胡利安頌歌與楔形文字樂譜研究 (Open Culture): openculture.com/2025/04/hear-the-worlds-oldest-known-song</a:t>
             </a:r>
-            <a:endParaRPr lang="en-US" sz="1100" dirty="0"/>
+            <a:endParaRPr lang="en-US" sz="1400" dirty="0"/>
           </a:p>
           <a:p>
             <a:pPr marL="342900" indent="-342900">
               <a:spcAft>
-                <a:spcPts val="200"/>
+                <a:spcPts val="100"/>
               </a:spcAft>
               <a:buSzPct val="100000"/>
               <a:buChar char="•"/>
             </a:pPr>
             <a:r>
-              <a:rPr lang="en-US" sz="1100" dirty="0">
+              <a:rPr lang="en-US" sz="1400" dirty="0">
                 <a:solidFill>
                   <a:srgbClr val="4A3828"/>
                 </a:solidFill>
@@ -10201,7 +10214,7 @@
               </a:rPr>
               <a:t>Oldest Songs in the World — Oldest.org: oldest.org/music/songs</a:t>
             </a:r>
-            <a:endParaRPr lang="en-US" sz="1100" dirty="0"/>
+            <a:endParaRPr lang="en-US" sz="1400" dirty="0"/>
           </a:p>
         </p:txBody>
       </p:sp>
@@ -10386,7 +10399,7 @@
                   <a:srgbClr val="000000"/>
                 </a:solidFill>
               </a:rPr>
-              <a:t>🏺</a:t>
+              <a:t>■</a:t>
             </a:r>
             <a:endParaRPr lang="en-US" sz="2200" dirty="0"/>
           </a:p>
@@ -10449,14 +10462,14 @@
           <a:ln/>
         </p:spPr>
         <p:txBody>
-          <a:bodyPr wrap="square" lIns="0" tIns="0" rIns="0" bIns="0" rtlCol="0" anchor="ctr"/>
+          <a:bodyPr wrap="square" lIns="0" tIns="0" rIns="0" bIns="0" rtlCol="0" anchor="t"/>
           <a:lstStyle/>
           <a:p>
             <a:pPr indent="0" marL="0">
               <a:buNone/>
             </a:pPr>
             <a:r>
-              <a:rPr lang="en-US" sz="1150" dirty="0">
+              <a:rPr lang="en-US" sz="1400" dirty="0">
                 <a:solidFill>
                   <a:srgbClr val="5C3A28"/>
                 </a:solidFill>
@@ -10466,7 +10479,7 @@
               </a:rPr>
               <a:t>史前時期 40,000 BCE 起的骨笛與壁畫</a:t>
             </a:r>
-            <a:endParaRPr lang="en-US" sz="1150" dirty="0"/>
+            <a:endParaRPr lang="en-US" sz="1400" dirty="0"/>
           </a:p>
         </p:txBody>
       </p:sp>
@@ -10520,7 +10533,7 @@
                   <a:srgbClr val="000000"/>
                 </a:solidFill>
               </a:rPr>
-              <a:t>🏛</a:t>
+              <a:t>■</a:t>
             </a:r>
             <a:endParaRPr lang="en-US" sz="2200" dirty="0"/>
           </a:p>
@@ -10583,14 +10596,14 @@
           <a:ln/>
         </p:spPr>
         <p:txBody>
-          <a:bodyPr wrap="square" lIns="0" tIns="0" rIns="0" bIns="0" rtlCol="0" anchor="ctr"/>
+          <a:bodyPr wrap="square" lIns="0" tIns="0" rIns="0" bIns="0" rtlCol="0" anchor="t"/>
           <a:lstStyle/>
           <a:p>
             <a:pPr indent="0" marL="0">
               <a:buNone/>
             </a:pPr>
             <a:r>
-              <a:rPr lang="en-US" sz="1150" dirty="0">
+              <a:rPr lang="en-US" sz="1400" dirty="0">
                 <a:solidFill>
                   <a:srgbClr val="5C3A28"/>
                 </a:solidFill>
@@ -10600,7 +10613,7 @@
               </a:rPr>
               <a:t>蘇美文明、第一位作曲家、最早的記譜法</a:t>
             </a:r>
-            <a:endParaRPr lang="en-US" sz="1150" dirty="0"/>
+            <a:endParaRPr lang="en-US" sz="1400" dirty="0"/>
           </a:p>
         </p:txBody>
       </p:sp>
@@ -10654,7 +10667,7 @@
                   <a:srgbClr val="000000"/>
                 </a:solidFill>
               </a:rPr>
-              <a:t>🎭</a:t>
+              <a:t>■</a:t>
             </a:r>
             <a:endParaRPr lang="en-US" sz="2200" dirty="0"/>
           </a:p>
@@ -10717,14 +10730,14 @@
           <a:ln/>
         </p:spPr>
         <p:txBody>
-          <a:bodyPr wrap="square" lIns="0" tIns="0" rIns="0" bIns="0" rtlCol="0" anchor="ctr"/>
+          <a:bodyPr wrap="square" lIns="0" tIns="0" rIns="0" bIns="0" rtlCol="0" anchor="t"/>
           <a:lstStyle/>
           <a:p>
             <a:pPr indent="0" marL="0">
               <a:buNone/>
             </a:pPr>
             <a:r>
-              <a:rPr lang="en-US" sz="1150" dirty="0">
+              <a:rPr lang="en-US" sz="1400" dirty="0">
                 <a:solidFill>
                   <a:srgbClr val="5C3A28"/>
                 </a:solidFill>
@@ -10734,7 +10747,7 @@
               </a:rPr>
               <a:t>樂器、哲學、倫理學說、音樂理論</a:t>
             </a:r>
-            <a:endParaRPr lang="en-US" sz="1150" dirty="0"/>
+            <a:endParaRPr lang="en-US" sz="1400" dirty="0"/>
           </a:p>
         </p:txBody>
       </p:sp>
@@ -10788,7 +10801,7 @@
                   <a:srgbClr val="000000"/>
                 </a:solidFill>
               </a:rPr>
-              <a:t>🦅</a:t>
+              <a:t>■</a:t>
             </a:r>
             <a:endParaRPr lang="en-US" sz="2200" dirty="0"/>
           </a:p>
@@ -10851,14 +10864,14 @@
           <a:ln/>
         </p:spPr>
         <p:txBody>
-          <a:bodyPr wrap="square" lIns="0" tIns="0" rIns="0" bIns="0" rtlCol="0" anchor="ctr"/>
+          <a:bodyPr wrap="square" lIns="0" tIns="0" rIns="0" bIns="0" rtlCol="0" anchor="t"/>
           <a:lstStyle/>
           <a:p>
             <a:pPr indent="0" marL="0">
               <a:buNone/>
             </a:pPr>
             <a:r>
-              <a:rPr lang="en-US" sz="1150" dirty="0">
+              <a:rPr lang="en-US" sz="1400" dirty="0">
                 <a:solidFill>
                   <a:srgbClr val="5C3A28"/>
                 </a:solidFill>
@@ -10868,7 +10881,7 @@
               </a:rPr>
               <a:t>從希臘繼承的音樂傳統與羅馬的發展</a:t>
             </a:r>
-            <a:endParaRPr lang="en-US" sz="1150" dirty="0"/>
+            <a:endParaRPr lang="en-US" sz="1400" dirty="0"/>
           </a:p>
         </p:txBody>
       </p:sp>
@@ -10922,7 +10935,7 @@
                   <a:srgbClr val="000000"/>
                 </a:solidFill>
               </a:rPr>
-              <a:t>📜</a:t>
+              <a:t>■</a:t>
             </a:r>
             <a:endParaRPr lang="en-US" sz="2200" dirty="0"/>
           </a:p>
@@ -10985,14 +10998,14 @@
           <a:ln/>
         </p:spPr>
         <p:txBody>
-          <a:bodyPr wrap="square" lIns="0" tIns="0" rIns="0" bIns="0" rtlCol="0" anchor="ctr"/>
+          <a:bodyPr wrap="square" lIns="0" tIns="0" rIns="0" bIns="0" rtlCol="0" anchor="t"/>
           <a:lstStyle/>
           <a:p>
             <a:pPr indent="0" marL="0">
               <a:buNone/>
             </a:pPr>
             <a:r>
-              <a:rPr lang="en-US" sz="1150" dirty="0">
+              <a:rPr lang="en-US" sz="1400" dirty="0">
                 <a:solidFill>
                   <a:srgbClr val="5C3A28"/>
                 </a:solidFill>
@@ -11002,7 +11015,7 @@
               </a:rPr>
               <a:t>西方音樂思想的奠基石</a:t>
             </a:r>
-            <a:endParaRPr lang="en-US" sz="1150" dirty="0"/>
+            <a:endParaRPr lang="en-US" sz="1400" dirty="0"/>
           </a:p>
         </p:txBody>
       </p:sp>
@@ -11135,14 +11148,14 @@
           <a:ln/>
         </p:spPr>
         <p:txBody>
-          <a:bodyPr wrap="square" rtlCol="0" anchor="ctr"/>
+          <a:bodyPr wrap="square" rtlCol="0" anchor="t"/>
           <a:lstStyle/>
           <a:p>
             <a:pPr indent="0" marL="0">
               <a:buNone/>
             </a:pPr>
             <a:r>
-              <a:rPr lang="en-US" sz="1300" i="1" dirty="0">
+              <a:rPr lang="en-US" sz="1400" i="1" dirty="0">
                 <a:solidFill>
                   <a:srgbClr val="4A3828"/>
                 </a:solidFill>
@@ -11152,7 +11165,7 @@
               </a:rPr>
               <a:t>音樂是聲音，聲音本質上是短暫的。我們依靠四種歷史痕跡 (historical traces) 重建過去的音樂。</a:t>
             </a:r>
-            <a:endParaRPr lang="en-US" sz="1300" dirty="0"/>
+            <a:endParaRPr lang="en-US" sz="1400" dirty="0"/>
           </a:p>
         </p:txBody>
       </p:sp>
@@ -11240,7 +11253,7 @@
               <a:buNone/>
             </a:pPr>
             <a:r>
-              <a:rPr lang="en-US" sz="1350" b="1" dirty="0">
+              <a:rPr lang="en-US" sz="1400" b="1" dirty="0">
                 <a:solidFill>
                   <a:srgbClr val="FBF5E6"/>
                 </a:solidFill>
@@ -11250,14 +11263,14 @@
               </a:rPr>
               <a:t>實物遺存</a:t>
             </a:r>
-            <a:endParaRPr lang="en-US" sz="1350" dirty="0"/>
+            <a:endParaRPr lang="en-US" sz="1400" dirty="0"/>
           </a:p>
           <a:p>
             <a:pPr algn="ctr" indent="0" marL="0">
               <a:buNone/>
             </a:pPr>
             <a:r>
-              <a:rPr lang="en-US" sz="1350" b="1" dirty="0">
+              <a:rPr lang="en-US" sz="1400" b="1" dirty="0">
                 <a:solidFill>
                   <a:srgbClr val="FBF5E6"/>
                 </a:solidFill>
@@ -11267,7 +11280,7 @@
               </a:rPr>
               <a:t>Physical Remains</a:t>
             </a:r>
-            <a:endParaRPr lang="en-US" sz="1350" dirty="0"/>
+            <a:endParaRPr lang="en-US" sz="1400" dirty="0"/>
           </a:p>
         </p:txBody>
       </p:sp>
@@ -11309,14 +11322,14 @@
           <a:ln/>
         </p:spPr>
         <p:txBody>
-          <a:bodyPr wrap="square" rtlCol="0" anchor="ctr"/>
+          <a:bodyPr wrap="square" rtlCol="0" anchor="t"/>
           <a:lstStyle/>
           <a:p>
             <a:pPr algn="ctr" indent="0" marL="0">
               <a:buNone/>
             </a:pPr>
             <a:r>
-              <a:rPr lang="en-US" sz="1150" dirty="0">
+              <a:rPr lang="en-US" sz="1400" dirty="0">
                 <a:solidFill>
                   <a:srgbClr val="E8D8A8"/>
                 </a:solidFill>
@@ -11326,14 +11339,14 @@
               </a:rPr>
               <a:t>樂器、演奏場所</a:t>
             </a:r>
-            <a:endParaRPr lang="en-US" sz="1150" dirty="0"/>
+            <a:endParaRPr lang="en-US" sz="1400" dirty="0"/>
           </a:p>
           <a:p>
             <a:pPr algn="ctr" indent="0" marL="0">
               <a:buNone/>
             </a:pPr>
             <a:r>
-              <a:rPr lang="en-US" sz="1150" dirty="0">
+              <a:rPr lang="en-US" sz="1400" dirty="0">
                 <a:solidFill>
                   <a:srgbClr val="E8D8A8"/>
                 </a:solidFill>
@@ -11343,7 +11356,7 @@
               </a:rPr>
               <a:t>(e.g. 骨笛、豎琴、劇場)</a:t>
             </a:r>
-            <a:endParaRPr lang="en-US" sz="1150" dirty="0"/>
+            <a:endParaRPr lang="en-US" sz="1400" dirty="0"/>
           </a:p>
         </p:txBody>
       </p:sp>
@@ -11431,7 +11444,7 @@
               <a:buNone/>
             </a:pPr>
             <a:r>
-              <a:rPr lang="en-US" sz="1350" b="1" dirty="0">
+              <a:rPr lang="en-US" sz="1400" b="1" dirty="0">
                 <a:solidFill>
                   <a:srgbClr val="FBF5E6"/>
                 </a:solidFill>
@@ -11441,14 +11454,14 @@
               </a:rPr>
               <a:t>視覺圖像</a:t>
             </a:r>
-            <a:endParaRPr lang="en-US" sz="1350" dirty="0"/>
+            <a:endParaRPr lang="en-US" sz="1400" dirty="0"/>
           </a:p>
           <a:p>
             <a:pPr algn="ctr" indent="0" marL="0">
               <a:buNone/>
             </a:pPr>
             <a:r>
-              <a:rPr lang="en-US" sz="1350" b="1" dirty="0">
+              <a:rPr lang="en-US" sz="1400" b="1" dirty="0">
                 <a:solidFill>
                   <a:srgbClr val="FBF5E6"/>
                 </a:solidFill>
@@ -11458,7 +11471,7 @@
               </a:rPr>
               <a:t>Visual Images</a:t>
             </a:r>
-            <a:endParaRPr lang="en-US" sz="1350" dirty="0"/>
+            <a:endParaRPr lang="en-US" sz="1400" dirty="0"/>
           </a:p>
         </p:txBody>
       </p:sp>
@@ -11500,14 +11513,14 @@
           <a:ln/>
         </p:spPr>
         <p:txBody>
-          <a:bodyPr wrap="square" rtlCol="0" anchor="ctr"/>
+          <a:bodyPr wrap="square" rtlCol="0" anchor="t"/>
           <a:lstStyle/>
           <a:p>
             <a:pPr algn="ctr" indent="0" marL="0">
               <a:buNone/>
             </a:pPr>
             <a:r>
-              <a:rPr lang="en-US" sz="1150" dirty="0">
+              <a:rPr lang="en-US" sz="1400" dirty="0">
                 <a:solidFill>
                   <a:srgbClr val="E8D8A8"/>
                 </a:solidFill>
@@ -11517,14 +11530,14 @@
               </a:rPr>
               <a:t>陶器、壁畫上的</a:t>
             </a:r>
-            <a:endParaRPr lang="en-US" sz="1150" dirty="0"/>
+            <a:endParaRPr lang="en-US" sz="1400" dirty="0"/>
           </a:p>
           <a:p>
             <a:pPr algn="ctr" indent="0" marL="0">
               <a:buNone/>
             </a:pPr>
             <a:r>
-              <a:rPr lang="en-US" sz="1150" dirty="0">
+              <a:rPr lang="en-US" sz="1400" dirty="0">
                 <a:solidFill>
                   <a:srgbClr val="E8D8A8"/>
                 </a:solidFill>
@@ -11534,7 +11547,7 @@
               </a:rPr>
               <a:t>演奏場景描繪</a:t>
             </a:r>
-            <a:endParaRPr lang="en-US" sz="1150" dirty="0"/>
+            <a:endParaRPr lang="en-US" sz="1400" dirty="0"/>
           </a:p>
         </p:txBody>
       </p:sp>
@@ -11622,7 +11635,7 @@
               <a:buNone/>
             </a:pPr>
             <a:r>
-              <a:rPr lang="en-US" sz="1350" b="1" dirty="0">
+              <a:rPr lang="en-US" sz="1400" b="1" dirty="0">
                 <a:solidFill>
                   <a:srgbClr val="FBF5E6"/>
                 </a:solidFill>
@@ -11632,14 +11645,14 @@
               </a:rPr>
               <a:t>文字記述</a:t>
             </a:r>
-            <a:endParaRPr lang="en-US" sz="1350" dirty="0"/>
+            <a:endParaRPr lang="en-US" sz="1400" dirty="0"/>
           </a:p>
           <a:p>
             <a:pPr algn="ctr" indent="0" marL="0">
               <a:buNone/>
             </a:pPr>
             <a:r>
-              <a:rPr lang="en-US" sz="1350" b="1" dirty="0">
+              <a:rPr lang="en-US" sz="1400" b="1" dirty="0">
                 <a:solidFill>
                   <a:srgbClr val="FBF5E6"/>
                 </a:solidFill>
@@ -11649,7 +11662,7 @@
               </a:rPr>
               <a:t>Written Sources</a:t>
             </a:r>
-            <a:endParaRPr lang="en-US" sz="1350" dirty="0"/>
+            <a:endParaRPr lang="en-US" sz="1400" dirty="0"/>
           </a:p>
         </p:txBody>
       </p:sp>
@@ -11691,14 +11704,14 @@
           <a:ln/>
         </p:spPr>
         <p:txBody>
-          <a:bodyPr wrap="square" rtlCol="0" anchor="ctr"/>
+          <a:bodyPr wrap="square" rtlCol="0" anchor="t"/>
           <a:lstStyle/>
           <a:p>
             <a:pPr algn="ctr" indent="0" marL="0">
               <a:buNone/>
             </a:pPr>
             <a:r>
-              <a:rPr lang="en-US" sz="1150" dirty="0">
+              <a:rPr lang="en-US" sz="1400" dirty="0">
                 <a:solidFill>
                   <a:srgbClr val="E8D8A8"/>
                 </a:solidFill>
@@ -11708,14 +11721,14 @@
               </a:rPr>
               <a:t>關於音樂與音樂家</a:t>
             </a:r>
-            <a:endParaRPr lang="en-US" sz="1150" dirty="0"/>
+            <a:endParaRPr lang="en-US" sz="1400" dirty="0"/>
           </a:p>
           <a:p>
             <a:pPr algn="ctr" indent="0" marL="0">
               <a:buNone/>
             </a:pPr>
             <a:r>
-              <a:rPr lang="en-US" sz="1150" dirty="0">
+              <a:rPr lang="en-US" sz="1400" dirty="0">
                 <a:solidFill>
                   <a:srgbClr val="E8D8A8"/>
                 </a:solidFill>
@@ -11725,7 +11738,7 @@
               </a:rPr>
               <a:t>的哲學與理論著作</a:t>
             </a:r>
-            <a:endParaRPr lang="en-US" sz="1150" dirty="0"/>
+            <a:endParaRPr lang="en-US" sz="1400" dirty="0"/>
           </a:p>
         </p:txBody>
       </p:sp>
@@ -11813,7 +11826,7 @@
               <a:buNone/>
             </a:pPr>
             <a:r>
-              <a:rPr lang="en-US" sz="1350" b="1" dirty="0">
+              <a:rPr lang="en-US" sz="1400" b="1" dirty="0">
                 <a:solidFill>
                   <a:srgbClr val="FBF5E6"/>
                 </a:solidFill>
@@ -11823,14 +11836,14 @@
               </a:rPr>
               <a:t>音樂本身</a:t>
             </a:r>
-            <a:endParaRPr lang="en-US" sz="1350" dirty="0"/>
+            <a:endParaRPr lang="en-US" sz="1400" dirty="0"/>
           </a:p>
           <a:p>
             <a:pPr algn="ctr" indent="0" marL="0">
               <a:buNone/>
             </a:pPr>
             <a:r>
-              <a:rPr lang="en-US" sz="1350" b="1" dirty="0">
+              <a:rPr lang="en-US" sz="1400" b="1" dirty="0">
                 <a:solidFill>
                   <a:srgbClr val="FBF5E6"/>
                 </a:solidFill>
@@ -11840,7 +11853,7 @@
               </a:rPr>
               <a:t>Actual Music</a:t>
             </a:r>
-            <a:endParaRPr lang="en-US" sz="1350" dirty="0"/>
+            <a:endParaRPr lang="en-US" sz="1400" dirty="0"/>
           </a:p>
         </p:txBody>
       </p:sp>
@@ -11882,14 +11895,14 @@
           <a:ln/>
         </p:spPr>
         <p:txBody>
-          <a:bodyPr wrap="square" rtlCol="0" anchor="ctr"/>
+          <a:bodyPr wrap="square" rtlCol="0" anchor="t"/>
           <a:lstStyle/>
           <a:p>
             <a:pPr algn="ctr" indent="0" marL="0">
               <a:buNone/>
             </a:pPr>
             <a:r>
-              <a:rPr lang="en-US" sz="1150" dirty="0">
+              <a:rPr lang="en-US" sz="1400" dirty="0">
                 <a:solidFill>
                   <a:srgbClr val="E8D8A8"/>
                 </a:solidFill>
@@ -11899,14 +11912,14 @@
               </a:rPr>
               <a:t>以記譜法保存或口傳，</a:t>
             </a:r>
-            <a:endParaRPr lang="en-US" sz="1150" dirty="0"/>
+            <a:endParaRPr lang="en-US" sz="1400" dirty="0"/>
           </a:p>
           <a:p>
             <a:pPr algn="ctr" indent="0" marL="0">
               <a:buNone/>
             </a:pPr>
             <a:r>
-              <a:rPr lang="en-US" sz="1150" dirty="0">
+              <a:rPr lang="en-US" sz="1400" dirty="0">
                 <a:solidFill>
                   <a:srgbClr val="E8D8A8"/>
                 </a:solidFill>
@@ -11916,7 +11929,7 @@
               </a:rPr>
               <a:t>1870年代後有錄音</a:t>
             </a:r>
-            <a:endParaRPr lang="en-US" sz="1150" dirty="0"/>
+            <a:endParaRPr lang="en-US" sz="1400" dirty="0"/>
           </a:p>
         </p:txBody>
       </p:sp>
@@ -12119,7 +12132,7 @@
               <a:buChar char="•"/>
             </a:pPr>
             <a:r>
-              <a:rPr lang="en-US" sz="1250" dirty="0">
+              <a:rPr lang="en-US" sz="1400" dirty="0">
                 <a:solidFill>
                   <a:srgbClr val="2C1810"/>
                 </a:solidFill>
@@ -12127,9 +12140,9 @@
                 <a:ea typeface="Calibri" pitchFamily="34" charset="-122"/>
                 <a:cs typeface="Calibri" pitchFamily="34" charset="-120"/>
               </a:rPr>
-              <a:t>石器時代：人們在動物骨骼和猛獁象牙上鑽孔製作笛子</a:t>
-            </a:r>
-            <a:endParaRPr lang="en-US" sz="1250" dirty="0"/>
+              <a:t>石器時代於動物骨骼、猛獁象牙鑽孔製笛；最古老骨笛約 40,000 BCE（德國 Hohle Fels）</a:t>
+            </a:r>
+            <a:endParaRPr lang="en-US" sz="1400" dirty="0"/>
           </a:p>
           <a:p>
             <a:pPr marL="342900" indent="-342900">
@@ -12140,7 +12153,7 @@
               <a:buChar char="•"/>
             </a:pPr>
             <a:r>
-              <a:rPr lang="en-US" sz="1250" dirty="0">
+              <a:rPr lang="en-US" sz="1400" dirty="0">
                 <a:solidFill>
                   <a:srgbClr val="2C1810"/>
                 </a:solidFill>
@@ -12148,9 +12161,9 @@
                 <a:ea typeface="Calibri" pitchFamily="34" charset="-122"/>
                 <a:cs typeface="Calibri" pitchFamily="34" charset="-120"/>
               </a:rPr>
-              <a:t> Stone Age: finger-holes bored into animal bones and mammoth ivory</a:t>
-            </a:r>
-            <a:endParaRPr lang="en-US" sz="1250" dirty="0"/>
+              <a:t> Stone Age bone/ivory flutes; oldest ~40,000 BCE at Hohle Fels, Germany</a:t>
+            </a:r>
+            <a:endParaRPr lang="en-US" sz="1400" dirty="0"/>
           </a:p>
           <a:p>
             <a:pPr marL="342900" indent="-342900">
@@ -12161,7 +12174,7 @@
               <a:buChar char="•"/>
             </a:pPr>
             <a:r>
-              <a:rPr lang="en-US" sz="1250" dirty="0">
+              <a:rPr lang="en-US" sz="1400" dirty="0">
                 <a:solidFill>
                   <a:srgbClr val="2C1810"/>
                 </a:solidFill>
@@ -12169,9 +12182,9 @@
                 <a:ea typeface="Calibri" pitchFamily="34" charset="-122"/>
                 <a:cs typeface="Calibri" pitchFamily="34" charset="-120"/>
               </a:rPr>
-              <a:t>現存最古老骨笛約 40,000–42,000 BCE，出土於德國 Hohle Fels 洞穴（格里芬禿鷲翅骨）</a:t>
-            </a:r>
-            <a:endParaRPr lang="en-US" sz="1250" dirty="0"/>
+              <a:t>洞穴壁畫疑似描繪樂器演奏；土耳其新石器壁畫（BC 6000）顯示鼓手為舞者伴奏</a:t>
+            </a:r>
+            <a:endParaRPr lang="en-US" sz="1400" dirty="0"/>
           </a:p>
           <a:p>
             <a:pPr marL="342900" indent="-342900">
@@ -12182,7 +12195,7 @@
               <a:buChar char="•"/>
             </a:pPr>
             <a:r>
-              <a:rPr lang="en-US" sz="1250" dirty="0">
+              <a:rPr lang="en-US" sz="1400" dirty="0">
                 <a:solidFill>
                   <a:srgbClr val="2C1810"/>
                 </a:solidFill>
@@ -12190,9 +12203,9 @@
                 <a:ea typeface="Calibri" pitchFamily="34" charset="-122"/>
                 <a:cs typeface="Calibri" pitchFamily="34" charset="-120"/>
               </a:rPr>
-              <a:t> Oldest bone flute: ~40,000 BCE, Hohle Fels Cave, Germany (griffon vulture radius)</a:t>
-            </a:r>
-            <a:endParaRPr lang="en-US" sz="1250" dirty="0"/>
+              <a:t> Cave paintings depict instruments; Neolithic Turkey murals show drummers</a:t>
+            </a:r>
+            <a:endParaRPr lang="en-US" sz="1400" dirty="0"/>
           </a:p>
           <a:p>
             <a:pPr marL="342900" indent="-342900">
@@ -12203,7 +12216,7 @@
               <a:buChar char="•"/>
             </a:pPr>
             <a:r>
-              <a:rPr lang="en-US" sz="1250" dirty="0">
+              <a:rPr lang="en-US" sz="1400" dirty="0">
                 <a:solidFill>
                   <a:srgbClr val="2C1810"/>
                 </a:solidFill>
@@ -12211,9 +12224,9 @@
                 <a:ea typeface="Calibri" pitchFamily="34" charset="-122"/>
                 <a:cs typeface="Calibri" pitchFamily="34" charset="-120"/>
               </a:rPr>
-              <a:t>洞穴壁畫疑似描繪樂器演奏；土耳其新石器壁畫（西元前 6000 年）顯示鼓手為舞者伴奏</a:t>
-            </a:r>
-            <a:endParaRPr lang="en-US" sz="1250" dirty="0"/>
+              <a:t>青銅時代（BC 4000 起）：金屬樂器（鐘、鈸、角）和撥弦樂器出現</a:t>
+            </a:r>
+            <a:endParaRPr lang="en-US" sz="1400" dirty="0"/>
           </a:p>
           <a:p>
             <a:pPr marL="342900" indent="-342900">
@@ -12224,7 +12237,7 @@
               <a:buChar char="•"/>
             </a:pPr>
             <a:r>
-              <a:rPr lang="en-US" sz="1250" dirty="0">
+              <a:rPr lang="en-US" sz="1400" dirty="0">
                 <a:solidFill>
                   <a:srgbClr val="2C1810"/>
                 </a:solidFill>
@@ -12232,9 +12245,9 @@
                 <a:ea typeface="Calibri" pitchFamily="34" charset="-122"/>
                 <a:cs typeface="Calibri" pitchFamily="34" charset="-120"/>
               </a:rPr>
-              <a:t> Cave paintings may depict instruments; Neolithic Turkey murals show drummers</a:t>
-            </a:r>
-            <a:endParaRPr lang="en-US" sz="1250" dirty="0"/>
+              <a:t> Bronze Age (4th mill. BCE): metal instruments and plucked strings emerge</a:t>
+            </a:r>
+            <a:endParaRPr lang="en-US" sz="1400" dirty="0"/>
           </a:p>
           <a:p>
             <a:pPr marL="342900" indent="-342900">
@@ -12245,7 +12258,7 @@
               <a:buChar char="•"/>
             </a:pPr>
             <a:r>
-              <a:rPr lang="en-US" sz="1250" dirty="0">
+              <a:rPr lang="en-US" sz="1400" dirty="0">
                 <a:solidFill>
                   <a:srgbClr val="2C1810"/>
                 </a:solidFill>
@@ -12253,9 +12266,9 @@
                 <a:ea typeface="Calibri" pitchFamily="34" charset="-122"/>
                 <a:cs typeface="Calibri" pitchFamily="34" charset="-120"/>
               </a:rPr>
-              <a:t>青銅時代（BC 4000 起）：金屬樂器（鐘、鈸、角）和撥弦樂器出現</a:t>
-            </a:r>
-            <a:endParaRPr lang="en-US" sz="1250" dirty="0"/>
+              <a:t>沒有文字記錄 → 史前音樂幾乎完全沉默</a:t>
+            </a:r>
+            <a:endParaRPr lang="en-US" sz="1400" dirty="0"/>
           </a:p>
           <a:p>
             <a:pPr marL="342900" indent="-342900">
@@ -12266,7 +12279,7 @@
               <a:buChar char="•"/>
             </a:pPr>
             <a:r>
-              <a:rPr lang="en-US" sz="1250" dirty="0">
+              <a:rPr lang="en-US" sz="1400" dirty="0">
                 <a:solidFill>
                   <a:srgbClr val="2C1810"/>
                 </a:solidFill>
@@ -12274,51 +12287,9 @@
                 <a:ea typeface="Calibri" pitchFamily="34" charset="-122"/>
                 <a:cs typeface="Calibri" pitchFamily="34" charset="-120"/>
               </a:rPr>
-              <a:t> Bronze Age (4th mill. BCE): metal instruments and plucked strings emerge</a:t>
-            </a:r>
-            <a:endParaRPr lang="en-US" sz="1250" dirty="0"/>
-          </a:p>
-          <a:p>
-            <a:pPr marL="342900" indent="-342900">
-              <a:spcAft>
-                <a:spcPts val="400"/>
-              </a:spcAft>
-              <a:buSzPct val="100000"/>
-              <a:buChar char="•"/>
-            </a:pPr>
-            <a:r>
-              <a:rPr lang="en-US" sz="1250" dirty="0">
-                <a:solidFill>
-                  <a:srgbClr val="2C1810"/>
-                </a:solidFill>
-                <a:latin typeface="Calibri" pitchFamily="34" charset="0"/>
-                <a:ea typeface="Calibri" pitchFamily="34" charset="-122"/>
-                <a:cs typeface="Calibri" pitchFamily="34" charset="-120"/>
-              </a:rPr>
-              <a:t>沒有文字記錄 → 史前音樂幾乎完全沉默</a:t>
-            </a:r>
-            <a:endParaRPr lang="en-US" sz="1250" dirty="0"/>
-          </a:p>
-          <a:p>
-            <a:pPr marL="342900" indent="-342900">
-              <a:spcAft>
-                <a:spcPts val="400"/>
-              </a:spcAft>
-              <a:buSzPct val="100000"/>
-              <a:buChar char="•"/>
-            </a:pPr>
-            <a:r>
-              <a:rPr lang="en-US" sz="1250" dirty="0">
-                <a:solidFill>
-                  <a:srgbClr val="2C1810"/>
-                </a:solidFill>
-                <a:latin typeface="Calibri" pitchFamily="34" charset="0"/>
-                <a:ea typeface="Calibri" pitchFamily="34" charset="-122"/>
-                <a:cs typeface="Calibri" pitchFamily="34" charset="-120"/>
-              </a:rPr>
-              <a:t> No written record → prehistoric music is nearly entirely silent</a:t>
-            </a:r>
-            <a:endParaRPr lang="en-US" sz="1250" dirty="0"/>
+              <a:t> No written record → prehistoric music is nearly silent</a:t>
+            </a:r>
+            <a:endParaRPr lang="en-US" sz="1400" dirty="0"/>
           </a:p>
         </p:txBody>
       </p:sp>
@@ -12375,7 +12346,7 @@
                 <a:ea typeface="Georgia" pitchFamily="34" charset="-122"/>
                 <a:cs typeface="Georgia" pitchFamily="34" charset="-120"/>
               </a:rPr>
-              <a:t>🦴 Hohle Fels 骨笛</a:t>
+              <a:t>■ Hohle Fels 骨笛</a:t>
             </a:r>
             <a:endParaRPr lang="en-US" sz="1500" dirty="0"/>
           </a:p>
@@ -12399,14 +12370,14 @@
           <a:ln/>
         </p:spPr>
         <p:txBody>
-          <a:bodyPr wrap="square" rtlCol="0" anchor="ctr"/>
+          <a:bodyPr wrap="square" rtlCol="0" anchor="t"/>
           <a:lstStyle/>
           <a:p>
             <a:pPr indent="0" marL="0">
               <a:buNone/>
             </a:pPr>
             <a:r>
-              <a:rPr lang="en-US" sz="1200" b="1" dirty="0">
+              <a:rPr lang="en-US" sz="1400" b="1" dirty="0">
                 <a:solidFill>
                   <a:srgbClr val="E8D8A8"/>
                 </a:solidFill>
@@ -12421,7 +12392,7 @@
               <a:buNone/>
             </a:pPr>
             <a:r>
-              <a:rPr lang="en-US" sz="1200" dirty="0">
+              <a:rPr lang="en-US" sz="1400" dirty="0">
                 <a:solidFill>
                   <a:srgbClr val="E8D8A8"/>
                 </a:solidFill>
@@ -12436,7 +12407,7 @@
               <a:buNone/>
             </a:pPr>
             <a:r>
-              <a:rPr lang="en-US" sz="1200" dirty="0">
+              <a:rPr lang="en-US" sz="1400" dirty="0">
                 <a:solidFill>
                   <a:srgbClr val="E8D8A8"/>
                 </a:solidFill>
@@ -12451,7 +12422,7 @@
               <a:buNone/>
             </a:pPr>
             <a:r>
-              <a:rPr lang="en-US" sz="1200" i="1" dirty="0">
+              <a:rPr lang="en-US" sz="1400" i="1" dirty="0">
                 <a:solidFill>
                   <a:srgbClr val="E8D8A8"/>
                 </a:solidFill>
@@ -12461,14 +12432,14 @@
               </a:rPr>
               <a:t>40,000–42,000 years old</a:t>
             </a:r>
-            <a:endParaRPr lang="en-US" sz="1200" dirty="0"/>
+            <a:endParaRPr lang="en-US" sz="1400" dirty="0"/>
           </a:p>
           <a:p>
             <a:pPr indent="0" marL="0">
               <a:buNone/>
             </a:pPr>
             <a:r>
-              <a:rPr lang="en-US" sz="1200" i="1" dirty="0">
+              <a:rPr lang="en-US" sz="1400" i="1" dirty="0">
                 <a:solidFill>
                   <a:srgbClr val="E8D8A8"/>
                 </a:solidFill>
@@ -12478,14 +12449,14 @@
               </a:rPr>
               <a:t>Made from griffon vulture wing bone</a:t>
             </a:r>
-            <a:endParaRPr lang="en-US" sz="1200" dirty="0"/>
+            <a:endParaRPr lang="en-US" sz="1400" dirty="0"/>
           </a:p>
           <a:p>
             <a:pPr indent="0" marL="0">
               <a:buNone/>
             </a:pPr>
             <a:r>
-              <a:rPr lang="en-US" sz="1200" i="1" dirty="0">
+              <a:rPr lang="en-US" sz="1400" i="1" dirty="0">
                 <a:solidFill>
                   <a:srgbClr val="E8D8A8"/>
                 </a:solidFill>
@@ -12495,7 +12466,7 @@
               </a:rPr>
               <a:t>5 finger holes — most complete early flute found</a:t>
             </a:r>
-            <a:endParaRPr lang="en-US" sz="1200" dirty="0"/>
+            <a:endParaRPr lang="en-US" sz="1400" dirty="0"/>
           </a:p>
         </p:txBody>
       </p:sp>
@@ -12507,7 +12478,7 @@
         </p:nvSpPr>
         <p:spPr>
           <a:xfrm>
-            <a:off x="5852160" y="3794760"/>
+            <a:off x="5852160" y="3657600"/>
             <a:ext cx="2834640" cy="320040"/>
           </a:xfrm>
           <a:prstGeom prst="rect">
@@ -12524,14 +12495,14 @@
               <a:buNone/>
             </a:pPr>
             <a:r>
-              <a:rPr lang="en-US" sz="1200" b="1" dirty="0">
+              <a:rPr lang="en-US" sz="1400" b="1" dirty="0">
                 <a:solidFill>
                   <a:srgbClr val="C8A020"/>
                 </a:solidFill>
               </a:rPr>
-              <a:t>🔑 關鍵觀念 Key Insight</a:t>
-            </a:r>
-            <a:endParaRPr lang="en-US" sz="1200" dirty="0"/>
+              <a:t>■ 關鍵觀念 Key Insight</a:t>
+            </a:r>
+            <a:endParaRPr lang="en-US" sz="1400" dirty="0"/>
           </a:p>
         </p:txBody>
       </p:sp>
@@ -12543,24 +12514,24 @@
         </p:nvSpPr>
         <p:spPr>
           <a:xfrm>
-            <a:off x="5852160" y="4133088"/>
-            <a:ext cx="2834640" cy="640080"/>
-          </a:xfrm>
-          <a:prstGeom prst="rect">
-            <a:avLst/>
-          </a:prstGeom>
-          <a:noFill/>
-          <a:ln/>
-        </p:spPr>
-        <p:txBody>
-          <a:bodyPr wrap="square" rtlCol="0" anchor="ctr"/>
+            <a:off x="5852160" y="3977640"/>
+            <a:ext cx="2834640" cy="822960"/>
+          </a:xfrm>
+          <a:prstGeom prst="rect">
+            <a:avLst/>
+          </a:prstGeom>
+          <a:noFill/>
+          <a:ln/>
+        </p:spPr>
+        <p:txBody>
+          <a:bodyPr wrap="square" rtlCol="0" anchor="t"/>
           <a:lstStyle/>
           <a:p>
             <a:pPr algn="ctr" indent="0" marL="0">
               <a:buNone/>
             </a:pPr>
             <a:r>
-              <a:rPr lang="en-US" sz="1050" dirty="0">
+              <a:rPr lang="en-US" sz="1400" dirty="0">
                 <a:solidFill>
                   <a:srgbClr val="E8D8A8"/>
                 </a:solidFill>
@@ -12568,16 +12539,16 @@
                 <a:ea typeface="Calibri" pitchFamily="34" charset="-122"/>
                 <a:cs typeface="Calibri" pitchFamily="34" charset="-120"/>
               </a:rPr>
-              <a:t>文字的發明標誌史前時代的結束，也是音樂歷史的真正起點</a:t>
-            </a:r>
-            <a:endParaRPr lang="en-US" sz="1050" dirty="0"/>
+              <a:t>文字的發明標誌史前時代的結束，</a:t>
+            </a:r>
+            <a:endParaRPr lang="en-US" sz="1400" dirty="0"/>
           </a:p>
           <a:p>
             <a:pPr algn="ctr" indent="0" marL="0">
               <a:buNone/>
             </a:pPr>
             <a:r>
-              <a:rPr lang="en-US" sz="1050" dirty="0">
+              <a:rPr lang="en-US" sz="1400" dirty="0">
                 <a:solidFill>
                   <a:srgbClr val="E8D8A8"/>
                 </a:solidFill>
@@ -12585,9 +12556,43 @@
                 <a:ea typeface="Calibri" pitchFamily="34" charset="-122"/>
                 <a:cs typeface="Calibri" pitchFamily="34" charset="-120"/>
               </a:rPr>
-              <a:t>The invention of writing marks the true beginning of music history.</a:t>
-            </a:r>
-            <a:endParaRPr lang="en-US" sz="1050" dirty="0"/>
+              <a:t>也是音樂歷史的真正起點。</a:t>
+            </a:r>
+            <a:endParaRPr lang="en-US" sz="1400" dirty="0"/>
+          </a:p>
+          <a:p>
+            <a:pPr algn="ctr" indent="0" marL="0">
+              <a:buNone/>
+            </a:pPr>
+            <a:r>
+              <a:rPr lang="en-US" sz="1400" dirty="0">
+                <a:solidFill>
+                  <a:srgbClr val="E8D8A8"/>
+                </a:solidFill>
+                <a:latin typeface="Calibri" pitchFamily="34" charset="0"/>
+                <a:ea typeface="Calibri" pitchFamily="34" charset="-122"/>
+                <a:cs typeface="Calibri" pitchFamily="34" charset="-120"/>
+              </a:rPr>
+              <a:t>Writing marks the true beginning</a:t>
+            </a:r>
+            <a:endParaRPr lang="en-US" sz="1400" dirty="0"/>
+          </a:p>
+          <a:p>
+            <a:pPr algn="ctr" indent="0" marL="0">
+              <a:buNone/>
+            </a:pPr>
+            <a:r>
+              <a:rPr lang="en-US" sz="1400" dirty="0">
+                <a:solidFill>
+                  <a:srgbClr val="E8D8A8"/>
+                </a:solidFill>
+                <a:latin typeface="Calibri" pitchFamily="34" charset="0"/>
+                <a:ea typeface="Calibri" pitchFamily="34" charset="-122"/>
+                <a:cs typeface="Calibri" pitchFamily="34" charset="-120"/>
+              </a:rPr>
+              <a:t>of music history.</a:t>
+            </a:r>
+            <a:endParaRPr lang="en-US" sz="1400" dirty="0"/>
           </a:p>
         </p:txBody>
       </p:sp>
@@ -12806,7 +12811,7 @@
               <a:buNone/>
             </a:pPr>
             <a:r>
-              <a:rPr lang="en-US" sz="1250" b="1" dirty="0">
+              <a:rPr lang="en-US" sz="1400" b="1" dirty="0">
                 <a:solidFill>
                   <a:srgbClr val="C8A020"/>
                 </a:solidFill>
@@ -12814,9 +12819,9 @@
                 <a:ea typeface="Georgia" pitchFamily="34" charset="-122"/>
                 <a:cs typeface="Georgia" pitchFamily="34" charset="-120"/>
               </a:rPr>
-              <a:t>🌍 地理位置</a:t>
-            </a:r>
-            <a:endParaRPr lang="en-US" sz="1250" dirty="0"/>
+              <a:t>地理位置</a:t>
+            </a:r>
+            <a:endParaRPr lang="en-US" sz="1400" dirty="0"/>
           </a:p>
         </p:txBody>
       </p:sp>
@@ -12838,14 +12843,14 @@
           <a:ln/>
         </p:spPr>
         <p:txBody>
-          <a:bodyPr wrap="square" lIns="0" tIns="0" rIns="0" bIns="0" rtlCol="0" anchor="ctr"/>
+          <a:bodyPr wrap="square" lIns="0" tIns="0" rIns="0" bIns="0" rtlCol="0" anchor="t"/>
           <a:lstStyle/>
           <a:p>
             <a:pPr indent="0" marL="0">
               <a:buNone/>
             </a:pPr>
             <a:r>
-              <a:rPr lang="en-US" sz="1200" dirty="0">
+              <a:rPr lang="en-US" sz="1400" dirty="0">
                 <a:solidFill>
                   <a:srgbClr val="E8D8A8"/>
                 </a:solidFill>
@@ -12855,14 +12860,14 @@
               </a:rPr>
               <a:t>底格里斯河與幼發拉底河之間（今伊拉克、敘利亞）</a:t>
             </a:r>
-            <a:endParaRPr lang="en-US" sz="1200" dirty="0"/>
+            <a:endParaRPr lang="en-US" sz="1400" dirty="0"/>
           </a:p>
           <a:p>
             <a:pPr indent="0" marL="0">
               <a:buNone/>
             </a:pPr>
             <a:r>
-              <a:rPr lang="en-US" sz="1200" dirty="0">
+              <a:rPr lang="en-US" sz="1400" dirty="0">
                 <a:solidFill>
                   <a:srgbClr val="E8D8A8"/>
                 </a:solidFill>
@@ -12872,7 +12877,7 @@
               </a:rPr>
               <a:t>Between Tigris &amp; Euphrates Rivers (modern Iraq &amp; Syria)</a:t>
             </a:r>
-            <a:endParaRPr lang="en-US" sz="1200" dirty="0"/>
+            <a:endParaRPr lang="en-US" sz="1400" dirty="0"/>
           </a:p>
         </p:txBody>
       </p:sp>
@@ -12921,7 +12926,7 @@
               <a:buNone/>
             </a:pPr>
             <a:r>
-              <a:rPr lang="en-US" sz="1250" b="1" dirty="0">
+              <a:rPr lang="en-US" sz="1400" b="1" dirty="0">
                 <a:solidFill>
                   <a:srgbClr val="C8A020"/>
                 </a:solidFill>
@@ -12929,9 +12934,9 @@
                 <a:ea typeface="Georgia" pitchFamily="34" charset="-122"/>
                 <a:cs typeface="Georgia" pitchFamily="34" charset="-120"/>
               </a:rPr>
-              <a:t>🏙 文明</a:t>
-            </a:r>
-            <a:endParaRPr lang="en-US" sz="1250" dirty="0"/>
+              <a:t>文明</a:t>
+            </a:r>
+            <a:endParaRPr lang="en-US" sz="1400" dirty="0"/>
           </a:p>
         </p:txBody>
       </p:sp>
@@ -12953,14 +12958,14 @@
           <a:ln/>
         </p:spPr>
         <p:txBody>
-          <a:bodyPr wrap="square" lIns="0" tIns="0" rIns="0" bIns="0" rtlCol="0" anchor="ctr"/>
+          <a:bodyPr wrap="square" lIns="0" tIns="0" rIns="0" bIns="0" rtlCol="0" anchor="t"/>
           <a:lstStyle/>
           <a:p>
             <a:pPr indent="0" marL="0">
               <a:buNone/>
             </a:pPr>
             <a:r>
-              <a:rPr lang="en-US" sz="1200" dirty="0">
+              <a:rPr lang="en-US" sz="1400" dirty="0">
                 <a:solidFill>
                   <a:srgbClr val="E8D8A8"/>
                 </a:solidFill>
@@ -12970,14 +12975,14 @@
               </a:rPr>
               <a:t>蘇美人（Sumerians）建立最早城市；楔形文字（Cuneiform）</a:t>
             </a:r>
-            <a:endParaRPr lang="en-US" sz="1200" dirty="0"/>
+            <a:endParaRPr lang="en-US" sz="1400" dirty="0"/>
           </a:p>
           <a:p>
             <a:pPr indent="0" marL="0">
               <a:buNone/>
             </a:pPr>
             <a:r>
-              <a:rPr lang="en-US" sz="1200" dirty="0">
+              <a:rPr lang="en-US" sz="1400" dirty="0">
                 <a:solidFill>
                   <a:srgbClr val="E8D8A8"/>
                 </a:solidFill>
@@ -12987,7 +12992,7 @@
               </a:rPr>
               <a:t>Sumerians built first true cities; developed cuneiform writing</a:t>
             </a:r>
-            <a:endParaRPr lang="en-US" sz="1200" dirty="0"/>
+            <a:endParaRPr lang="en-US" sz="1400" dirty="0"/>
           </a:p>
         </p:txBody>
       </p:sp>
@@ -13036,7 +13041,7 @@
               <a:buNone/>
             </a:pPr>
             <a:r>
-              <a:rPr lang="en-US" sz="1250" b="1" dirty="0">
+              <a:rPr lang="en-US" sz="1400" b="1" dirty="0">
                 <a:solidFill>
                   <a:srgbClr val="C8A020"/>
                 </a:solidFill>
@@ -13044,9 +13049,9 @@
                 <a:ea typeface="Georgia" pitchFamily="34" charset="-122"/>
                 <a:cs typeface="Georgia" pitchFamily="34" charset="-120"/>
               </a:rPr>
-              <a:t>🎵 音樂用途</a:t>
-            </a:r>
-            <a:endParaRPr lang="en-US" sz="1250" dirty="0"/>
+              <a:t>音樂用途</a:t>
+            </a:r>
+            <a:endParaRPr lang="en-US" sz="1400" dirty="0"/>
           </a:p>
         </p:txBody>
       </p:sp>
@@ -13068,14 +13073,14 @@
           <a:ln/>
         </p:spPr>
         <p:txBody>
-          <a:bodyPr wrap="square" lIns="0" tIns="0" rIns="0" bIns="0" rtlCol="0" anchor="ctr"/>
+          <a:bodyPr wrap="square" lIns="0" tIns="0" rIns="0" bIns="0" rtlCol="0" anchor="t"/>
           <a:lstStyle/>
           <a:p>
             <a:pPr indent="0" marL="0">
               <a:buNone/>
             </a:pPr>
             <a:r>
-              <a:rPr lang="en-US" sz="1200" dirty="0">
+              <a:rPr lang="en-US" sz="1400" dirty="0">
                 <a:solidFill>
                   <a:srgbClr val="E8D8A8"/>
                 </a:solidFill>
@@ -13085,14 +13090,14 @@
               </a:rPr>
               <a:t>婚禮歌、哀歌、軍樂、工作歌、酒館音樂、神聖儀式</a:t>
             </a:r>
-            <a:endParaRPr lang="en-US" sz="1200" dirty="0"/>
+            <a:endParaRPr lang="en-US" sz="1400" dirty="0"/>
           </a:p>
           <a:p>
             <a:pPr indent="0" marL="0">
               <a:buNone/>
             </a:pPr>
             <a:r>
-              <a:rPr lang="en-US" sz="1200" dirty="0">
+              <a:rPr lang="en-US" sz="1400" dirty="0">
                 <a:solidFill>
                   <a:srgbClr val="E8D8A8"/>
                 </a:solidFill>
@@ -13102,7 +13107,7 @@
               </a:rPr>
               <a:t>Wedding songs, laments, military, work, tavern, sacred ceremonies</a:t>
             </a:r>
-            <a:endParaRPr lang="en-US" sz="1200" dirty="0"/>
+            <a:endParaRPr lang="en-US" sz="1400" dirty="0"/>
           </a:p>
         </p:txBody>
       </p:sp>
@@ -13151,7 +13156,7 @@
               <a:buNone/>
             </a:pPr>
             <a:r>
-              <a:rPr lang="en-US" sz="1250" b="1" dirty="0">
+              <a:rPr lang="en-US" sz="1400" b="1" dirty="0">
                 <a:solidFill>
                   <a:srgbClr val="C8A020"/>
                 </a:solidFill>
@@ -13159,9 +13164,9 @@
                 <a:ea typeface="Georgia" pitchFamily="34" charset="-122"/>
                 <a:cs typeface="Georgia" pitchFamily="34" charset="-120"/>
               </a:rPr>
-              <a:t>📖 文獻</a:t>
-            </a:r>
-            <a:endParaRPr lang="en-US" sz="1250" dirty="0"/>
+              <a:t>文獻</a:t>
+            </a:r>
+            <a:endParaRPr lang="en-US" sz="1400" dirty="0"/>
           </a:p>
         </p:txBody>
       </p:sp>
@@ -13183,14 +13188,14 @@
           <a:ln/>
         </p:spPr>
         <p:txBody>
-          <a:bodyPr wrap="square" lIns="0" tIns="0" rIns="0" bIns="0" rtlCol="0" anchor="ctr"/>
+          <a:bodyPr wrap="square" lIns="0" tIns="0" rIns="0" bIns="0" rtlCol="0" anchor="t"/>
           <a:lstStyle/>
           <a:p>
             <a:pPr indent="0" marL="0">
               <a:buNone/>
             </a:pPr>
             <a:r>
-              <a:rPr lang="en-US" sz="1200" dirty="0">
+              <a:rPr lang="en-US" sz="1400" dirty="0">
                 <a:solidFill>
                   <a:srgbClr val="E8D8A8"/>
                 </a:solidFill>
@@ -13200,14 +13205,14 @@
               </a:rPr>
               <a:t>ca. 2500 BCE 起的詞匯表：包含樂器、音律、演奏技術</a:t>
             </a:r>
-            <a:endParaRPr lang="en-US" sz="1200" dirty="0"/>
+            <a:endParaRPr lang="en-US" sz="1400" dirty="0"/>
           </a:p>
           <a:p>
             <a:pPr indent="0" marL="0">
               <a:buNone/>
             </a:pPr>
             <a:r>
-              <a:rPr lang="en-US" sz="1200" dirty="0">
+              <a:rPr lang="en-US" sz="1400" dirty="0">
                 <a:solidFill>
                   <a:srgbClr val="E8D8A8"/>
                 </a:solidFill>
@@ -13217,7 +13222,7 @@
               </a:rPr>
               <a:t>Word lists from ~2500 BCE: instruments, tuning, performing techniques</a:t>
             </a:r>
-            <a:endParaRPr lang="en-US" sz="1200" dirty="0"/>
+            <a:endParaRPr lang="en-US" sz="1400" dirty="0"/>
           </a:p>
         </p:txBody>
       </p:sp>
@@ -13266,7 +13271,7 @@
               <a:buNone/>
             </a:pPr>
             <a:r>
-              <a:rPr lang="en-US" sz="1250" b="1" dirty="0">
+              <a:rPr lang="en-US" sz="1400" b="1" dirty="0">
                 <a:solidFill>
                   <a:srgbClr val="C8A020"/>
                 </a:solidFill>
@@ -13274,9 +13279,9 @@
                 <a:ea typeface="Georgia" pitchFamily="34" charset="-122"/>
                 <a:cs typeface="Georgia" pitchFamily="34" charset="-120"/>
               </a:rPr>
-              <a:t>🎶 理論</a:t>
-            </a:r>
-            <a:endParaRPr lang="en-US" sz="1250" dirty="0"/>
+              <a:t>理論</a:t>
+            </a:r>
+            <a:endParaRPr lang="en-US" sz="1400" dirty="0"/>
           </a:p>
         </p:txBody>
       </p:sp>
@@ -13298,14 +13303,14 @@
           <a:ln/>
         </p:spPr>
         <p:txBody>
-          <a:bodyPr wrap="square" lIns="0" tIns="0" rIns="0" bIns="0" rtlCol="0" anchor="ctr"/>
+          <a:bodyPr wrap="square" lIns="0" tIns="0" rIns="0" bIns="0" rtlCol="0" anchor="t"/>
           <a:lstStyle/>
           <a:p>
             <a:pPr indent="0" marL="0">
               <a:buNone/>
             </a:pPr>
             <a:r>
-              <a:rPr lang="en-US" sz="1200" dirty="0">
+              <a:rPr lang="en-US" sz="1400" dirty="0">
                 <a:solidFill>
                   <a:srgbClr val="E8D8A8"/>
                 </a:solidFill>
@@ -13315,14 +13320,14 @@
               </a:rPr>
               <a:t>巴比倫人使用七聲全音階；七種調式（對應鋼琴白鍵）</a:t>
             </a:r>
-            <a:endParaRPr lang="en-US" sz="1200" dirty="0"/>
+            <a:endParaRPr lang="en-US" sz="1400" dirty="0"/>
           </a:p>
           <a:p>
             <a:pPr indent="0" marL="0">
               <a:buNone/>
             </a:pPr>
             <a:r>
-              <a:rPr lang="en-US" sz="1200" dirty="0">
+              <a:rPr lang="en-US" sz="1400" dirty="0">
                 <a:solidFill>
                   <a:srgbClr val="E8D8A8"/>
                 </a:solidFill>
@@ -13332,7 +13337,7 @@
               </a:rPr>
               <a:t>Babylonians used 7-note diatonic scales; 7 modes (piano white keys)</a:t>
             </a:r>
-            <a:endParaRPr lang="en-US" sz="1200" dirty="0"/>
+            <a:endParaRPr lang="en-US" sz="1400" dirty="0"/>
           </a:p>
         </p:txBody>
       </p:sp>
@@ -13465,14 +13470,14 @@
           <a:ln/>
         </p:spPr>
         <p:txBody>
-          <a:bodyPr wrap="square" lIns="0" tIns="0" rIns="0" bIns="0" rtlCol="0" anchor="ctr"/>
+          <a:bodyPr wrap="square" lIns="0" tIns="0" rIns="0" bIns="0" rtlCol="0" anchor="t"/>
           <a:lstStyle/>
           <a:p>
             <a:pPr indent="0" marL="0">
               <a:buNone/>
             </a:pPr>
             <a:r>
-              <a:rPr lang="en-US" sz="1300" i="1" dirty="0">
+              <a:rPr lang="en-US" sz="1400" i="1" dirty="0">
                 <a:solidFill>
                   <a:srgbClr val="5C3A28"/>
                 </a:solidFill>
@@ -13482,7 +13487,7 @@
               </a:rPr>
               <a:t>Mesopotamian Instruments · ca. 2500 BCE, Royal Tombs at Ur</a:t>
             </a:r>
-            <a:endParaRPr lang="en-US" sz="1300" dirty="0"/>
+            <a:endParaRPr lang="en-US" sz="1400" dirty="0"/>
           </a:p>
         </p:txBody>
       </p:sp>
@@ -13583,14 +13588,14 @@
           <a:ln/>
         </p:spPr>
         <p:txBody>
-          <a:bodyPr wrap="square" lIns="0" tIns="0" rIns="0" bIns="0" rtlCol="0" anchor="ctr"/>
+          <a:bodyPr wrap="square" lIns="0" tIns="0" rIns="0" bIns="0" rtlCol="0" anchor="t"/>
           <a:lstStyle/>
           <a:p>
             <a:pPr indent="0" marL="0">
               <a:buNone/>
             </a:pPr>
             <a:r>
-              <a:rPr lang="en-US" sz="1150" dirty="0">
+              <a:rPr lang="en-US" sz="1400" dirty="0">
                 <a:solidFill>
                   <a:srgbClr val="FBF5E6"/>
                 </a:solidFill>
@@ -13600,14 +13605,14 @@
               </a:rPr>
               <a:t>弦線與音板平行；弦繞在可調音的棒子上</a:t>
             </a:r>
-            <a:endParaRPr lang="en-US" sz="1150" dirty="0"/>
+            <a:endParaRPr lang="en-US" sz="1400" dirty="0"/>
           </a:p>
           <a:p>
             <a:pPr indent="0" marL="0">
               <a:buNone/>
             </a:pPr>
             <a:r>
-              <a:rPr lang="en-US" sz="1150" dirty="0">
+              <a:rPr lang="en-US" sz="1400" dirty="0">
                 <a:solidFill>
                   <a:srgbClr val="FBF5E6"/>
                 </a:solidFill>
@@ -13617,7 +13622,7 @@
               </a:rPr>
               <a:t>Strings run parallel to soundboard; tunable crossbar</a:t>
             </a:r>
-            <a:endParaRPr lang="en-US" sz="1150" dirty="0"/>
+            <a:endParaRPr lang="en-US" sz="1400" dirty="0"/>
           </a:p>
         </p:txBody>
       </p:sp>
@@ -13698,14 +13703,14 @@
           <a:ln/>
         </p:spPr>
         <p:txBody>
-          <a:bodyPr wrap="square" lIns="0" tIns="0" rIns="0" bIns="0" rtlCol="0" anchor="ctr"/>
+          <a:bodyPr wrap="square" lIns="0" tIns="0" rIns="0" bIns="0" rtlCol="0" anchor="t"/>
           <a:lstStyle/>
           <a:p>
             <a:pPr indent="0" marL="0">
               <a:buNone/>
             </a:pPr>
             <a:r>
-              <a:rPr lang="en-US" sz="1150" dirty="0">
+              <a:rPr lang="en-US" sz="1400" dirty="0">
                 <a:solidFill>
                   <a:srgbClr val="FBF5E6"/>
                 </a:solidFill>
@@ -13715,14 +13720,14 @@
               </a:rPr>
               <a:t>弦線垂直於音板；琴頸直接連接共鳴箱</a:t>
             </a:r>
-            <a:endParaRPr lang="en-US" sz="1150" dirty="0"/>
+            <a:endParaRPr lang="en-US" sz="1400" dirty="0"/>
           </a:p>
           <a:p>
             <a:pPr indent="0" marL="0">
               <a:buNone/>
             </a:pPr>
             <a:r>
-              <a:rPr lang="en-US" sz="1150" dirty="0">
+              <a:rPr lang="en-US" sz="1400" dirty="0">
                 <a:solidFill>
                   <a:srgbClr val="FBF5E6"/>
                 </a:solidFill>
@@ -13732,7 +13737,7 @@
               </a:rPr>
               <a:t>Strings perpendicular to soundboard; neck attached to soundbox</a:t>
             </a:r>
-            <a:endParaRPr lang="en-US" sz="1150" dirty="0"/>
+            <a:endParaRPr lang="en-US" sz="1400" dirty="0"/>
           </a:p>
         </p:txBody>
       </p:sp>
@@ -13813,14 +13818,14 @@
           <a:ln/>
         </p:spPr>
         <p:txBody>
-          <a:bodyPr wrap="square" lIns="0" tIns="0" rIns="0" bIns="0" rtlCol="0" anchor="ctr"/>
+          <a:bodyPr wrap="square" lIns="0" tIns="0" rIns="0" bIns="0" rtlCol="0" anchor="t"/>
           <a:lstStyle/>
           <a:p>
             <a:pPr indent="0" marL="0">
               <a:buNone/>
             </a:pPr>
             <a:r>
-              <a:rPr lang="en-US" sz="1150" dirty="0">
+              <a:rPr lang="en-US" sz="1400" dirty="0">
                 <a:solidFill>
                   <a:srgbClr val="FBF5E6"/>
                 </a:solidFill>
@@ -13830,14 +13835,14 @@
               </a:rPr>
               <a:t>長頸撥弦樂器</a:t>
             </a:r>
-            <a:endParaRPr lang="en-US" sz="1150" dirty="0"/>
+            <a:endParaRPr lang="en-US" sz="1400" dirty="0"/>
           </a:p>
           <a:p>
             <a:pPr indent="0" marL="0">
               <a:buNone/>
             </a:pPr>
             <a:r>
-              <a:rPr lang="en-US" sz="1150" dirty="0">
+              <a:rPr lang="en-US" sz="1400" dirty="0">
                 <a:solidFill>
                   <a:srgbClr val="FBF5E6"/>
                 </a:solidFill>
@@ -13847,7 +13852,7 @@
               </a:rPr>
               <a:t>Long-necked plucked string instrument</a:t>
             </a:r>
-            <a:endParaRPr lang="en-US" sz="1150" dirty="0"/>
+            <a:endParaRPr lang="en-US" sz="1400" dirty="0"/>
           </a:p>
         </p:txBody>
       </p:sp>
@@ -13928,14 +13933,14 @@
           <a:ln/>
         </p:spPr>
         <p:txBody>
-          <a:bodyPr wrap="square" lIns="0" tIns="0" rIns="0" bIns="0" rtlCol="0" anchor="ctr"/>
+          <a:bodyPr wrap="square" lIns="0" tIns="0" rIns="0" bIns="0" rtlCol="0" anchor="t"/>
           <a:lstStyle/>
           <a:p>
             <a:pPr indent="0" marL="0">
               <a:buNone/>
             </a:pPr>
             <a:r>
-              <a:rPr lang="en-US" sz="1150" dirty="0">
+              <a:rPr lang="en-US" sz="1400" dirty="0">
                 <a:solidFill>
                   <a:srgbClr val="FBF5E6"/>
                 </a:solidFill>
@@ -13945,14 +13950,14 @@
               </a:rPr>
               <a:t>雙管笛、鼓、鈸、拍板、搖鈴</a:t>
             </a:r>
-            <a:endParaRPr lang="en-US" sz="1150" dirty="0"/>
+            <a:endParaRPr lang="en-US" sz="1400" dirty="0"/>
           </a:p>
           <a:p>
             <a:pPr indent="0" marL="0">
               <a:buNone/>
             </a:pPr>
             <a:r>
-              <a:rPr lang="en-US" sz="1150" dirty="0">
+              <a:rPr lang="en-US" sz="1400" dirty="0">
                 <a:solidFill>
                   <a:srgbClr val="FBF5E6"/>
                 </a:solidFill>
@@ -13962,7 +13967,7 @@
               </a:rPr>
               <a:t>Double pipes, drums, cymbals, clappers, rattles, bells</a:t>
             </a:r>
-            <a:endParaRPr lang="en-US" sz="1150" dirty="0"/>
+            <a:endParaRPr lang="en-US" sz="1400" dirty="0"/>
           </a:p>
         </p:txBody>
       </p:sp>
@@ -14043,14 +14048,14 @@
           <a:ln/>
         </p:spPr>
         <p:txBody>
-          <a:bodyPr wrap="square" lIns="0" tIns="0" rIns="0" bIns="0" rtlCol="0" anchor="ctr"/>
+          <a:bodyPr wrap="square" lIns="0" tIns="0" rIns="0" bIns="0" rtlCol="0" anchor="t"/>
           <a:lstStyle/>
           <a:p>
             <a:pPr indent="0" marL="0">
               <a:buNone/>
             </a:pPr>
             <a:r>
-              <a:rPr lang="en-US" sz="1150" dirty="0">
+              <a:rPr lang="en-US" sz="1400" dirty="0">
                 <a:solidFill>
                   <a:srgbClr val="FBF5E6"/>
                 </a:solidFill>
@@ -14060,14 +14065,14 @@
               </a:rPr>
               <a:t>蘇美獨特風格；琴箱飾以公牛頭（宗教意涵）</a:t>
             </a:r>
-            <a:endParaRPr lang="en-US" sz="1150" dirty="0"/>
+            <a:endParaRPr lang="en-US" sz="1400" dirty="0"/>
           </a:p>
           <a:p>
             <a:pPr indent="0" marL="0">
               <a:buNone/>
             </a:pPr>
             <a:r>
-              <a:rPr lang="en-US" sz="1150" dirty="0">
+              <a:rPr lang="en-US" sz="1400" dirty="0">
                 <a:solidFill>
                   <a:srgbClr val="FBF5E6"/>
                 </a:solidFill>
@@ -14077,7 +14082,7 @@
               </a:rPr>
               <a:t>Distinctively Sumerian; soundbox features a bull's head (religious)</a:t>
             </a:r>
-            <a:endParaRPr lang="en-US" sz="1150" dirty="0"/>
+            <a:endParaRPr lang="en-US" sz="1400" dirty="0"/>
           </a:p>
         </p:txBody>
       </p:sp>
@@ -14099,14 +14104,14 @@
           <a:ln/>
         </p:spPr>
         <p:txBody>
-          <a:bodyPr wrap="square" rtlCol="0" anchor="ctr"/>
+          <a:bodyPr wrap="square" rtlCol="0" anchor="t"/>
           <a:lstStyle/>
           <a:p>
             <a:pPr indent="0" marL="0">
               <a:buNone/>
             </a:pPr>
             <a:r>
-              <a:rPr lang="en-US" sz="1050" i="1" dirty="0">
+              <a:rPr lang="en-US" sz="1400" i="1" dirty="0">
                 <a:solidFill>
                   <a:srgbClr val="5C3A28"/>
                 </a:solidFill>
@@ -14116,14 +14121,14 @@
               </a:rPr>
               <a:t>烏爾出土的豎琴（ca. 2500 BCE）是現存最早的撥弦樂器實物之一</a:t>
             </a:r>
-            <a:endParaRPr lang="en-US" sz="1050" dirty="0"/>
+            <a:endParaRPr lang="en-US" sz="1400" dirty="0"/>
           </a:p>
           <a:p>
             <a:pPr indent="0" marL="0">
               <a:buNone/>
             </a:pPr>
             <a:r>
-              <a:rPr lang="en-US" sz="1050" i="1" dirty="0">
+              <a:rPr lang="en-US" sz="1400" i="1" dirty="0">
                 <a:solidFill>
                   <a:srgbClr val="5C3A28"/>
                 </a:solidFill>
@@ -14133,7 +14138,7 @@
               </a:rPr>
               <a:t>The lyres and harps from Ur (ca. 2500 BCE) are among the earliest surviving plucked string instruments.</a:t>
             </a:r>
-            <a:endParaRPr lang="en-US" sz="1050" dirty="0"/>
+            <a:endParaRPr lang="en-US" sz="1400" dirty="0"/>
           </a:p>
         </p:txBody>
       </p:sp>
@@ -14410,7 +14415,7 @@
               <a:buNone/>
             </a:pPr>
             <a:r>
-              <a:rPr lang="en-US" sz="1300" b="1" dirty="0">
+              <a:rPr lang="en-US" sz="1400" b="1" dirty="0">
                 <a:solidFill>
                   <a:srgbClr val="C8A020"/>
                 </a:solidFill>
@@ -14420,7 +14425,7 @@
               </a:rPr>
               <a:t>⏱ 年代  </a:t>
             </a:r>
-            <a:endParaRPr lang="en-US" sz="1300" dirty="0"/>
+            <a:endParaRPr lang="en-US" sz="1400" dirty="0"/>
           </a:p>
         </p:txBody>
       </p:sp>
@@ -14442,14 +14447,14 @@
           <a:ln/>
         </p:spPr>
         <p:txBody>
-          <a:bodyPr wrap="square" lIns="0" tIns="0" rIns="0" bIns="0" rtlCol="0" anchor="ctr"/>
+          <a:bodyPr wrap="square" lIns="0" tIns="0" rIns="0" bIns="0" rtlCol="0" anchor="t"/>
           <a:lstStyle/>
           <a:p>
             <a:pPr indent="0" marL="0">
               <a:buNone/>
             </a:pPr>
             <a:r>
-              <a:rPr lang="en-US" sz="1300" dirty="0">
+              <a:rPr lang="en-US" sz="1400" dirty="0">
                 <a:solidFill>
                   <a:srgbClr val="E8D8A8"/>
                 </a:solidFill>
@@ -14459,7 +14464,7 @@
               </a:rPr>
               <a:t>活躍於 ca. 2300 BCE</a:t>
             </a:r>
-            <a:endParaRPr lang="en-US" sz="1300" dirty="0"/>
+            <a:endParaRPr lang="en-US" sz="1400" dirty="0"/>
           </a:p>
         </p:txBody>
       </p:sp>
@@ -14488,7 +14493,7 @@
               <a:buNone/>
             </a:pPr>
             <a:r>
-              <a:rPr lang="en-US" sz="1300" b="1" dirty="0">
+              <a:rPr lang="en-US" sz="1400" b="1" dirty="0">
                 <a:solidFill>
                   <a:srgbClr val="C8A020"/>
                 </a:solidFill>
@@ -14496,9 +14501,9 @@
                 <a:ea typeface="Georgia" pitchFamily="34" charset="-122"/>
                 <a:cs typeface="Georgia" pitchFamily="34" charset="-120"/>
               </a:rPr>
-              <a:t>👩‍⚕️ 身份  </a:t>
-            </a:r>
-            <a:endParaRPr lang="en-US" sz="1300" dirty="0"/>
+              <a:t>■‍■ 身份  </a:t>
+            </a:r>
+            <a:endParaRPr lang="en-US" sz="1400" dirty="0"/>
           </a:p>
         </p:txBody>
       </p:sp>
@@ -14520,14 +14525,14 @@
           <a:ln/>
         </p:spPr>
         <p:txBody>
-          <a:bodyPr wrap="square" lIns="0" tIns="0" rIns="0" bIns="0" rtlCol="0" anchor="ctr"/>
+          <a:bodyPr wrap="square" lIns="0" tIns="0" rIns="0" bIns="0" rtlCol="0" anchor="t"/>
           <a:lstStyle/>
           <a:p>
             <a:pPr indent="0" marL="0">
               <a:buNone/>
             </a:pPr>
             <a:r>
-              <a:rPr lang="en-US" sz="1300" dirty="0">
+              <a:rPr lang="en-US" sz="1400" dirty="0">
                 <a:solidFill>
                   <a:srgbClr val="E8D8A8"/>
                 </a:solidFill>
@@ -14537,7 +14542,7 @@
               </a:rPr>
               <a:t>阿卡德族（Akkadian）月神南納（Nanna）的女大祭司，任職於烏爾</a:t>
             </a:r>
-            <a:endParaRPr lang="en-US" sz="1300" dirty="0"/>
+            <a:endParaRPr lang="en-US" sz="1400" dirty="0"/>
           </a:p>
         </p:txBody>
       </p:sp>
@@ -14566,7 +14571,7 @@
               <a:buNone/>
             </a:pPr>
             <a:r>
-              <a:rPr lang="en-US" sz="1300" b="1" dirty="0">
+              <a:rPr lang="en-US" sz="1400" b="1" dirty="0">
                 <a:solidFill>
                   <a:srgbClr val="C8A020"/>
                 </a:solidFill>
@@ -14574,9 +14579,9 @@
                 <a:ea typeface="Georgia" pitchFamily="34" charset="-122"/>
                 <a:cs typeface="Georgia" pitchFamily="34" charset="-120"/>
               </a:rPr>
-              <a:t>🎵 作品  </a:t>
-            </a:r>
-            <a:endParaRPr lang="en-US" sz="1300" dirty="0"/>
+              <a:t>■ 作品  </a:t>
+            </a:r>
+            <a:endParaRPr lang="en-US" sz="1400" dirty="0"/>
           </a:p>
         </p:txBody>
       </p:sp>
@@ -14598,14 +14603,14 @@
           <a:ln/>
         </p:spPr>
         <p:txBody>
-          <a:bodyPr wrap="square" lIns="0" tIns="0" rIns="0" bIns="0" rtlCol="0" anchor="ctr"/>
+          <a:bodyPr wrap="square" lIns="0" tIns="0" rIns="0" bIns="0" rtlCol="0" anchor="t"/>
           <a:lstStyle/>
           <a:p>
             <a:pPr indent="0" marL="0">
               <a:buNone/>
             </a:pPr>
             <a:r>
-              <a:rPr lang="en-US" sz="1300" dirty="0">
+              <a:rPr lang="en-US" sz="1400" dirty="0">
                 <a:solidFill>
                   <a:srgbClr val="E8D8A8"/>
                 </a:solidFill>
@@ -14615,7 +14620,7 @@
               </a:rPr>
               <a:t>為月神南納與女神伊南娜（Inanna）創作讚美詩（hymns）</a:t>
             </a:r>
-            <a:endParaRPr lang="en-US" sz="1300" dirty="0"/>
+            <a:endParaRPr lang="en-US" sz="1400" dirty="0"/>
           </a:p>
         </p:txBody>
       </p:sp>
@@ -14644,7 +14649,7 @@
               <a:buNone/>
             </a:pPr>
             <a:r>
-              <a:rPr lang="en-US" sz="1300" b="1" dirty="0">
+              <a:rPr lang="en-US" sz="1400" b="1" dirty="0">
                 <a:solidFill>
                   <a:srgbClr val="C8A020"/>
                 </a:solidFill>
@@ -14652,9 +14657,9 @@
                 <a:ea typeface="Georgia" pitchFamily="34" charset="-122"/>
                 <a:cs typeface="Georgia" pitchFamily="34" charset="-120"/>
               </a:rPr>
-              <a:t>📜 現存  </a:t>
-            </a:r>
-            <a:endParaRPr lang="en-US" sz="1300" dirty="0"/>
+              <a:t>■ 現存  </a:t>
+            </a:r>
+            <a:endParaRPr lang="en-US" sz="1400" dirty="0"/>
           </a:p>
         </p:txBody>
       </p:sp>
@@ -14676,14 +14681,14 @@
           <a:ln/>
         </p:spPr>
         <p:txBody>
-          <a:bodyPr wrap="square" lIns="0" tIns="0" rIns="0" bIns="0" rtlCol="0" anchor="ctr"/>
+          <a:bodyPr wrap="square" lIns="0" tIns="0" rIns="0" bIns="0" rtlCol="0" anchor="t"/>
           <a:lstStyle/>
           <a:p>
             <a:pPr indent="0" marL="0">
               <a:buNone/>
             </a:pPr>
             <a:r>
-              <a:rPr lang="en-US" sz="1300" dirty="0">
+              <a:rPr lang="en-US" sz="1400" dirty="0">
                 <a:solidFill>
                   <a:srgbClr val="E8D8A8"/>
                 </a:solidFill>
@@ -14693,7 +14698,7 @@
               </a:rPr>
               <a:t>歌詞刻於楔形文字泥板上保存——但音樂本身未傳下來</a:t>
             </a:r>
-            <a:endParaRPr lang="en-US" sz="1300" dirty="0"/>
+            <a:endParaRPr lang="en-US" sz="1400" dirty="0"/>
           </a:p>
         </p:txBody>
       </p:sp>
@@ -14722,7 +14727,7 @@
               <a:buNone/>
             </a:pPr>
             <a:r>
-              <a:rPr lang="en-US" sz="1300" b="1" dirty="0">
+              <a:rPr lang="en-US" sz="1400" b="1" dirty="0">
                 <a:solidFill>
                   <a:srgbClr val="C8A020"/>
                 </a:solidFill>
@@ -14730,9 +14735,9 @@
                 <a:ea typeface="Georgia" pitchFamily="34" charset="-122"/>
                 <a:cs typeface="Georgia" pitchFamily="34" charset="-120"/>
               </a:rPr>
-              <a:t>🌟 意義  </a:t>
-            </a:r>
-            <a:endParaRPr lang="en-US" sz="1300" dirty="0"/>
+              <a:t>■ 意義  </a:t>
+            </a:r>
+            <a:endParaRPr lang="en-US" sz="1400" dirty="0"/>
           </a:p>
         </p:txBody>
       </p:sp>
@@ -14754,14 +14759,14 @@
           <a:ln/>
         </p:spPr>
         <p:txBody>
-          <a:bodyPr wrap="square" lIns="0" tIns="0" rIns="0" bIns="0" rtlCol="0" anchor="ctr"/>
+          <a:bodyPr wrap="square" lIns="0" tIns="0" rIns="0" bIns="0" rtlCol="0" anchor="t"/>
           <a:lstStyle/>
           <a:p>
             <a:pPr indent="0" marL="0">
               <a:buNone/>
             </a:pPr>
             <a:r>
-              <a:rPr lang="en-US" sz="1300" dirty="0">
+              <a:rPr lang="en-US" sz="1400" dirty="0">
                 <a:solidFill>
                   <a:srgbClr val="E8D8A8"/>
                 </a:solidFill>
@@ -14771,7 +14776,7 @@
               </a:rPr>
               <a:t>比古埃及、希臘的已知作曲家早了一千多年</a:t>
             </a:r>
-            <a:endParaRPr lang="en-US" sz="1300" dirty="0"/>
+            <a:endParaRPr lang="en-US" sz="1400" dirty="0"/>
           </a:p>
         </p:txBody>
       </p:sp>
@@ -14978,7 +14983,7 @@
                 <a:ea typeface="Georgia" pitchFamily="34" charset="-122"/>
                 <a:cs typeface="Georgia" pitchFamily="34" charset="-120"/>
               </a:rPr>
-              <a:t>🏺 胡利安頌歌 Hurrian Hymn (H.6)</a:t>
+              <a:t>■ 胡利安頌歌 Hurrian Hymn (H.6)</a:t>
             </a:r>
             <a:endParaRPr lang="en-US" sz="1600" dirty="0"/>
           </a:p>
@@ -15012,7 +15017,7 @@
               <a:buNone/>
             </a:pPr>
             <a:r>
-              <a:rPr lang="en-US" sz="1200" dirty="0">
+              <a:rPr lang="en-US" sz="1400" dirty="0">
                 <a:solidFill>
                   <a:srgbClr val="2C1810"/>
                 </a:solidFill>
@@ -15022,7 +15027,7 @@
               </a:rPr>
               <a:t>• 年代 Date: ca. 1400–1250 BCE</a:t>
             </a:r>
-            <a:endParaRPr lang="en-US" sz="1200" dirty="0"/>
+            <a:endParaRPr lang="en-US" sz="1400" dirty="0"/>
           </a:p>
           <a:p>
             <a:pPr indent="0" marL="0">
@@ -15032,7 +15037,7 @@
               <a:buNone/>
             </a:pPr>
             <a:r>
-              <a:rPr lang="en-US" sz="1200" dirty="0">
+              <a:rPr lang="en-US" sz="1400" dirty="0">
                 <a:solidFill>
                   <a:srgbClr val="2C1810"/>
                 </a:solidFill>
@@ -15042,7 +15047,7 @@
               </a:rPr>
               <a:t>• 出土地 Found: Ugarit（敘利亞沿岸商業城邦）</a:t>
             </a:r>
-            <a:endParaRPr lang="en-US" sz="1200" dirty="0"/>
+            <a:endParaRPr lang="en-US" sz="1400" dirty="0"/>
           </a:p>
           <a:p>
             <a:pPr indent="0" marL="0">
@@ -15052,7 +15057,7 @@
               <a:buNone/>
             </a:pPr>
             <a:r>
-              <a:rPr lang="en-US" sz="1200" dirty="0">
+              <a:rPr lang="en-US" sz="1400" dirty="0">
                 <a:solidFill>
                   <a:srgbClr val="2C1810"/>
                 </a:solidFill>
@@ -15062,7 +15067,7 @@
               </a:rPr>
               <a:t>• 載體 Medium: 楔形文字泥板（Clay tablet）</a:t>
             </a:r>
-            <a:endParaRPr lang="en-US" sz="1200" dirty="0"/>
+            <a:endParaRPr lang="en-US" sz="1400" dirty="0"/>
           </a:p>
           <a:p>
             <a:pPr indent="0" marL="0">
@@ -15072,7 +15077,7 @@
               <a:buNone/>
             </a:pPr>
             <a:r>
-              <a:rPr lang="en-US" sz="1200" dirty="0">
+              <a:rPr lang="en-US" sz="1400" dirty="0">
                 <a:solidFill>
                   <a:srgbClr val="2C1810"/>
                 </a:solidFill>
@@ -15082,7 +15087,7 @@
               </a:rPr>
               <a:t>• 內容 Content: 獻給月神妻子尼卡爾（Nikkal）的讚美詩</a:t>
             </a:r>
-            <a:endParaRPr lang="en-US" sz="1200" dirty="0"/>
+            <a:endParaRPr lang="en-US" sz="1400" dirty="0"/>
           </a:p>
           <a:p>
             <a:pPr indent="0" marL="0">
@@ -15092,7 +15097,7 @@
               <a:buNone/>
             </a:pPr>
             <a:r>
-              <a:rPr lang="en-US" sz="1200" dirty="0">
+              <a:rPr lang="en-US" sz="1400" dirty="0">
                 <a:solidFill>
                   <a:srgbClr val="2C1810"/>
                 </a:solidFill>
@@ -15102,7 +15107,7 @@
               </a:rPr>
               <a:t>• 現存最古老、近乎完整的記譜實例</a:t>
             </a:r>
-            <a:endParaRPr lang="en-US" sz="1200" dirty="0"/>
+            <a:endParaRPr lang="en-US" sz="1400" dirty="0"/>
           </a:p>
           <a:p>
             <a:pPr indent="0" marL="0">
@@ -15112,7 +15117,7 @@
               <a:buNone/>
             </a:pPr>
             <a:r>
-              <a:rPr lang="en-US" sz="1200" dirty="0">
+              <a:rPr lang="en-US" sz="1400" dirty="0">
                 <a:solidFill>
                   <a:srgbClr val="2C1810"/>
                 </a:solidFill>
@@ -15122,7 +15127,7 @@
               </a:rPr>
               <a:t>  Oldest nearly complete piece with musical notation</a:t>
             </a:r>
-            <a:endParaRPr lang="en-US" sz="1200" dirty="0"/>
+            <a:endParaRPr lang="en-US" sz="1400" dirty="0"/>
           </a:p>
           <a:p>
             <a:pPr indent="0" marL="0">
@@ -15132,7 +15137,7 @@
               <a:buNone/>
             </a:pPr>
             <a:r>
-              <a:rPr lang="en-US" sz="1200" dirty="0">
+              <a:rPr lang="en-US" sz="1400" dirty="0">
                 <a:solidFill>
                   <a:srgbClr val="2C1810"/>
                 </a:solidFill>
@@ -15142,7 +15147,7 @@
               </a:rPr>
               <a:t>• 記譜法至今仍難以完全破解</a:t>
             </a:r>
-            <a:endParaRPr lang="en-US" sz="1200" dirty="0"/>
+            <a:endParaRPr lang="en-US" sz="1400" dirty="0"/>
           </a:p>
           <a:p>
             <a:pPr indent="0" marL="0">
@@ -15152,7 +15157,7 @@
               <a:buNone/>
             </a:pPr>
             <a:r>
-              <a:rPr lang="en-US" sz="1200" dirty="0">
+              <a:rPr lang="en-US" sz="1400" dirty="0">
                 <a:solidFill>
                   <a:srgbClr val="2C1810"/>
                 </a:solidFill>
@@ -15162,7 +15167,7 @@
               </a:rPr>
               <a:t>  Notation too poorly understood to read with certainty</a:t>
             </a:r>
-            <a:endParaRPr lang="en-US" sz="1200" dirty="0"/>
+            <a:endParaRPr lang="en-US" sz="1400" dirty="0"/>
           </a:p>
           <a:p>
             <a:pPr indent="0" marL="0">
@@ -15172,7 +15177,7 @@
               <a:buNone/>
             </a:pPr>
             <a:r>
-              <a:rPr lang="en-US" sz="1200" dirty="0">
+              <a:rPr lang="en-US" sz="1400" dirty="0">
                 <a:solidFill>
                   <a:srgbClr val="2C1810"/>
                 </a:solidFill>
@@ -15182,7 +15187,7 @@
               </a:rPr>
               <a:t>• 當時音樂家可能不靠記譜演奏，而用它如食譜重建旋律</a:t>
             </a:r>
-            <a:endParaRPr lang="en-US" sz="1200" dirty="0"/>
+            <a:endParaRPr lang="en-US" sz="1400" dirty="0"/>
           </a:p>
           <a:p>
             <a:pPr indent="0" marL="0">
@@ -15192,7 +15197,7 @@
               <a:buNone/>
             </a:pPr>
             <a:r>
-              <a:rPr lang="en-US" sz="1200" dirty="0">
+              <a:rPr lang="en-US" sz="1400" dirty="0">
                 <a:solidFill>
                   <a:srgbClr val="2C1810"/>
                 </a:solidFill>
@@ -15202,7 +15207,7 @@
               </a:rPr>
               <a:t>  Used as recipe to reconstruct melody, not for live reading</a:t>
             </a:r>
-            <a:endParaRPr lang="en-US" sz="1200" dirty="0"/>
+            <a:endParaRPr lang="en-US" sz="1400" dirty="0"/>
           </a:p>
         </p:txBody>
       </p:sp>
@@ -15259,7 +15264,7 @@
                 <a:ea typeface="Georgia" pitchFamily="34" charset="-122"/>
                 <a:cs typeface="Georgia" pitchFamily="34" charset="-120"/>
               </a:rPr>
-              <a:t>🏛 Seikilos 墓誌銘</a:t>
+              <a:t>■ Seikilos 墓誌銘</a:t>
             </a:r>
             <a:endParaRPr lang="en-US" sz="1400" dirty="0"/>
           </a:p>
@@ -15300,14 +15305,14 @@
           <a:ln/>
         </p:spPr>
         <p:txBody>
-          <a:bodyPr wrap="square" rtlCol="0" anchor="ctr"/>
+          <a:bodyPr wrap="square" rtlCol="0" anchor="t"/>
           <a:lstStyle/>
           <a:p>
             <a:pPr indent="0" marL="0">
               <a:buNone/>
             </a:pPr>
             <a:r>
-              <a:rPr lang="en-US" sz="1150" b="1" dirty="0">
+              <a:rPr lang="en-US" sz="1400" b="1" dirty="0">
                 <a:solidFill>
                   <a:srgbClr val="FBF5E6"/>
                 </a:solidFill>
@@ -15322,7 +15327,7 @@
               <a:buNone/>
             </a:pPr>
             <a:r>
-              <a:rPr lang="en-US" sz="1150" dirty="0">
+              <a:rPr lang="en-US" sz="1400" dirty="0">
                 <a:solidFill>
                   <a:srgbClr val="FBF5E6"/>
                 </a:solidFill>
@@ -15337,7 +15342,7 @@
               <a:buNone/>
             </a:pPr>
             <a:r>
-              <a:rPr lang="en-US" sz="1150" dirty="0">
+              <a:rPr lang="en-US" sz="1400" dirty="0">
                 <a:solidFill>
                   <a:srgbClr val="FBF5E6"/>
                 </a:solidFill>
@@ -15352,7 +15357,7 @@
               <a:buNone/>
             </a:pPr>
             <a:r>
-              <a:rPr lang="en-US" sz="1150" b="1" dirty="0">
+              <a:rPr lang="en-US" sz="1400" b="1" dirty="0">
                 <a:solidFill>
                   <a:srgbClr val="C8A020"/>
                 </a:solidFill>
@@ -15367,7 +15372,7 @@
               <a:buNone/>
             </a:pPr>
             <a:r>
-              <a:rPr lang="en-US" sz="1150" i="1" dirty="0">
+              <a:rPr lang="en-US" sz="1400" i="1" dirty="0">
                 <a:solidFill>
                   <a:srgbClr val="FBF5E6"/>
                 </a:solidFill>
@@ -15382,7 +15387,7 @@
               <a:buNone/>
             </a:pPr>
             <a:r>
-              <a:rPr lang="en-US" sz="1150" b="1" dirty="0">
+              <a:rPr lang="en-US" sz="1400" b="1" dirty="0">
                 <a:solidFill>
                   <a:srgbClr val="FBF5E6"/>
                 </a:solidFill>
@@ -15397,7 +15402,7 @@
               <a:buNone/>
             </a:pPr>
             <a:r>
-              <a:rPr lang="en-US" sz="1150" dirty="0">
+              <a:rPr lang="en-US" sz="1400" dirty="0">
                 <a:solidFill>
                   <a:srgbClr val="FBF5E6"/>
                 </a:solidFill>
@@ -15407,20 +15412,20 @@
               </a:rPr>
               <a:t>「趁著活著，閃耀吧；別讓任何事令你憂愁」</a:t>
             </a:r>
-            <a:endParaRPr lang="en-US" sz="1150" dirty="0"/>
+            <a:endParaRPr lang="en-US" sz="1400" dirty="0"/>
           </a:p>
           <a:p>
             <a:pPr indent="0" marL="0">
               <a:buNone/>
             </a:pPr>
-            <a:endParaRPr lang="en-US" sz="1150" dirty="0"/>
+            <a:endParaRPr lang="en-US" sz="1400" dirty="0"/>
           </a:p>
           <a:p>
             <a:pPr indent="0" marL="0">
               <a:buNone/>
             </a:pPr>
             <a:r>
-              <a:rPr lang="en-US" sz="1150" dirty="0">
+              <a:rPr lang="en-US" sz="1400" dirty="0">
                 <a:solidFill>
                   <a:srgbClr val="FBF5E6"/>
                 </a:solidFill>
@@ -15430,7 +15435,7 @@
               </a:rPr>
               <a:t>While you live, shine; let nothing grieve you.</a:t>
             </a:r>
-            <a:endParaRPr lang="en-US" sz="1150" dirty="0"/>
+            <a:endParaRPr lang="en-US" sz="1400" dirty="0"/>
           </a:p>
         </p:txBody>
       </p:sp>
@@ -15603,14 +15608,14 @@
           <a:ln/>
         </p:spPr>
         <p:txBody>
-          <a:bodyPr wrap="square" lIns="0" tIns="0" rIns="0" bIns="0" rtlCol="0" anchor="ctr"/>
+          <a:bodyPr wrap="square" lIns="0" tIns="0" rIns="0" bIns="0" rtlCol="0" anchor="t"/>
           <a:lstStyle/>
           <a:p>
             <a:pPr algn="r" indent="0" marL="0">
               <a:buNone/>
             </a:pPr>
             <a:r>
-              <a:rPr lang="en-US" sz="1000" dirty="0">
+              <a:rPr lang="en-US" sz="1400" dirty="0">
                 <a:solidFill>
                   <a:srgbClr val="E8D8A8"/>
                 </a:solidFill>
@@ -15620,7 +15625,7 @@
               </a:rPr>
               <a:t>ca. 3500–3000 BCE</a:t>
             </a:r>
-            <a:endParaRPr lang="en-US" sz="1000" dirty="0"/>
+            <a:endParaRPr lang="en-US" sz="1400" dirty="0"/>
           </a:p>
         </p:txBody>
       </p:sp>
@@ -15642,14 +15647,14 @@
           <a:ln/>
         </p:spPr>
         <p:txBody>
-          <a:bodyPr wrap="square" lIns="0" tIns="0" rIns="0" bIns="0" rtlCol="0" anchor="ctr"/>
+          <a:bodyPr wrap="square" lIns="0" tIns="0" rIns="0" bIns="0" rtlCol="0" anchor="t"/>
           <a:lstStyle/>
           <a:p>
             <a:pPr indent="0" marL="0">
               <a:buNone/>
             </a:pPr>
             <a:r>
-              <a:rPr lang="en-US" sz="1050" dirty="0">
+              <a:rPr lang="en-US" sz="1400" dirty="0">
                 <a:solidFill>
                   <a:srgbClr val="FBF5E6"/>
                 </a:solidFill>
@@ -15659,7 +15664,7 @@
               </a:rPr>
               <a:t>蘇美城市興起 Rise of Sumerian cities</a:t>
             </a:r>
-            <a:endParaRPr lang="en-US" sz="1050" dirty="0"/>
+            <a:endParaRPr lang="en-US" sz="1400" dirty="0"/>
           </a:p>
         </p:txBody>
       </p:sp>
@@ -15701,14 +15706,14 @@
           <a:ln/>
         </p:spPr>
         <p:txBody>
-          <a:bodyPr wrap="square" lIns="0" tIns="0" rIns="0" bIns="0" rtlCol="0" anchor="ctr"/>
+          <a:bodyPr wrap="square" lIns="0" tIns="0" rIns="0" bIns="0" rtlCol="0" anchor="t"/>
           <a:lstStyle/>
           <a:p>
             <a:pPr algn="r" indent="0" marL="0">
               <a:buNone/>
             </a:pPr>
             <a:r>
-              <a:rPr lang="en-US" sz="1000" dirty="0">
+              <a:rPr lang="en-US" sz="1400" dirty="0">
                 <a:solidFill>
                   <a:srgbClr val="E8D8A8"/>
                 </a:solidFill>
@@ -15718,7 +15723,7 @@
               </a:rPr>
               <a:t>ca. 3100 BCE</a:t>
             </a:r>
-            <a:endParaRPr lang="en-US" sz="1000" dirty="0"/>
+            <a:endParaRPr lang="en-US" sz="1400" dirty="0"/>
           </a:p>
         </p:txBody>
       </p:sp>
@@ -15740,14 +15745,14 @@
           <a:ln/>
         </p:spPr>
         <p:txBody>
-          <a:bodyPr wrap="square" lIns="0" tIns="0" rIns="0" bIns="0" rtlCol="0" anchor="ctr"/>
+          <a:bodyPr wrap="square" lIns="0" tIns="0" rIns="0" bIns="0" rtlCol="0" anchor="t"/>
           <a:lstStyle/>
           <a:p>
             <a:pPr indent="0" marL="0">
               <a:buNone/>
             </a:pPr>
             <a:r>
-              <a:rPr lang="en-US" sz="1050" dirty="0">
+              <a:rPr lang="en-US" sz="1400" dirty="0">
                 <a:solidFill>
                   <a:srgbClr val="FBF5E6"/>
                 </a:solidFill>
@@ -15757,7 +15762,7 @@
               </a:rPr>
               <a:t>楔形文字建立 Cuneiform writing established</a:t>
             </a:r>
-            <a:endParaRPr lang="en-US" sz="1050" dirty="0"/>
+            <a:endParaRPr lang="en-US" sz="1400" dirty="0"/>
           </a:p>
         </p:txBody>
       </p:sp>
@@ -15799,14 +15804,14 @@
           <a:ln/>
         </p:spPr>
         <p:txBody>
-          <a:bodyPr wrap="square" lIns="0" tIns="0" rIns="0" bIns="0" rtlCol="0" anchor="ctr"/>
+          <a:bodyPr wrap="square" lIns="0" tIns="0" rIns="0" bIns="0" rtlCol="0" anchor="t"/>
           <a:lstStyle/>
           <a:p>
             <a:pPr algn="r" indent="0" marL="0">
               <a:buNone/>
             </a:pPr>
             <a:r>
-              <a:rPr lang="en-US" sz="1000" dirty="0">
+              <a:rPr lang="en-US" sz="1400" dirty="0">
                 <a:solidFill>
                   <a:srgbClr val="E8D8A8"/>
                 </a:solidFill>
@@ -15816,7 +15821,7 @@
               </a:rPr>
               <a:t>ca. 2500 BCE</a:t>
             </a:r>
-            <a:endParaRPr lang="en-US" sz="1000" dirty="0"/>
+            <a:endParaRPr lang="en-US" sz="1400" dirty="0"/>
           </a:p>
         </p:txBody>
       </p:sp>
@@ -15838,14 +15843,14 @@
           <a:ln/>
         </p:spPr>
         <p:txBody>
-          <a:bodyPr wrap="square" lIns="0" tIns="0" rIns="0" bIns="0" rtlCol="0" anchor="ctr"/>
+          <a:bodyPr wrap="square" lIns="0" tIns="0" rIns="0" bIns="0" rtlCol="0" anchor="t"/>
           <a:lstStyle/>
           <a:p>
             <a:pPr indent="0" marL="0">
               <a:buNone/>
             </a:pPr>
             <a:r>
-              <a:rPr lang="en-US" sz="1050" dirty="0">
+              <a:rPr lang="en-US" sz="1400" dirty="0">
                 <a:solidFill>
                   <a:srgbClr val="FBF5E6"/>
                 </a:solidFill>
@@ -15855,7 +15860,7 @@
               </a:rPr>
               <a:t>烏爾皇家陵墓出土豎琴 Royal Tombs at Ur — lyres &amp; harps</a:t>
             </a:r>
-            <a:endParaRPr lang="en-US" sz="1050" dirty="0"/>
+            <a:endParaRPr lang="en-US" sz="1400" dirty="0"/>
           </a:p>
         </p:txBody>
       </p:sp>
@@ -15897,14 +15902,14 @@
           <a:ln/>
         </p:spPr>
         <p:txBody>
-          <a:bodyPr wrap="square" lIns="0" tIns="0" rIns="0" bIns="0" rtlCol="0" anchor="ctr"/>
+          <a:bodyPr wrap="square" lIns="0" tIns="0" rIns="0" bIns="0" rtlCol="0" anchor="t"/>
           <a:lstStyle/>
           <a:p>
             <a:pPr algn="r" indent="0" marL="0">
               <a:buNone/>
             </a:pPr>
             <a:r>
-              <a:rPr lang="en-US" sz="1000" dirty="0">
+              <a:rPr lang="en-US" sz="1400" dirty="0">
                 <a:solidFill>
                   <a:srgbClr val="E8D8A8"/>
                 </a:solidFill>
@@ -15914,7 +15919,7 @@
               </a:rPr>
               <a:t>ca. 2300 BCE</a:t>
             </a:r>
-            <a:endParaRPr lang="en-US" sz="1000" dirty="0"/>
+            <a:endParaRPr lang="en-US" sz="1400" dirty="0"/>
           </a:p>
         </p:txBody>
       </p:sp>
@@ -15936,14 +15941,14 @@
           <a:ln/>
         </p:spPr>
         <p:txBody>
-          <a:bodyPr wrap="square" lIns="0" tIns="0" rIns="0" bIns="0" rtlCol="0" anchor="ctr"/>
+          <a:bodyPr wrap="square" lIns="0" tIns="0" rIns="0" bIns="0" rtlCol="0" anchor="t"/>
           <a:lstStyle/>
           <a:p>
             <a:pPr indent="0" marL="0">
               <a:buNone/>
             </a:pPr>
             <a:r>
-              <a:rPr lang="en-US" sz="1050" dirty="0">
+              <a:rPr lang="en-US" sz="1400" dirty="0">
                 <a:solidFill>
                   <a:srgbClr val="FBF5E6"/>
                 </a:solidFill>
@@ -15953,7 +15958,7 @@
               </a:rPr>
               <a:t>恩赫杜安納作曲 Enheduanna composes hymns</a:t>
             </a:r>
-            <a:endParaRPr lang="en-US" sz="1050" dirty="0"/>
+            <a:endParaRPr lang="en-US" sz="1400" dirty="0"/>
           </a:p>
         </p:txBody>
       </p:sp>
@@ -15995,14 +16000,14 @@
           <a:ln/>
         </p:spPr>
         <p:txBody>
-          <a:bodyPr wrap="square" lIns="0" tIns="0" rIns="0" bIns="0" rtlCol="0" anchor="ctr"/>
+          <a:bodyPr wrap="square" lIns="0" tIns="0" rIns="0" bIns="0" rtlCol="0" anchor="t"/>
           <a:lstStyle/>
           <a:p>
             <a:pPr algn="r" indent="0" marL="0">
               <a:buNone/>
             </a:pPr>
             <a:r>
-              <a:rPr lang="en-US" sz="1000" dirty="0">
+              <a:rPr lang="en-US" sz="1400" dirty="0">
                 <a:solidFill>
                   <a:srgbClr val="E8D8A8"/>
                 </a:solidFill>
@@ -16012,7 +16017,7 @@
               </a:rPr>
               <a:t>ca. 1800 BCE</a:t>
             </a:r>
-            <a:endParaRPr lang="en-US" sz="1000" dirty="0"/>
+            <a:endParaRPr lang="en-US" sz="1400" dirty="0"/>
           </a:p>
         </p:txBody>
       </p:sp>
@@ -16034,14 +16039,14 @@
           <a:ln/>
         </p:spPr>
         <p:txBody>
-          <a:bodyPr wrap="square" lIns="0" tIns="0" rIns="0" bIns="0" rtlCol="0" anchor="ctr"/>
+          <a:bodyPr wrap="square" lIns="0" tIns="0" rIns="0" bIns="0" rtlCol="0" anchor="t"/>
           <a:lstStyle/>
           <a:p>
             <a:pPr indent="0" marL="0">
               <a:buNone/>
             </a:pPr>
             <a:r>
-              <a:rPr lang="en-US" sz="1050" dirty="0">
+              <a:rPr lang="en-US" sz="1400" dirty="0">
                 <a:solidFill>
                   <a:srgbClr val="FBF5E6"/>
                 </a:solidFill>
@@ -16051,7 +16056,7 @@
               </a:rPr>
               <a:t>巴比倫音樂理論著作 Babylonian writings about music</a:t>
             </a:r>
-            <a:endParaRPr lang="en-US" sz="1050" dirty="0"/>
+            <a:endParaRPr lang="en-US" sz="1400" dirty="0"/>
           </a:p>
         </p:txBody>
       </p:sp>
@@ -16093,14 +16098,14 @@
           <a:ln/>
         </p:spPr>
         <p:txBody>
-          <a:bodyPr wrap="square" lIns="0" tIns="0" rIns="0" bIns="0" rtlCol="0" anchor="ctr"/>
+          <a:bodyPr wrap="square" lIns="0" tIns="0" rIns="0" bIns="0" rtlCol="0" anchor="t"/>
           <a:lstStyle/>
           <a:p>
             <a:pPr algn="r" indent="0" marL="0">
               <a:buNone/>
             </a:pPr>
             <a:r>
-              <a:rPr lang="en-US" sz="1000" dirty="0">
+              <a:rPr lang="en-US" sz="1400" dirty="0">
                 <a:solidFill>
                   <a:srgbClr val="E8D8A8"/>
                 </a:solidFill>
@@ -16110,7 +16115,7 @@
               </a:rPr>
               <a:t>ca. 1400–1250 BCE</a:t>
             </a:r>
-            <a:endParaRPr lang="en-US" sz="1000" dirty="0"/>
+            <a:endParaRPr lang="en-US" sz="1400" dirty="0"/>
           </a:p>
         </p:txBody>
       </p:sp>
@@ -16132,14 +16137,14 @@
           <a:ln/>
         </p:spPr>
         <p:txBody>
-          <a:bodyPr wrap="square" lIns="0" tIns="0" rIns="0" bIns="0" rtlCol="0" anchor="ctr"/>
+          <a:bodyPr wrap="square" lIns="0" tIns="0" rIns="0" bIns="0" rtlCol="0" anchor="t"/>
           <a:lstStyle/>
           <a:p>
             <a:pPr indent="0" marL="0">
               <a:buNone/>
             </a:pPr>
             <a:r>
-              <a:rPr lang="en-US" sz="1050" dirty="0">
+              <a:rPr lang="en-US" sz="1400" dirty="0">
                 <a:solidFill>
                   <a:srgbClr val="FBF5E6"/>
                 </a:solidFill>
@@ -16149,7 +16154,7 @@
               </a:rPr>
               <a:t>最古老近乎完整的樂譜 Oldest nearly complete notation (Ugarit)</a:t>
             </a:r>
-            <a:endParaRPr lang="en-US" sz="1050" dirty="0"/>
+            <a:endParaRPr lang="en-US" sz="1400" dirty="0"/>
           </a:p>
         </p:txBody>
       </p:sp>
@@ -16191,14 +16196,14 @@
           <a:ln/>
         </p:spPr>
         <p:txBody>
-          <a:bodyPr wrap="square" lIns="0" tIns="0" rIns="0" bIns="0" rtlCol="0" anchor="ctr"/>
+          <a:bodyPr wrap="square" lIns="0" tIns="0" rIns="0" bIns="0" rtlCol="0" anchor="t"/>
           <a:lstStyle/>
           <a:p>
             <a:pPr algn="r" indent="0" marL="0">
               <a:buNone/>
             </a:pPr>
             <a:r>
-              <a:rPr lang="en-US" sz="1000" dirty="0">
+              <a:rPr lang="en-US" sz="1400" dirty="0">
                 <a:solidFill>
                   <a:srgbClr val="E8D8A8"/>
                 </a:solidFill>
@@ -16208,7 +16213,7 @@
               </a:rPr>
               <a:t>ca. 800 BCE</a:t>
             </a:r>
-            <a:endParaRPr lang="en-US" sz="1000" dirty="0"/>
+            <a:endParaRPr lang="en-US" sz="1400" dirty="0"/>
           </a:p>
         </p:txBody>
       </p:sp>
@@ -16230,14 +16235,14 @@
           <a:ln/>
         </p:spPr>
         <p:txBody>
-          <a:bodyPr wrap="square" lIns="0" tIns="0" rIns="0" bIns="0" rtlCol="0" anchor="ctr"/>
+          <a:bodyPr wrap="square" lIns="0" tIns="0" rIns="0" bIns="0" rtlCol="0" anchor="t"/>
           <a:lstStyle/>
           <a:p>
             <a:pPr indent="0" marL="0">
               <a:buNone/>
             </a:pPr>
             <a:r>
-              <a:rPr lang="en-US" sz="1050" dirty="0">
+              <a:rPr lang="en-US" sz="1400" dirty="0">
                 <a:solidFill>
                   <a:srgbClr val="FBF5E6"/>
                 </a:solidFill>
@@ -16247,7 +16252,7 @@
               </a:rPr>
               <a:t>希臘城邦興起 Rise of Greek city-states; Homer</a:t>
             </a:r>
-            <a:endParaRPr lang="en-US" sz="1050" dirty="0"/>
+            <a:endParaRPr lang="en-US" sz="1400" dirty="0"/>
           </a:p>
         </p:txBody>
       </p:sp>
@@ -16289,14 +16294,14 @@
           <a:ln/>
         </p:spPr>
         <p:txBody>
-          <a:bodyPr wrap="square" lIns="0" tIns="0" rIns="0" bIns="0" rtlCol="0" anchor="ctr"/>
+          <a:bodyPr wrap="square" lIns="0" tIns="0" rIns="0" bIns="0" rtlCol="0" anchor="t"/>
           <a:lstStyle/>
           <a:p>
             <a:pPr algn="r" indent="0" marL="0">
               <a:buNone/>
             </a:pPr>
             <a:r>
-              <a:rPr lang="en-US" sz="1000" dirty="0">
+              <a:rPr lang="en-US" sz="1400" dirty="0">
                 <a:solidFill>
                   <a:srgbClr val="E8D8A8"/>
                 </a:solidFill>
@@ -16306,7 +16311,7 @@
               </a:rPr>
               <a:t>586 BCE</a:t>
             </a:r>
-            <a:endParaRPr lang="en-US" sz="1000" dirty="0"/>
+            <a:endParaRPr lang="en-US" sz="1400" dirty="0"/>
           </a:p>
         </p:txBody>
       </p:sp>
@@ -16328,14 +16333,14 @@
           <a:ln/>
         </p:spPr>
         <p:txBody>
-          <a:bodyPr wrap="square" lIns="0" tIns="0" rIns="0" bIns="0" rtlCol="0" anchor="ctr"/>
+          <a:bodyPr wrap="square" lIns="0" tIns="0" rIns="0" bIns="0" rtlCol="0" anchor="t"/>
           <a:lstStyle/>
           <a:p>
             <a:pPr indent="0" marL="0">
               <a:buNone/>
             </a:pPr>
             <a:r>
-              <a:rPr lang="en-US" sz="1050" dirty="0">
+              <a:rPr lang="en-US" sz="1400" dirty="0">
                 <a:solidFill>
                   <a:srgbClr val="FBF5E6"/>
                 </a:solidFill>
@@ -16345,7 +16350,7 @@
               </a:rPr>
               <a:t>薩卡達斯贏得皮提亞競賽 Sakadas wins Pythic Games</a:t>
             </a:r>
-            <a:endParaRPr lang="en-US" sz="1050" dirty="0"/>
+            <a:endParaRPr lang="en-US" sz="1400" dirty="0"/>
           </a:p>
         </p:txBody>
       </p:sp>
@@ -16387,14 +16392,14 @@
           <a:ln/>
         </p:spPr>
         <p:txBody>
-          <a:bodyPr wrap="square" lIns="0" tIns="0" rIns="0" bIns="0" rtlCol="0" anchor="ctr"/>
+          <a:bodyPr wrap="square" lIns="0" tIns="0" rIns="0" bIns="0" rtlCol="0" anchor="t"/>
           <a:lstStyle/>
           <a:p>
             <a:pPr algn="r" indent="0" marL="0">
               <a:buNone/>
             </a:pPr>
             <a:r>
-              <a:rPr lang="en-US" sz="1000" dirty="0">
+              <a:rPr lang="en-US" sz="1400" dirty="0">
                 <a:solidFill>
                   <a:srgbClr val="E8D8A8"/>
                 </a:solidFill>
@@ -16404,7 +16409,7 @@
               </a:rPr>
               <a:t>ca. 408 BCE</a:t>
             </a:r>
-            <a:endParaRPr lang="en-US" sz="1000" dirty="0"/>
+            <a:endParaRPr lang="en-US" sz="1400" dirty="0"/>
           </a:p>
         </p:txBody>
       </p:sp>
@@ -16426,14 +16431,14 @@
           <a:ln/>
         </p:spPr>
         <p:txBody>
-          <a:bodyPr wrap="square" lIns="0" tIns="0" rIns="0" bIns="0" rtlCol="0" anchor="ctr"/>
+          <a:bodyPr wrap="square" lIns="0" tIns="0" rIns="0" bIns="0" rtlCol="0" anchor="t"/>
           <a:lstStyle/>
           <a:p>
             <a:pPr indent="0" marL="0">
               <a:buNone/>
             </a:pPr>
             <a:r>
-              <a:rPr lang="en-US" sz="1050" dirty="0">
+              <a:rPr lang="en-US" sz="1400" dirty="0">
                 <a:solidFill>
                   <a:srgbClr val="FBF5E6"/>
                 </a:solidFill>
@@ -16443,7 +16448,7 @@
               </a:rPr>
               <a:t>歐里庇得斯《奧瑞斯提斯》附有音樂 Euripides' Orestes (with music)</a:t>
             </a:r>
-            <a:endParaRPr lang="en-US" sz="1050" dirty="0"/>
+            <a:endParaRPr lang="en-US" sz="1400" dirty="0"/>
           </a:p>
         </p:txBody>
       </p:sp>
@@ -16485,14 +16490,14 @@
           <a:ln/>
         </p:spPr>
         <p:txBody>
-          <a:bodyPr wrap="square" lIns="0" tIns="0" rIns="0" bIns="0" rtlCol="0" anchor="ctr"/>
+          <a:bodyPr wrap="square" lIns="0" tIns="0" rIns="0" bIns="0" rtlCol="0" anchor="t"/>
           <a:lstStyle/>
           <a:p>
             <a:pPr algn="r" indent="0" marL="0">
               <a:buNone/>
             </a:pPr>
             <a:r>
-              <a:rPr lang="en-US" sz="1000" dirty="0">
+              <a:rPr lang="en-US" sz="1400" dirty="0">
                 <a:solidFill>
                   <a:srgbClr val="E8D8A8"/>
                 </a:solidFill>
@@ -16502,7 +16507,7 @@
               </a:rPr>
               <a:t>ca. 330 BCE</a:t>
             </a:r>
-            <a:endParaRPr lang="en-US" sz="1000" dirty="0"/>
+            <a:endParaRPr lang="en-US" sz="1400" dirty="0"/>
           </a:p>
         </p:txBody>
       </p:sp>
@@ -16524,14 +16529,14 @@
           <a:ln/>
         </p:spPr>
         <p:txBody>
-          <a:bodyPr wrap="square" lIns="0" tIns="0" rIns="0" bIns="0" rtlCol="0" anchor="ctr"/>
+          <a:bodyPr wrap="square" lIns="0" tIns="0" rIns="0" bIns="0" rtlCol="0" anchor="t"/>
           <a:lstStyle/>
           <a:p>
             <a:pPr indent="0" marL="0">
               <a:buNone/>
             </a:pPr>
             <a:r>
-              <a:rPr lang="en-US" sz="1050" dirty="0">
+              <a:rPr lang="en-US" sz="1400" dirty="0">
                 <a:solidFill>
                   <a:srgbClr val="FBF5E6"/>
                 </a:solidFill>
@@ -16541,7 +16546,7 @@
               </a:rPr>
               <a:t>亞里斯多塞諾斯音樂理論 Aristoxenus, Harmonic Elements</a:t>
             </a:r>
-            <a:endParaRPr lang="en-US" sz="1050" dirty="0"/>
+            <a:endParaRPr lang="en-US" sz="1400" dirty="0"/>
           </a:p>
         </p:txBody>
       </p:sp>
@@ -16583,14 +16588,14 @@
           <a:ln/>
         </p:spPr>
         <p:txBody>
-          <a:bodyPr wrap="square" lIns="0" tIns="0" rIns="0" bIns="0" rtlCol="0" anchor="ctr"/>
+          <a:bodyPr wrap="square" lIns="0" tIns="0" rIns="0" bIns="0" rtlCol="0" anchor="t"/>
           <a:lstStyle/>
           <a:p>
             <a:pPr algn="r" indent="0" marL="0">
               <a:buNone/>
             </a:pPr>
             <a:r>
-              <a:rPr lang="en-US" sz="1000" dirty="0">
+              <a:rPr lang="en-US" sz="1400" dirty="0">
                 <a:solidFill>
                   <a:srgbClr val="E8D8A8"/>
                 </a:solidFill>
@@ -16600,7 +16605,7 @@
               </a:rPr>
               <a:t>146 BCE</a:t>
             </a:r>
-            <a:endParaRPr lang="en-US" sz="1000" dirty="0"/>
+            <a:endParaRPr lang="en-US" sz="1400" dirty="0"/>
           </a:p>
         </p:txBody>
       </p:sp>
@@ -16622,14 +16627,14 @@
           <a:ln/>
         </p:spPr>
         <p:txBody>
-          <a:bodyPr wrap="square" lIns="0" tIns="0" rIns="0" bIns="0" rtlCol="0" anchor="ctr"/>
+          <a:bodyPr wrap="square" lIns="0" tIns="0" rIns="0" bIns="0" rtlCol="0" anchor="t"/>
           <a:lstStyle/>
           <a:p>
             <a:pPr indent="0" marL="0">
               <a:buNone/>
             </a:pPr>
             <a:r>
-              <a:rPr lang="en-US" sz="1050" dirty="0">
+              <a:rPr lang="en-US" sz="1400" dirty="0">
                 <a:solidFill>
                   <a:srgbClr val="FBF5E6"/>
                 </a:solidFill>
@@ -16639,7 +16644,7 @@
               </a:rPr>
               <a:t>希臘成為羅馬行省 Greece becomes province of Rome</a:t>
             </a:r>
-            <a:endParaRPr lang="en-US" sz="1050" dirty="0"/>
+            <a:endParaRPr lang="en-US" sz="1400" dirty="0"/>
           </a:p>
         </p:txBody>
       </p:sp>
@@ -16681,14 +16686,14 @@
           <a:ln/>
         </p:spPr>
         <p:txBody>
-          <a:bodyPr wrap="square" lIns="0" tIns="0" rIns="0" bIns="0" rtlCol="0" anchor="ctr"/>
+          <a:bodyPr wrap="square" lIns="0" tIns="0" rIns="0" bIns="0" rtlCol="0" anchor="t"/>
           <a:lstStyle/>
           <a:p>
             <a:pPr algn="r" indent="0" marL="0">
               <a:buNone/>
             </a:pPr>
             <a:r>
-              <a:rPr lang="en-US" sz="1000" dirty="0">
+              <a:rPr lang="en-US" sz="1400" dirty="0">
                 <a:solidFill>
                   <a:srgbClr val="E8D8A8"/>
                 </a:solidFill>
@@ -16698,7 +16703,7 @@
               </a:rPr>
               <a:t>ca. 1st cent. CE</a:t>
             </a:r>
-            <a:endParaRPr lang="en-US" sz="1000" dirty="0"/>
+            <a:endParaRPr lang="en-US" sz="1400" dirty="0"/>
           </a:p>
         </p:txBody>
       </p:sp>
@@ -16720,14 +16725,14 @@
           <a:ln/>
         </p:spPr>
         <p:txBody>
-          <a:bodyPr wrap="square" lIns="0" tIns="0" rIns="0" bIns="0" rtlCol="0" anchor="ctr"/>
+          <a:bodyPr wrap="square" lIns="0" tIns="0" rIns="0" bIns="0" rtlCol="0" anchor="t"/>
           <a:lstStyle/>
           <a:p>
             <a:pPr indent="0" marL="0">
               <a:buNone/>
             </a:pPr>
             <a:r>
-              <a:rPr lang="en-US" sz="1050" dirty="0">
+              <a:rPr lang="en-US" sz="1400" dirty="0">
                 <a:solidFill>
                   <a:srgbClr val="FBF5E6"/>
                 </a:solidFill>
@@ -16737,7 +16742,7 @@
               </a:rPr>
               <a:t>Seikilos 墓誌銘 Epitaph of Seikilos (oldest complete composition)</a:t>
             </a:r>
-            <a:endParaRPr lang="en-US" sz="1050" dirty="0"/>
+            <a:endParaRPr lang="en-US" sz="1400" dirty="0"/>
           </a:p>
         </p:txBody>
       </p:sp>

--- a/Ch01_Music_in_Antiquity.pptx
+++ b/Ch01_Music_in_Antiquity.pptx
@@ -5575,7 +5575,7 @@
         <p:spPr>
           <a:xfrm>
             <a:off x="365760" y="640080"/>
-            <a:ext cx="8412480" cy="320040"/>
+            <a:ext cx="8412480" cy="475488"/>
           </a:xfrm>
           <a:prstGeom prst="rect">
             <a:avLst/>
@@ -5599,7 +5599,24 @@
                 <a:ea typeface="Calibri" pitchFamily="34" charset="-122"/>
                 <a:cs typeface="Calibri" pitchFamily="34" charset="-120"/>
               </a:rPr>
-              <a:t>希臘哲學家相信音樂能直接影響人的性格與道德 · Greek philosophers believed music could affect ethical character</a:t>
+              <a:t>希臘哲學家相信音樂能直接影響人的性格與道德</a:t>
+            </a:r>
+            <a:endParaRPr lang="en-US" sz="1400" dirty="0"/>
+          </a:p>
+          <a:p>
+            <a:pPr indent="0" marL="0">
+              <a:buNone/>
+            </a:pPr>
+            <a:r>
+              <a:rPr lang="en-US" sz="1400" i="1" dirty="0">
+                <a:solidFill>
+                  <a:srgbClr val="5C3A28"/>
+                </a:solidFill>
+                <a:latin typeface="Calibri" pitchFamily="34" charset="0"/>
+                <a:ea typeface="Calibri" pitchFamily="34" charset="-122"/>
+                <a:cs typeface="Calibri" pitchFamily="34" charset="-120"/>
+              </a:rPr>
+              <a:t>Greek philosophers believed music could affect ethical character</a:t>
             </a:r>
             <a:endParaRPr lang="en-US" sz="1400" dirty="0"/>
           </a:p>
@@ -5613,7 +5630,7 @@
         </p:nvSpPr>
         <p:spPr>
           <a:xfrm>
-            <a:off x="365760" y="978408"/>
+            <a:off x="365760" y="1133856"/>
             <a:ext cx="8412480" cy="27432"/>
           </a:xfrm>
           <a:prstGeom prst="rect">
@@ -5633,8 +5650,8 @@
         </p:nvSpPr>
         <p:spPr>
           <a:xfrm>
-            <a:off x="320040" y="1051560"/>
-            <a:ext cx="4114800" cy="3749040"/>
+            <a:off x="320040" y="1207008"/>
+            <a:ext cx="4114800" cy="3703320"/>
           </a:xfrm>
           <a:prstGeom prst="rect">
             <a:avLst/>
@@ -5653,7 +5670,7 @@
         </p:nvSpPr>
         <p:spPr>
           <a:xfrm>
-            <a:off x="411480" y="1143000"/>
+            <a:off x="411480" y="1298448"/>
             <a:ext cx="3931920" cy="411480"/>
           </a:xfrm>
           <a:prstGeom prst="rect">
@@ -5692,7 +5709,7 @@
         </p:nvSpPr>
         <p:spPr>
           <a:xfrm>
-            <a:off x="411480" y="1554480"/>
+            <a:off x="411480" y="1709928"/>
             <a:ext cx="3931920" cy="292608"/>
           </a:xfrm>
           <a:prstGeom prst="rect">
@@ -5731,7 +5748,7 @@
         </p:nvSpPr>
         <p:spPr>
           <a:xfrm>
-            <a:off x="594360" y="1874520"/>
+            <a:off x="594360" y="2029968"/>
             <a:ext cx="3566160" cy="27432"/>
           </a:xfrm>
           <a:prstGeom prst="rect">
@@ -5751,8 +5768,8 @@
         </p:nvSpPr>
         <p:spPr>
           <a:xfrm>
-            <a:off x="411480" y="1920240"/>
-            <a:ext cx="3931920" cy="2834640"/>
+            <a:off x="411480" y="2084832"/>
+            <a:ext cx="3931920" cy="2761488"/>
           </a:xfrm>
           <a:prstGeom prst="rect">
             <a:avLst/>
@@ -5941,8 +5958,8 @@
         </p:nvSpPr>
         <p:spPr>
           <a:xfrm>
-            <a:off x="4709160" y="1051560"/>
-            <a:ext cx="4114800" cy="3749040"/>
+            <a:off x="4709160" y="1207008"/>
+            <a:ext cx="4114800" cy="3703320"/>
           </a:xfrm>
           <a:prstGeom prst="rect">
             <a:avLst/>
@@ -5961,7 +5978,7 @@
         </p:nvSpPr>
         <p:spPr>
           <a:xfrm>
-            <a:off x="4800600" y="1143000"/>
+            <a:off x="4800600" y="1298448"/>
             <a:ext cx="3931920" cy="411480"/>
           </a:xfrm>
           <a:prstGeom prst="rect">
@@ -6000,7 +6017,7 @@
         </p:nvSpPr>
         <p:spPr>
           <a:xfrm>
-            <a:off x="4800600" y="1554480"/>
+            <a:off x="4800600" y="1709928"/>
             <a:ext cx="3931920" cy="292608"/>
           </a:xfrm>
           <a:prstGeom prst="rect">
@@ -6039,7 +6056,7 @@
         </p:nvSpPr>
         <p:spPr>
           <a:xfrm>
-            <a:off x="4983480" y="1874520"/>
+            <a:off x="4983480" y="2029968"/>
             <a:ext cx="3566160" cy="27432"/>
           </a:xfrm>
           <a:prstGeom prst="rect">
@@ -6059,8 +6076,8 @@
         </p:nvSpPr>
         <p:spPr>
           <a:xfrm>
-            <a:off x="4800600" y="1920240"/>
-            <a:ext cx="3931920" cy="2834640"/>
+            <a:off x="4800600" y="2084832"/>
+            <a:ext cx="3931920" cy="2761488"/>
           </a:xfrm>
           <a:prstGeom prst="rect">
             <a:avLst/>
@@ -12302,7 +12319,7 @@
         <p:spPr>
           <a:xfrm>
             <a:off x="5760720" y="822960"/>
-            <a:ext cx="3017520" cy="4023360"/>
+            <a:ext cx="3017520" cy="4160520"/>
           </a:xfrm>
           <a:prstGeom prst="rect">
             <a:avLst/>
@@ -12478,8 +12495,8 @@
         </p:nvSpPr>
         <p:spPr>
           <a:xfrm>
-            <a:off x="5852160" y="3657600"/>
-            <a:ext cx="2834640" cy="320040"/>
+            <a:off x="5852160" y="3520440"/>
+            <a:ext cx="2834640" cy="274320"/>
           </a:xfrm>
           <a:prstGeom prst="rect">
             <a:avLst/>
@@ -12514,8 +12531,8 @@
         </p:nvSpPr>
         <p:spPr>
           <a:xfrm>
-            <a:off x="5852160" y="3977640"/>
-            <a:ext cx="2834640" cy="822960"/>
+            <a:off x="5852160" y="3822192"/>
+            <a:ext cx="2834640" cy="960120"/>
           </a:xfrm>
           <a:prstGeom prst="rect">
             <a:avLst/>
@@ -14094,8 +14111,8 @@
         </p:nvSpPr>
         <p:spPr>
           <a:xfrm>
-            <a:off x="365760" y="4663440"/>
-            <a:ext cx="8412480" cy="320040"/>
+            <a:off x="365760" y="4572000"/>
+            <a:ext cx="8412480" cy="438912"/>
           </a:xfrm>
           <a:prstGeom prst="rect">
             <a:avLst/>
@@ -14119,24 +14136,7 @@
                 <a:ea typeface="Calibri" pitchFamily="34" charset="-122"/>
                 <a:cs typeface="Calibri" pitchFamily="34" charset="-120"/>
               </a:rPr>
-              <a:t>烏爾出土的豎琴（ca. 2500 BCE）是現存最早的撥弦樂器實物之一</a:t>
-            </a:r>
-            <a:endParaRPr lang="en-US" sz="1400" dirty="0"/>
-          </a:p>
-          <a:p>
-            <a:pPr indent="0" marL="0">
-              <a:buNone/>
-            </a:pPr>
-            <a:r>
-              <a:rPr lang="en-US" sz="1400" i="1" dirty="0">
-                <a:solidFill>
-                  <a:srgbClr val="5C3A28"/>
-                </a:solidFill>
-                <a:latin typeface="Calibri" pitchFamily="34" charset="0"/>
-                <a:ea typeface="Calibri" pitchFamily="34" charset="-122"/>
-                <a:cs typeface="Calibri" pitchFamily="34" charset="-120"/>
-              </a:rPr>
-              <a:t>The lyres and harps from Ur (ca. 2500 BCE) are among the earliest surviving plucked string instruments.</a:t>
+              <a:t>烏爾出土的豎琴（ca. 2500 BCE）是現存最早的撥弦樂器實物之一 · The lyres and harps from Ur are among the earliest surviving plucked string instruments</a:t>
             </a:r>
             <a:endParaRPr lang="en-US" sz="1400" dirty="0"/>
           </a:p>

--- a/Ch01_Music_in_Antiquity.pptx
+++ b/Ch01_Music_in_Antiquity.pptx
@@ -9939,7 +9939,7 @@
                 <a:ea typeface="Calibri" pitchFamily="34" charset="-122"/>
                 <a:cs typeface="Calibri" pitchFamily="34" charset="-120"/>
               </a:rPr>
-              <a:t>古羅馬音樂重建 Synaulia（弦樂卷）: youtube.com/watch?v=zT6dOMKh3-w</a:t>
+              <a:t>古羅馬音樂重建 Synaulia（弦樂卷）: youtube.com/watch?v=HlFpiNAOdUo</a:t>
             </a:r>
             <a:endParaRPr lang="en-US" sz="1400" dirty="0"/>
           </a:p>
